--- a/南科大/SE2/presentation.pptx
+++ b/南科大/SE2/presentation.pptx
@@ -10,6 +10,11 @@
     <p:sldId id="258" r:id="rId5"/>
     <p:sldId id="259" r:id="rId6"/>
     <p:sldId id="260" r:id="rId7"/>
+    <p:sldId id="261" r:id="rId8"/>
+    <p:sldId id="262" r:id="rId9"/>
+    <p:sldId id="263" r:id="rId10"/>
+    <p:sldId id="265" r:id="rId11"/>
+    <p:sldId id="264" r:id="rId12"/>
   </p:sldIdLst>
   <p:sldSz cx="12192000" cy="6858000"/>
   <p:notesSz cx="6858000" cy="9144000"/>
@@ -111,7 +116,7 @@
   <p:extLst>
     <p:ext uri="{EFAFB233-063F-42B5-8137-9DF3F51BA10A}">
       <p15:sldGuideLst xmlns:p15="http://schemas.microsoft.com/office/powerpoint/2012/main">
-        <p15:guide id="1" orient="horz" pos="2160" userDrawn="1">
+        <p15:guide id="1" orient="horz" pos="2212" userDrawn="1">
           <p15:clr>
             <a:srgbClr val="A4A3A4"/>
           </p15:clr>
@@ -3107,7 +3112,6 @@
             <a:pPr algn="ctr"/>
             <a:r>
               <a:rPr lang="en-US" altLang="zh-CN" sz="5400">
-                <a:ln/>
                 <a:solidFill>
                   <a:schemeClr val="tx1"/>
                 </a:solidFill>
@@ -3122,7 +3126,6 @@
               <a:t>Differences between </a:t>
             </a:r>
             <a:endParaRPr lang="en-US" altLang="zh-CN" sz="5400">
-              <a:ln/>
               <a:solidFill>
                 <a:schemeClr val="tx1"/>
               </a:solidFill>
@@ -3139,7 +3142,6 @@
             <a:pPr algn="ctr"/>
             <a:r>
               <a:rPr lang="en-US" altLang="zh-CN" sz="5400">
-                <a:ln/>
                 <a:solidFill>
                   <a:schemeClr val="tx1"/>
                 </a:solidFill>
@@ -3154,7 +3156,6 @@
               <a:t>Northern and Southern Dialects </a:t>
             </a:r>
             <a:endParaRPr lang="en-US" altLang="zh-CN" sz="5400">
-              <a:ln/>
               <a:solidFill>
                 <a:schemeClr val="tx1"/>
               </a:solidFill>
@@ -3171,7 +3172,6 @@
             <a:pPr algn="ctr"/>
             <a:r>
               <a:rPr lang="en-US" altLang="zh-CN" sz="5400">
-                <a:ln/>
                 <a:solidFill>
                   <a:schemeClr val="tx1"/>
                 </a:solidFill>
@@ -3186,7 +3186,6 @@
               <a:t>and A Special Case</a:t>
             </a:r>
             <a:endParaRPr lang="en-US" altLang="zh-CN" sz="5400">
-              <a:ln/>
               <a:solidFill>
                 <a:schemeClr val="tx1"/>
               </a:solidFill>
@@ -3228,7 +3227,6 @@
           <a:p>
             <a:r>
               <a:rPr lang="zh-CN" altLang="en-US" sz="3200">
-                <a:ln/>
                 <a:solidFill>
                   <a:schemeClr val="tx1"/>
                 </a:solidFill>
@@ -3243,7 +3241,6 @@
               <a:t>刘亦优</a:t>
             </a:r>
             <a:endParaRPr lang="zh-CN" altLang="en-US" sz="3200">
-              <a:ln/>
               <a:solidFill>
                 <a:schemeClr val="tx1"/>
               </a:solidFill>
@@ -3269,6 +3266,57 @@
 </p:sld>
 </file>
 
+<file path=ppt/slides/slide10.xml><?xml version="1.0" encoding="utf-8"?>
+<p:sld xmlns:a="http://schemas.openxmlformats.org/drawingml/2006/main" xmlns:r="http://schemas.openxmlformats.org/officeDocument/2006/relationships" xmlns:p="http://schemas.openxmlformats.org/presentationml/2006/main">
+  <p:cSld>
+    <p:spTree>
+      <p:nvGrpSpPr>
+        <p:cNvPr id="1" name=""/>
+        <p:cNvGrpSpPr/>
+        <p:nvPr/>
+      </p:nvGrpSpPr>
+      <p:grpSpPr/>
+      <p:sp>
+        <p:nvSpPr>
+          <p:cNvPr id="2" name="文本框 1"/>
+          <p:cNvSpPr txBox="1"/>
+          <p:nvPr/>
+        </p:nvSpPr>
+        <p:spPr>
+          <a:xfrm>
+            <a:off x="3049905" y="2879725"/>
+            <a:ext cx="6092825" cy="706755"/>
+          </a:xfrm>
+          <a:prstGeom prst="rect">
+            <a:avLst/>
+          </a:prstGeom>
+          <a:noFill/>
+        </p:spPr>
+        <p:txBody>
+          <a:bodyPr wrap="square" rtlCol="0">
+            <a:spAutoFit/>
+          </a:bodyPr>
+          <a:p>
+            <a:pPr algn="ctr"/>
+            <a:r>
+              <a:rPr lang="en-US" altLang="zh-CN" sz="4000"/>
+              <a:t>Thank you for listening!</a:t>
+            </a:r>
+            <a:endParaRPr lang="en-US" altLang="zh-CN" sz="4000"/>
+          </a:p>
+        </p:txBody>
+      </p:sp>
+    </p:spTree>
+    <p:custDataLst>
+      <p:tags r:id="rId1"/>
+    </p:custDataLst>
+  </p:cSld>
+  <p:clrMapOvr>
+    <a:masterClrMapping/>
+  </p:clrMapOvr>
+</p:sld>
+</file>
+
 <file path=ppt/slides/slide2.xml><?xml version="1.0" encoding="utf-8"?>
 <p:sld xmlns:a="http://schemas.openxmlformats.org/drawingml/2006/main" xmlns:r="http://schemas.openxmlformats.org/officeDocument/2006/relationships" xmlns:p="http://schemas.openxmlformats.org/presentationml/2006/main">
   <p:cSld>
@@ -3287,7 +3335,7 @@
         </p:nvSpPr>
         <p:spPr>
           <a:xfrm>
-            <a:off x="1229360" y="3376295"/>
+            <a:off x="1229360" y="2214245"/>
             <a:ext cx="1058545" cy="583565"/>
           </a:xfrm>
           <a:prstGeom prst="rect">
@@ -3308,9 +3356,96 @@
           </a:p>
         </p:txBody>
       </p:sp>
+      <p:sp>
+        <p:nvSpPr>
+          <p:cNvPr id="4" name="文本框 3"/>
+          <p:cNvSpPr txBox="1"/>
+          <p:nvPr/>
+        </p:nvSpPr>
+        <p:spPr>
+          <a:xfrm>
+            <a:off x="3741420" y="2214245"/>
+            <a:ext cx="1431290" cy="583565"/>
+          </a:xfrm>
+          <a:prstGeom prst="rect">
+            <a:avLst/>
+          </a:prstGeom>
+          <a:noFill/>
+        </p:spPr>
+        <p:txBody>
+          <a:bodyPr wrap="square" rtlCol="0">
+            <a:spAutoFit/>
+          </a:bodyPr>
+          <a:p>
+            <a:r>
+              <a:rPr lang="zh-CN" altLang="en-US" sz="3200"/>
+              <a:t>南京话</a:t>
+            </a:r>
+            <a:endParaRPr lang="zh-CN" altLang="en-US" sz="3200"/>
+          </a:p>
+        </p:txBody>
+      </p:sp>
+      <p:sp>
+        <p:nvSpPr>
+          <p:cNvPr id="6" name="文本框 5"/>
+          <p:cNvSpPr txBox="1"/>
+          <p:nvPr/>
+        </p:nvSpPr>
+        <p:spPr>
+          <a:xfrm>
+            <a:off x="6626225" y="2214245"/>
+            <a:ext cx="1431290" cy="583565"/>
+          </a:xfrm>
+          <a:prstGeom prst="rect">
+            <a:avLst/>
+          </a:prstGeom>
+          <a:noFill/>
+        </p:spPr>
+        <p:txBody>
+          <a:bodyPr wrap="square" rtlCol="0">
+            <a:spAutoFit/>
+          </a:bodyPr>
+          <a:p>
+            <a:r>
+              <a:rPr lang="zh-CN" altLang="en-US" sz="3200"/>
+              <a:t>闽南语</a:t>
+            </a:r>
+            <a:endParaRPr lang="zh-CN" altLang="en-US" sz="3200"/>
+          </a:p>
+        </p:txBody>
+      </p:sp>
+      <p:sp>
+        <p:nvSpPr>
+          <p:cNvPr id="8" name="文本框 7"/>
+          <p:cNvSpPr txBox="1"/>
+          <p:nvPr/>
+        </p:nvSpPr>
+        <p:spPr>
+          <a:xfrm>
+            <a:off x="9511030" y="2214245"/>
+            <a:ext cx="1431290" cy="583565"/>
+          </a:xfrm>
+          <a:prstGeom prst="rect">
+            <a:avLst/>
+          </a:prstGeom>
+          <a:noFill/>
+        </p:spPr>
+        <p:txBody>
+          <a:bodyPr wrap="square" rtlCol="0">
+            <a:spAutoFit/>
+          </a:bodyPr>
+          <a:p>
+            <a:r>
+              <a:rPr lang="zh-CN" altLang="en-US" sz="3200"/>
+              <a:t>四川话</a:t>
+            </a:r>
+            <a:endParaRPr lang="zh-CN" altLang="en-US" sz="3200"/>
+          </a:p>
+        </p:txBody>
+      </p:sp>
       <p:pic>
         <p:nvPicPr>
-          <p:cNvPr id="3" name="粤语">
+          <p:cNvPr id="9" name="四川话">
             <a:hlinkClick r:id="" action="ppaction://media"/>
           </p:cNvPr>
           <p:cNvPicPr/>
@@ -3318,7 +3453,7 @@
             <a:audioFile r:link="rId1"/>
             <p:extLst>
               <p:ext uri="{DAA4B4D4-6D71-4841-9C94-3DE7FCFB9230}">
-                <p14:media xmlns:p14="http://schemas.microsoft.com/office/powerpoint/2010/main" r:link="rId2"/>
+                <p14:media xmlns:p14="http://schemas.microsoft.com/office/powerpoint/2010/main" r:embed="rId2"/>
               </p:ext>
             </p:extLst>
           </p:nvPr>
@@ -3331,187 +3466,7 @@
         </p:blipFill>
         <p:spPr>
           <a:xfrm>
-            <a:off x="1552575" y="4150360"/>
-            <a:ext cx="412750" cy="412750"/>
-          </a:xfrm>
-          <a:prstGeom prst="rect">
-            <a:avLst/>
-          </a:prstGeom>
-        </p:spPr>
-      </p:pic>
-      <p:sp>
-        <p:nvSpPr>
-          <p:cNvPr id="4" name="文本框 3"/>
-          <p:cNvSpPr txBox="1"/>
-          <p:nvPr/>
-        </p:nvSpPr>
-        <p:spPr>
-          <a:xfrm>
-            <a:off x="3741420" y="3376295"/>
-            <a:ext cx="1431290" cy="583565"/>
-          </a:xfrm>
-          <a:prstGeom prst="rect">
-            <a:avLst/>
-          </a:prstGeom>
-          <a:noFill/>
-        </p:spPr>
-        <p:txBody>
-          <a:bodyPr wrap="square" rtlCol="0">
-            <a:spAutoFit/>
-          </a:bodyPr>
-          <a:p>
-            <a:r>
-              <a:rPr lang="zh-CN" altLang="en-US" sz="3200"/>
-              <a:t>南京话</a:t>
-            </a:r>
-            <a:endParaRPr lang="zh-CN" altLang="en-US" sz="3200"/>
-          </a:p>
-        </p:txBody>
-      </p:sp>
-      <p:pic>
-        <p:nvPicPr>
-          <p:cNvPr id="5" name="南京话">
-            <a:hlinkClick r:id="" action="ppaction://media"/>
-          </p:cNvPr>
-          <p:cNvPicPr/>
-          <p:nvPr>
-            <a:audioFile r:link="rId4"/>
-            <p:extLst>
-              <p:ext uri="{DAA4B4D4-6D71-4841-9C94-3DE7FCFB9230}">
-                <p14:media xmlns:p14="http://schemas.microsoft.com/office/powerpoint/2010/main" r:link="rId5"/>
-              </p:ext>
-            </p:extLst>
-          </p:nvPr>
-        </p:nvPicPr>
-        <p:blipFill>
-          <a:blip r:embed="rId3"/>
-          <a:stretch>
-            <a:fillRect/>
-          </a:stretch>
-        </p:blipFill>
-        <p:spPr>
-          <a:xfrm>
-            <a:off x="4250690" y="4150360"/>
-            <a:ext cx="412750" cy="412750"/>
-          </a:xfrm>
-          <a:prstGeom prst="rect">
-            <a:avLst/>
-          </a:prstGeom>
-        </p:spPr>
-      </p:pic>
-      <p:sp>
-        <p:nvSpPr>
-          <p:cNvPr id="6" name="文本框 5"/>
-          <p:cNvSpPr txBox="1"/>
-          <p:nvPr/>
-        </p:nvSpPr>
-        <p:spPr>
-          <a:xfrm>
-            <a:off x="6626225" y="3376295"/>
-            <a:ext cx="1431290" cy="583565"/>
-          </a:xfrm>
-          <a:prstGeom prst="rect">
-            <a:avLst/>
-          </a:prstGeom>
-          <a:noFill/>
-        </p:spPr>
-        <p:txBody>
-          <a:bodyPr wrap="square" rtlCol="0">
-            <a:spAutoFit/>
-          </a:bodyPr>
-          <a:p>
-            <a:r>
-              <a:rPr lang="zh-CN" altLang="en-US" sz="3200"/>
-              <a:t>闽南语</a:t>
-            </a:r>
-            <a:endParaRPr lang="zh-CN" altLang="en-US" sz="3200"/>
-          </a:p>
-        </p:txBody>
-      </p:sp>
-      <p:pic>
-        <p:nvPicPr>
-          <p:cNvPr id="7" name="闽南语">
-            <a:hlinkClick r:id="" action="ppaction://media"/>
-          </p:cNvPr>
-          <p:cNvPicPr/>
-          <p:nvPr>
-            <a:audioFile r:link="rId6"/>
-            <p:extLst>
-              <p:ext uri="{DAA4B4D4-6D71-4841-9C94-3DE7FCFB9230}">
-                <p14:media xmlns:p14="http://schemas.microsoft.com/office/powerpoint/2010/main" r:link="rId7"/>
-              </p:ext>
-            </p:extLst>
-          </p:nvPr>
-        </p:nvPicPr>
-        <p:blipFill>
-          <a:blip r:embed="rId3"/>
-          <a:stretch>
-            <a:fillRect/>
-          </a:stretch>
-        </p:blipFill>
-        <p:spPr>
-          <a:xfrm>
-            <a:off x="7135495" y="4150360"/>
-            <a:ext cx="412750" cy="412750"/>
-          </a:xfrm>
-          <a:prstGeom prst="rect">
-            <a:avLst/>
-          </a:prstGeom>
-        </p:spPr>
-      </p:pic>
-      <p:sp>
-        <p:nvSpPr>
-          <p:cNvPr id="8" name="文本框 7"/>
-          <p:cNvSpPr txBox="1"/>
-          <p:nvPr/>
-        </p:nvSpPr>
-        <p:spPr>
-          <a:xfrm>
-            <a:off x="9511030" y="3376295"/>
-            <a:ext cx="1431290" cy="583565"/>
-          </a:xfrm>
-          <a:prstGeom prst="rect">
-            <a:avLst/>
-          </a:prstGeom>
-          <a:noFill/>
-        </p:spPr>
-        <p:txBody>
-          <a:bodyPr wrap="square" rtlCol="0">
-            <a:spAutoFit/>
-          </a:bodyPr>
-          <a:p>
-            <a:r>
-              <a:rPr lang="zh-CN" altLang="en-US" sz="3200"/>
-              <a:t>四川话</a:t>
-            </a:r>
-            <a:endParaRPr lang="zh-CN" altLang="en-US" sz="3200"/>
-          </a:p>
-        </p:txBody>
-      </p:sp>
-      <p:pic>
-        <p:nvPicPr>
-          <p:cNvPr id="9" name="四川话">
-            <a:hlinkClick r:id="" action="ppaction://media"/>
-          </p:cNvPr>
-          <p:cNvPicPr/>
-          <p:nvPr>
-            <a:audioFile r:link="rId8"/>
-            <p:extLst>
-              <p:ext uri="{DAA4B4D4-6D71-4841-9C94-3DE7FCFB9230}">
-                <p14:media xmlns:p14="http://schemas.microsoft.com/office/powerpoint/2010/main" r:embed="rId9"/>
-              </p:ext>
-            </p:extLst>
-          </p:nvPr>
-        </p:nvPicPr>
-        <p:blipFill>
-          <a:blip r:embed="rId3"/>
-          <a:stretch>
-            <a:fillRect/>
-          </a:stretch>
-        </p:blipFill>
-        <p:spPr>
-          <a:xfrm>
-            <a:off x="10020300" y="4150360"/>
+            <a:off x="10020300" y="2988310"/>
             <a:ext cx="412750" cy="412750"/>
           </a:xfrm>
           <a:prstGeom prst="rect">
@@ -3530,7 +3485,7 @@
         </p:nvCxnSpPr>
         <p:spPr>
           <a:xfrm flipH="1" flipV="1">
-            <a:off x="8943340" y="2498725"/>
+            <a:off x="8943340" y="1336675"/>
             <a:ext cx="1283335" cy="877570"/>
           </a:xfrm>
           <a:prstGeom prst="straightConnector1">
@@ -3567,7 +3522,7 @@
         </p:nvSpPr>
         <p:spPr>
           <a:xfrm>
-            <a:off x="6096000" y="1915160"/>
+            <a:off x="6096000" y="753110"/>
             <a:ext cx="5694680" cy="583565"/>
           </a:xfrm>
           <a:prstGeom prst="rect">
@@ -3588,6 +3543,137 @@
           </a:p>
         </p:txBody>
       </p:sp>
+      <p:sp>
+        <p:nvSpPr>
+          <p:cNvPr id="16" name="文本框 15"/>
+          <p:cNvSpPr txBox="1"/>
+          <p:nvPr/>
+        </p:nvSpPr>
+        <p:spPr>
+          <a:xfrm>
+            <a:off x="2388235" y="4152900"/>
+            <a:ext cx="7632065" cy="1198880"/>
+          </a:xfrm>
+          <a:prstGeom prst="rect">
+            <a:avLst/>
+          </a:prstGeom>
+          <a:noFill/>
+        </p:spPr>
+        <p:txBody>
+          <a:bodyPr wrap="square" rtlCol="0">
+            <a:spAutoFit/>
+          </a:bodyPr>
+          <a:p>
+            <a:pPr algn="ctr"/>
+            <a:r>
+              <a:rPr lang="en-US" altLang="zh-CN" sz="3600"/>
+              <a:t>The biggest difference: </a:t>
+            </a:r>
+            <a:endParaRPr lang="en-US" altLang="zh-CN" sz="3600"/>
+          </a:p>
+          <a:p>
+            <a:pPr algn="ctr"/>
+            <a:r>
+              <a:rPr lang="en-US" altLang="zh-CN" sz="3600"/>
+              <a:t>How easily we can understand them.</a:t>
+            </a:r>
+            <a:endParaRPr lang="en-US" altLang="zh-CN" sz="3600"/>
+          </a:p>
+        </p:txBody>
+      </p:sp>
+      <p:pic>
+        <p:nvPicPr>
+          <p:cNvPr id="18" name="粤语">
+            <a:hlinkClick r:id="" action="ppaction://media"/>
+          </p:cNvPr>
+          <p:cNvPicPr/>
+          <p:nvPr>
+            <a:audioFile r:link="rId4"/>
+            <p:extLst>
+              <p:ext uri="{DAA4B4D4-6D71-4841-9C94-3DE7FCFB9230}">
+                <p14:media xmlns:p14="http://schemas.microsoft.com/office/powerpoint/2010/main" r:embed="rId5"/>
+              </p:ext>
+            </p:extLst>
+          </p:nvPr>
+        </p:nvPicPr>
+        <p:blipFill>
+          <a:blip r:embed="rId3"/>
+          <a:stretch>
+            <a:fillRect/>
+          </a:stretch>
+        </p:blipFill>
+        <p:spPr>
+          <a:xfrm>
+            <a:off x="1551940" y="2988310"/>
+            <a:ext cx="412750" cy="412750"/>
+          </a:xfrm>
+          <a:prstGeom prst="rect">
+            <a:avLst/>
+          </a:prstGeom>
+        </p:spPr>
+      </p:pic>
+      <p:pic>
+        <p:nvPicPr>
+          <p:cNvPr id="19" name="南京话">
+            <a:hlinkClick r:id="" action="ppaction://media"/>
+          </p:cNvPr>
+          <p:cNvPicPr/>
+          <p:nvPr>
+            <a:audioFile r:link="rId6"/>
+            <p:extLst>
+              <p:ext uri="{DAA4B4D4-6D71-4841-9C94-3DE7FCFB9230}">
+                <p14:media xmlns:p14="http://schemas.microsoft.com/office/powerpoint/2010/main" r:embed="rId7"/>
+              </p:ext>
+            </p:extLst>
+          </p:nvPr>
+        </p:nvPicPr>
+        <p:blipFill>
+          <a:blip r:embed="rId3"/>
+          <a:stretch>
+            <a:fillRect/>
+          </a:stretch>
+        </p:blipFill>
+        <p:spPr>
+          <a:xfrm>
+            <a:off x="4250690" y="2988310"/>
+            <a:ext cx="412750" cy="412750"/>
+          </a:xfrm>
+          <a:prstGeom prst="rect">
+            <a:avLst/>
+          </a:prstGeom>
+        </p:spPr>
+      </p:pic>
+      <p:pic>
+        <p:nvPicPr>
+          <p:cNvPr id="20" name="闽南语">
+            <a:hlinkClick r:id="" action="ppaction://media"/>
+          </p:cNvPr>
+          <p:cNvPicPr/>
+          <p:nvPr>
+            <a:audioFile r:link="rId8"/>
+            <p:extLst>
+              <p:ext uri="{DAA4B4D4-6D71-4841-9C94-3DE7FCFB9230}">
+                <p14:media xmlns:p14="http://schemas.microsoft.com/office/powerpoint/2010/main" r:embed="rId9"/>
+              </p:ext>
+            </p:extLst>
+          </p:nvPr>
+        </p:nvPicPr>
+        <p:blipFill>
+          <a:blip r:embed="rId3"/>
+          <a:stretch>
+            <a:fillRect/>
+          </a:stretch>
+        </p:blipFill>
+        <p:spPr>
+          <a:xfrm>
+            <a:off x="7135495" y="2988310"/>
+            <a:ext cx="412750" cy="412750"/>
+          </a:xfrm>
+          <a:prstGeom prst="rect">
+            <a:avLst/>
+          </a:prstGeom>
+        </p:spPr>
+      </p:pic>
     </p:spTree>
     <p:custDataLst>
       <p:tags r:id="rId10"/>
@@ -3608,9 +3694,6 @@
                     <p:cTn id="3" fill="hold">
                       <p:stCondLst>
                         <p:cond delay="indefinite"/>
-                        <p:cond evt="onBegin" delay="0">
-                          <p:tn val="2"/>
-                        </p:cond>
                       </p:stCondLst>
                       <p:childTnLst>
                         <p:par>
@@ -3620,127 +3703,14 @@
                             </p:stCondLst>
                             <p:childTnLst>
                               <p:par>
-                                <p:cTn id="5" presetID="1" presetClass="mediacall" presetSubtype="0" fill="hold" nodeType="afterEffect">
-                                  <p:stCondLst>
-                                    <p:cond delay="0"/>
-                                  </p:stCondLst>
-                                  <p:childTnLst>
-                                    <p:cmd type="call" cmd="playFrom(0.0)">
-                                      <p:cBhvr additive="base">
-                                        <p:cTn id="6" dur="1248" fill="hold"/>
-                                        <p:tgtEl>
-                                          <p:spTgt spid="3"/>
-                                        </p:tgtEl>
-                                      </p:cBhvr>
-                                    </p:cmd>
-                                  </p:childTnLst>
-                                </p:cTn>
-                              </p:par>
-                            </p:childTnLst>
-                          </p:cTn>
-                        </p:par>
-                        <p:par>
-                          <p:cTn id="7" fill="hold">
-                            <p:stCondLst>
-                              <p:cond delay="1500"/>
-                            </p:stCondLst>
-                            <p:childTnLst>
-                              <p:par>
-                                <p:cTn id="8" presetID="1" presetClass="mediacall" presetSubtype="0" fill="hold" nodeType="afterEffect">
-                                  <p:stCondLst>
-                                    <p:cond delay="0"/>
-                                  </p:stCondLst>
-                                  <p:childTnLst>
-                                    <p:cmd type="call" cmd="playFrom(0.0)">
-                                      <p:cBhvr additive="base">
-                                        <p:cTn id="9" dur="880" fill="hold"/>
-                                        <p:tgtEl>
-                                          <p:spTgt spid="5"/>
-                                        </p:tgtEl>
-                                      </p:cBhvr>
-                                    </p:cmd>
-                                  </p:childTnLst>
-                                </p:cTn>
-                              </p:par>
-                            </p:childTnLst>
-                          </p:cTn>
-                        </p:par>
-                        <p:par>
-                          <p:cTn id="10" fill="hold">
-                            <p:stCondLst>
-                              <p:cond delay="2500"/>
-                            </p:stCondLst>
-                            <p:childTnLst>
-                              <p:par>
-                                <p:cTn id="11" presetID="1" presetClass="mediacall" presetSubtype="0" fill="hold" nodeType="afterEffect">
-                                  <p:stCondLst>
-                                    <p:cond delay="0"/>
-                                  </p:stCondLst>
-                                  <p:childTnLst>
-                                    <p:cmd type="call" cmd="playFrom(0.0)">
-                                      <p:cBhvr additive="base">
-                                        <p:cTn id="12" dur="1200" fill="hold"/>
-                                        <p:tgtEl>
-                                          <p:spTgt spid="7"/>
-                                        </p:tgtEl>
-                                      </p:cBhvr>
-                                    </p:cmd>
-                                  </p:childTnLst>
-                                </p:cTn>
-                              </p:par>
-                            </p:childTnLst>
-                          </p:cTn>
-                        </p:par>
-                        <p:par>
-                          <p:cTn id="13" fill="hold">
-                            <p:stCondLst>
-                              <p:cond delay="4000"/>
-                            </p:stCondLst>
-                            <p:childTnLst>
-                              <p:par>
-                                <p:cTn id="14" presetID="1" presetClass="mediacall" presetSubtype="0" fill="hold" nodeType="afterEffect">
-                                  <p:stCondLst>
-                                    <p:cond delay="0"/>
-                                  </p:stCondLst>
-                                  <p:childTnLst>
-                                    <p:cmd type="call" cmd="playFrom(0.0)">
-                                      <p:cBhvr additive="base">
-                                        <p:cTn id="15" dur="960" fill="hold"/>
-                                        <p:tgtEl>
-                                          <p:spTgt spid="9"/>
-                                        </p:tgtEl>
-                                      </p:cBhvr>
-                                    </p:cmd>
-                                  </p:childTnLst>
-                                </p:cTn>
-                              </p:par>
-                            </p:childTnLst>
-                          </p:cTn>
-                        </p:par>
-                      </p:childTnLst>
-                    </p:cTn>
-                  </p:par>
-                  <p:par>
-                    <p:cTn id="16" fill="hold">
-                      <p:stCondLst>
-                        <p:cond delay="indefinite"/>
-                      </p:stCondLst>
-                      <p:childTnLst>
-                        <p:par>
-                          <p:cTn id="17" fill="hold">
-                            <p:stCondLst>
-                              <p:cond delay="0"/>
-                            </p:stCondLst>
-                            <p:childTnLst>
-                              <p:par>
-                                <p:cTn id="18" presetID="2" presetClass="entr" presetSubtype="4" fill="hold" grpId="0" nodeType="clickEffect">
+                                <p:cTn id="5" presetID="2" presetClass="entr" presetSubtype="4" fill="hold" grpId="0" nodeType="clickEffect">
                                   <p:stCondLst>
                                     <p:cond delay="0"/>
                                   </p:stCondLst>
                                   <p:childTnLst>
                                     <p:set>
                                       <p:cBhvr>
-                                        <p:cTn id="19" dur="1" fill="hold">
+                                        <p:cTn id="6" dur="1" fill="hold">
                                           <p:stCondLst>
                                             <p:cond delay="0"/>
                                           </p:stCondLst>
@@ -3758,7 +3728,7 @@
                                     </p:set>
                                     <p:anim calcmode="lin" valueType="num">
                                       <p:cBhvr additive="base">
-                                        <p:cTn id="20" dur="500" fill="hold"/>
+                                        <p:cTn id="7" dur="500" fill="hold"/>
                                         <p:tgtEl>
                                           <p:spTgt spid="13"/>
                                         </p:tgtEl>
@@ -3781,7 +3751,7 @@
                                     </p:anim>
                                     <p:anim calcmode="lin" valueType="num">
                                       <p:cBhvr additive="base">
-                                        <p:cTn id="21" dur="500" fill="hold"/>
+                                        <p:cTn id="8" dur="500" fill="hold"/>
                                         <p:tgtEl>
                                           <p:spTgt spid="13"/>
                                         </p:tgtEl>
@@ -3806,14 +3776,14 @@
                                 </p:cTn>
                               </p:par>
                               <p:par>
-                                <p:cTn id="22" presetID="2" presetClass="entr" presetSubtype="4" fill="hold" nodeType="withEffect">
+                                <p:cTn id="9" presetID="2" presetClass="entr" presetSubtype="4" fill="hold" nodeType="withEffect">
                                   <p:stCondLst>
                                     <p:cond delay="0"/>
                                   </p:stCondLst>
                                   <p:childTnLst>
                                     <p:set>
                                       <p:cBhvr>
-                                        <p:cTn id="23" dur="1" fill="hold">
+                                        <p:cTn id="10" dur="1" fill="hold">
                                           <p:stCondLst>
                                             <p:cond delay="0"/>
                                           </p:stCondLst>
@@ -3831,7 +3801,7 @@
                                     </p:set>
                                     <p:anim calcmode="lin" valueType="num">
                                       <p:cBhvr additive="base">
-                                        <p:cTn id="24" dur="500" fill="hold"/>
+                                        <p:cTn id="11" dur="500" fill="hold"/>
                                         <p:tgtEl>
                                           <p:spTgt spid="12"/>
                                         </p:tgtEl>
@@ -3854,9 +3824,100 @@
                                     </p:anim>
                                     <p:anim calcmode="lin" valueType="num">
                                       <p:cBhvr additive="base">
-                                        <p:cTn id="25" dur="500" fill="hold"/>
+                                        <p:cTn id="12" dur="500" fill="hold"/>
                                         <p:tgtEl>
                                           <p:spTgt spid="12"/>
+                                        </p:tgtEl>
+                                        <p:attrNameLst>
+                                          <p:attrName>ppt_y</p:attrName>
+                                        </p:attrNameLst>
+                                      </p:cBhvr>
+                                      <p:tavLst>
+                                        <p:tav tm="0">
+                                          <p:val>
+                                            <p:strVal val="1+#ppt_h/2"/>
+                                          </p:val>
+                                        </p:tav>
+                                        <p:tav tm="100000">
+                                          <p:val>
+                                            <p:strVal val="#ppt_y"/>
+                                          </p:val>
+                                        </p:tav>
+                                      </p:tavLst>
+                                    </p:anim>
+                                  </p:childTnLst>
+                                </p:cTn>
+                              </p:par>
+                            </p:childTnLst>
+                          </p:cTn>
+                        </p:par>
+                      </p:childTnLst>
+                    </p:cTn>
+                  </p:par>
+                  <p:par>
+                    <p:cTn id="13" fill="hold">
+                      <p:stCondLst>
+                        <p:cond delay="indefinite"/>
+                      </p:stCondLst>
+                      <p:childTnLst>
+                        <p:par>
+                          <p:cTn id="14" fill="hold">
+                            <p:stCondLst>
+                              <p:cond delay="0"/>
+                            </p:stCondLst>
+                            <p:childTnLst>
+                              <p:par>
+                                <p:cTn id="15" presetID="2" presetClass="entr" presetSubtype="4" fill="hold" grpId="0" nodeType="clickEffect">
+                                  <p:stCondLst>
+                                    <p:cond delay="0"/>
+                                  </p:stCondLst>
+                                  <p:childTnLst>
+                                    <p:set>
+                                      <p:cBhvr>
+                                        <p:cTn id="16" dur="1" fill="hold">
+                                          <p:stCondLst>
+                                            <p:cond delay="0"/>
+                                          </p:stCondLst>
+                                        </p:cTn>
+                                        <p:tgtEl>
+                                          <p:spTgt spid="16"/>
+                                        </p:tgtEl>
+                                        <p:attrNameLst>
+                                          <p:attrName>style.visibility</p:attrName>
+                                        </p:attrNameLst>
+                                      </p:cBhvr>
+                                      <p:to>
+                                        <p:strVal val="visible"/>
+                                      </p:to>
+                                    </p:set>
+                                    <p:anim calcmode="lin" valueType="num">
+                                      <p:cBhvr additive="base">
+                                        <p:cTn id="17" dur="500" fill="hold"/>
+                                        <p:tgtEl>
+                                          <p:spTgt spid="16"/>
+                                        </p:tgtEl>
+                                        <p:attrNameLst>
+                                          <p:attrName>ppt_x</p:attrName>
+                                        </p:attrNameLst>
+                                      </p:cBhvr>
+                                      <p:tavLst>
+                                        <p:tav tm="0">
+                                          <p:val>
+                                            <p:strVal val="#ppt_x"/>
+                                          </p:val>
+                                        </p:tav>
+                                        <p:tav tm="100000">
+                                          <p:val>
+                                            <p:strVal val="#ppt_x"/>
+                                          </p:val>
+                                        </p:tav>
+                                      </p:tavLst>
+                                    </p:anim>
+                                    <p:anim calcmode="lin" valueType="num">
+                                      <p:cBhvr additive="base">
+                                        <p:cTn id="18" dur="500" fill="hold"/>
+                                        <p:tgtEl>
+                                          <p:spTgt spid="16"/>
                                         </p:tgtEl>
                                         <p:attrNameLst>
                                           <p:attrName>ppt_y</p:attrName>
@@ -3903,64 +3964,7 @@
             </p:seq>
             <p:audio>
               <p:cMediaNode>
-                <p:cTn id="26" fill="hold" display="1">
-                  <p:stCondLst>
-                    <p:cond delay="indefinite"/>
-                  </p:stCondLst>
-                  <p:endCondLst>
-                    <p:cond evt="onStopAudio">
-                      <p:tgtEl>
-                        <p:sldTgt/>
-                      </p:tgtEl>
-                    </p:cond>
-                  </p:endCondLst>
-                </p:cTn>
-                <p:tgtEl>
-                  <p:spTgt spid="3"/>
-                </p:tgtEl>
-              </p:cMediaNode>
-            </p:audio>
-            <p:audio>
-              <p:cMediaNode>
-                <p:cTn id="27" fill="hold" display="1">
-                  <p:stCondLst>
-                    <p:cond delay="indefinite"/>
-                  </p:stCondLst>
-                  <p:endCondLst>
-                    <p:cond evt="onStopAudio">
-                      <p:tgtEl>
-                        <p:sldTgt/>
-                      </p:tgtEl>
-                    </p:cond>
-                  </p:endCondLst>
-                </p:cTn>
-                <p:tgtEl>
-                  <p:spTgt spid="5"/>
-                </p:tgtEl>
-              </p:cMediaNode>
-            </p:audio>
-            <p:audio>
-              <p:cMediaNode>
-                <p:cTn id="28" fill="hold" display="1">
-                  <p:stCondLst>
-                    <p:cond delay="indefinite"/>
-                  </p:stCondLst>
-                  <p:endCondLst>
-                    <p:cond evt="onStopAudio">
-                      <p:tgtEl>
-                        <p:sldTgt/>
-                      </p:tgtEl>
-                    </p:cond>
-                  </p:endCondLst>
-                </p:cTn>
-                <p:tgtEl>
-                  <p:spTgt spid="7"/>
-                </p:tgtEl>
-              </p:cMediaNode>
-            </p:audio>
-            <p:audio>
-              <p:cMediaNode>
-                <p:cTn id="29" fill="hold" display="1">
+                <p:cTn id="19" fill="hold" display="1">
                   <p:stCondLst>
                     <p:cond delay="indefinite"/>
                   </p:stCondLst>
@@ -3977,6 +3981,295 @@
                 </p:tgtEl>
               </p:cMediaNode>
             </p:audio>
+            <p:audio>
+              <p:cMediaNode>
+                <p:cTn id="20" fill="hold" display="1">
+                  <p:stCondLst>
+                    <p:cond delay="indefinite"/>
+                  </p:stCondLst>
+                  <p:endCondLst>
+                    <p:cond evt="onStopAudio">
+                      <p:tgtEl>
+                        <p:sldTgt/>
+                      </p:tgtEl>
+                    </p:cond>
+                  </p:endCondLst>
+                </p:cTn>
+                <p:tgtEl>
+                  <p:spTgt spid="18"/>
+                </p:tgtEl>
+              </p:cMediaNode>
+            </p:audio>
+            <p:audio>
+              <p:cMediaNode>
+                <p:cTn id="21" fill="hold" display="1">
+                  <p:stCondLst>
+                    <p:cond delay="indefinite"/>
+                  </p:stCondLst>
+                  <p:endCondLst>
+                    <p:cond evt="onStopAudio">
+                      <p:tgtEl>
+                        <p:sldTgt/>
+                      </p:tgtEl>
+                    </p:cond>
+                  </p:endCondLst>
+                </p:cTn>
+                <p:tgtEl>
+                  <p:spTgt spid="19"/>
+                </p:tgtEl>
+              </p:cMediaNode>
+            </p:audio>
+            <p:audio>
+              <p:cMediaNode>
+                <p:cTn id="22" fill="hold" display="1">
+                  <p:stCondLst>
+                    <p:cond delay="indefinite"/>
+                  </p:stCondLst>
+                  <p:endCondLst>
+                    <p:cond evt="onStopAudio">
+                      <p:tgtEl>
+                        <p:sldTgt/>
+                      </p:tgtEl>
+                    </p:cond>
+                  </p:endCondLst>
+                </p:cTn>
+                <p:tgtEl>
+                  <p:spTgt spid="20"/>
+                </p:tgtEl>
+              </p:cMediaNode>
+            </p:audio>
+            <p:seq concurrent="1" nextAc="seek">
+              <p:cTn id="23" restart="whenNotActive" fill="hold" evtFilter="cancelBubble" nodeType="interactiveSeq">
+                <p:stCondLst>
+                  <p:cond evt="onClick" delay="0">
+                    <p:tgtEl>
+                      <p:spTgt spid="18"/>
+                    </p:tgtEl>
+                  </p:cond>
+                </p:stCondLst>
+                <p:endSync evt="end" delay="0">
+                  <p:rtn val="all"/>
+                </p:endSync>
+                <p:childTnLst>
+                  <p:par>
+                    <p:cTn id="24" fill="hold">
+                      <p:stCondLst>
+                        <p:cond delay="0"/>
+                      </p:stCondLst>
+                      <p:childTnLst>
+                        <p:par>
+                          <p:cTn id="25" fill="hold">
+                            <p:stCondLst>
+                              <p:cond delay="0"/>
+                            </p:stCondLst>
+                            <p:childTnLst>
+                              <p:par>
+                                <p:cTn id="26" presetID="1" presetClass="mediacall" presetSubtype="0" fill="hold" nodeType="clickEffect">
+                                  <p:stCondLst>
+                                    <p:cond delay="0"/>
+                                  </p:stCondLst>
+                                  <p:childTnLst>
+                                    <p:cmd type="call" cmd="playFrom(0.0)">
+                                      <p:cBhvr additive="base">
+                                        <p:cTn id="27" dur="indefinite" fill="hold"/>
+                                        <p:tgtEl>
+                                          <p:spTgt spid="18"/>
+                                        </p:tgtEl>
+                                      </p:cBhvr>
+                                    </p:cmd>
+                                  </p:childTnLst>
+                                </p:cTn>
+                              </p:par>
+                            </p:childTnLst>
+                          </p:cTn>
+                        </p:par>
+                      </p:childTnLst>
+                    </p:cTn>
+                  </p:par>
+                </p:childTnLst>
+              </p:cTn>
+              <p:nextCondLst>
+                <p:cond evt="onClick" delay="0">
+                  <p:tgtEl>
+                    <p:spTgt spid="18"/>
+                  </p:tgtEl>
+                </p:cond>
+              </p:nextCondLst>
+            </p:seq>
+            <p:seq concurrent="1" nextAc="seek">
+              <p:cTn id="28" restart="whenNotActive" fill="hold" evtFilter="cancelBubble" nodeType="interactiveSeq">
+                <p:stCondLst>
+                  <p:cond evt="onClick" delay="0">
+                    <p:tgtEl>
+                      <p:spTgt spid="19"/>
+                    </p:tgtEl>
+                  </p:cond>
+                </p:stCondLst>
+                <p:endSync evt="end" delay="0">
+                  <p:rtn val="all"/>
+                </p:endSync>
+                <p:childTnLst>
+                  <p:par>
+                    <p:cTn id="29" fill="hold">
+                      <p:stCondLst>
+                        <p:cond delay="0"/>
+                      </p:stCondLst>
+                      <p:childTnLst>
+                        <p:par>
+                          <p:cTn id="30" fill="hold">
+                            <p:stCondLst>
+                              <p:cond delay="0"/>
+                            </p:stCondLst>
+                            <p:childTnLst>
+                              <p:par>
+                                <p:cTn id="31" presetID="1" presetClass="mediacall" presetSubtype="0" fill="hold" nodeType="clickEffect">
+                                  <p:stCondLst>
+                                    <p:cond delay="0"/>
+                                  </p:stCondLst>
+                                  <p:childTnLst>
+                                    <p:cmd type="call" cmd="playFrom(0.0)">
+                                      <p:cBhvr additive="base">
+                                        <p:cTn id="32" dur="indefinite" fill="hold"/>
+                                        <p:tgtEl>
+                                          <p:spTgt spid="19"/>
+                                        </p:tgtEl>
+                                      </p:cBhvr>
+                                    </p:cmd>
+                                  </p:childTnLst>
+                                </p:cTn>
+                              </p:par>
+                            </p:childTnLst>
+                          </p:cTn>
+                        </p:par>
+                      </p:childTnLst>
+                    </p:cTn>
+                  </p:par>
+                </p:childTnLst>
+              </p:cTn>
+              <p:nextCondLst>
+                <p:cond evt="onClick" delay="0">
+                  <p:tgtEl>
+                    <p:spTgt spid="19"/>
+                  </p:tgtEl>
+                </p:cond>
+              </p:nextCondLst>
+            </p:seq>
+            <p:seq concurrent="1" nextAc="seek">
+              <p:cTn id="33" restart="whenNotActive" fill="hold" evtFilter="cancelBubble" nodeType="interactiveSeq">
+                <p:stCondLst>
+                  <p:cond evt="onClick" delay="0">
+                    <p:tgtEl>
+                      <p:spTgt spid="20"/>
+                    </p:tgtEl>
+                  </p:cond>
+                </p:stCondLst>
+                <p:endSync evt="end" delay="0">
+                  <p:rtn val="all"/>
+                </p:endSync>
+                <p:childTnLst>
+                  <p:par>
+                    <p:cTn id="34" fill="hold">
+                      <p:stCondLst>
+                        <p:cond delay="0"/>
+                      </p:stCondLst>
+                      <p:childTnLst>
+                        <p:par>
+                          <p:cTn id="35" fill="hold">
+                            <p:stCondLst>
+                              <p:cond delay="0"/>
+                            </p:stCondLst>
+                            <p:childTnLst>
+                              <p:par>
+                                <p:cTn id="36" presetID="1" presetClass="mediacall" presetSubtype="0" fill="hold" nodeType="clickEffect">
+                                  <p:stCondLst>
+                                    <p:cond delay="0"/>
+                                  </p:stCondLst>
+                                  <p:childTnLst>
+                                    <p:cmd type="call" cmd="playFrom(0.0)">
+                                      <p:cBhvr additive="base">
+                                        <p:cTn id="37" dur="indefinite" fill="hold"/>
+                                        <p:tgtEl>
+                                          <p:spTgt spid="20"/>
+                                        </p:tgtEl>
+                                      </p:cBhvr>
+                                    </p:cmd>
+                                  </p:childTnLst>
+                                </p:cTn>
+                              </p:par>
+                            </p:childTnLst>
+                          </p:cTn>
+                        </p:par>
+                      </p:childTnLst>
+                    </p:cTn>
+                  </p:par>
+                </p:childTnLst>
+              </p:cTn>
+              <p:nextCondLst>
+                <p:cond evt="onClick" delay="0">
+                  <p:tgtEl>
+                    <p:spTgt spid="20"/>
+                  </p:tgtEl>
+                </p:cond>
+              </p:nextCondLst>
+            </p:seq>
+            <p:seq concurrent="1" nextAc="seek">
+              <p:cTn id="38" restart="whenNotActive" fill="hold" evtFilter="cancelBubble" nodeType="interactiveSeq">
+                <p:stCondLst>
+                  <p:cond evt="onClick" delay="0">
+                    <p:tgtEl>
+                      <p:spTgt spid="9"/>
+                    </p:tgtEl>
+                  </p:cond>
+                </p:stCondLst>
+                <p:endSync evt="end" delay="0">
+                  <p:rtn val="all"/>
+                </p:endSync>
+                <p:childTnLst>
+                  <p:par>
+                    <p:cTn id="39" fill="hold">
+                      <p:stCondLst>
+                        <p:cond delay="0"/>
+                      </p:stCondLst>
+                      <p:childTnLst>
+                        <p:par>
+                          <p:cTn id="40" fill="hold">
+                            <p:stCondLst>
+                              <p:cond delay="0"/>
+                            </p:stCondLst>
+                            <p:childTnLst>
+                              <p:par>
+                                <p:cTn id="41" presetID="1" presetClass="mediacall" presetSubtype="0" fill="hold" nodeType="clickEffect">
+                                  <p:stCondLst>
+                                    <p:cond delay="0"/>
+                                  </p:stCondLst>
+                                  <p:childTnLst>
+                                    <p:cmd type="call" cmd="playFrom(0.0)">
+                                      <p:cBhvr additive="base">
+                                        <p:cTn id="42" dur="indefinite" fill="hold"/>
+                                        <p:tgtEl>
+                                          <p:spTgt spid="9"/>
+                                        </p:tgtEl>
+                                      </p:cBhvr>
+                                    </p:cmd>
+                                  </p:childTnLst>
+                                </p:cTn>
+                              </p:par>
+                            </p:childTnLst>
+                          </p:cTn>
+                        </p:par>
+                      </p:childTnLst>
+                    </p:cTn>
+                  </p:par>
+                </p:childTnLst>
+              </p:cTn>
+              <p:nextCondLst>
+                <p:cond evt="onClick" delay="0">
+                  <p:tgtEl>
+                    <p:spTgt spid="9"/>
+                  </p:tgtEl>
+                </p:cond>
+              </p:nextCondLst>
+            </p:seq>
           </p:childTnLst>
         </p:cTn>
       </p:par>
@@ -3984,6 +4277,8 @@
     <p:bldLst>
       <p:bldP spid="13" grpId="0"/>
       <p:bldP spid="13" grpId="1"/>
+      <p:bldP spid="16" grpId="0"/>
+      <p:bldP spid="16" grpId="1"/>
     </p:bldLst>
   </p:timing>
 </p:sld>
@@ -4122,7 +4417,7 @@
             <a:pPr algn="ctr"/>
             <a:r>
               <a:rPr lang="en-US" altLang="zh-CN" sz="3200"/>
-              <a:t>A obvious difference:</a:t>
+              <a:t>An obvious difference:</a:t>
             </a:r>
             <a:endParaRPr lang="en-US" altLang="zh-CN" sz="3200"/>
           </a:p>
@@ -4164,7 +4459,7 @@
                   <a:srgbClr val="FF0000"/>
                 </a:solidFill>
               </a:rPr>
-              <a:t>But Why?</a:t>
+              <a:t>But why?</a:t>
             </a:r>
             <a:endParaRPr lang="en-US" altLang="zh-CN" sz="4000">
               <a:solidFill>
@@ -4535,7 +4830,7 @@
                           <a:latin typeface="Arial" panose="020B0604020202020204" pitchFamily="34" charset="0"/>
                           <a:ea typeface="微软雅黑" panose="020B0503020204020204" charset="-122"/>
                         </a:rPr>
-                        <a:t>live on plains</a:t>
+                        <a:t>live on the plains</a:t>
                       </a:r>
                       <a:endParaRPr lang="en-US" altLang="zh-CN" sz="3200">
                         <a:latin typeface="Arial" panose="020B0604020202020204" pitchFamily="34" charset="0"/>
@@ -4684,6 +4979,1570 @@
 </p:sld>
 </file>
 
+<file path=ppt/slides/slide6.xml><?xml version="1.0" encoding="utf-8"?>
+<p:sld xmlns:a="http://schemas.openxmlformats.org/drawingml/2006/main" xmlns:r="http://schemas.openxmlformats.org/officeDocument/2006/relationships" xmlns:p="http://schemas.openxmlformats.org/presentationml/2006/main">
+  <p:cSld>
+    <p:spTree>
+      <p:nvGrpSpPr>
+        <p:cNvPr id="1" name=""/>
+        <p:cNvGrpSpPr/>
+        <p:nvPr/>
+      </p:nvGrpSpPr>
+      <p:grpSpPr/>
+      <p:sp>
+        <p:nvSpPr>
+          <p:cNvPr id="2" name="文本框 1"/>
+          <p:cNvSpPr txBox="1"/>
+          <p:nvPr/>
+        </p:nvSpPr>
+        <p:spPr>
+          <a:xfrm>
+            <a:off x="1600835" y="2845435"/>
+            <a:ext cx="4064000" cy="583565"/>
+          </a:xfrm>
+          <a:prstGeom prst="rect">
+            <a:avLst/>
+          </a:prstGeom>
+          <a:noFill/>
+        </p:spPr>
+        <p:txBody>
+          <a:bodyPr wrap="square" rtlCol="0">
+            <a:spAutoFit/>
+          </a:bodyPr>
+          <a:p>
+            <a:r>
+              <a:rPr lang="en-US" altLang="zh-CN" sz="3200"/>
+              <a:t>What are you doing?!</a:t>
+            </a:r>
+            <a:endParaRPr lang="en-US" altLang="zh-CN" sz="3200"/>
+          </a:p>
+        </p:txBody>
+      </p:sp>
+      <p:sp>
+        <p:nvSpPr>
+          <p:cNvPr id="4" name="文本框 3"/>
+          <p:cNvSpPr txBox="1"/>
+          <p:nvPr/>
+        </p:nvSpPr>
+        <p:spPr>
+          <a:xfrm>
+            <a:off x="6871970" y="2845435"/>
+            <a:ext cx="4064000" cy="583565"/>
+          </a:xfrm>
+          <a:prstGeom prst="rect">
+            <a:avLst/>
+          </a:prstGeom>
+          <a:noFill/>
+        </p:spPr>
+        <p:txBody>
+          <a:bodyPr wrap="square" rtlCol="0">
+            <a:spAutoFit/>
+          </a:bodyPr>
+          <a:p>
+            <a:r>
+              <a:rPr lang="en-US" altLang="zh-CN" sz="3200"/>
+              <a:t>Have you eaten?</a:t>
+            </a:r>
+            <a:endParaRPr lang="en-US" altLang="zh-CN" sz="3200"/>
+          </a:p>
+        </p:txBody>
+      </p:sp>
+      <p:sp>
+        <p:nvSpPr>
+          <p:cNvPr id="5" name="文本框 4"/>
+          <p:cNvSpPr txBox="1"/>
+          <p:nvPr/>
+        </p:nvSpPr>
+        <p:spPr>
+          <a:xfrm>
+            <a:off x="581025" y="501650"/>
+            <a:ext cx="4064635" cy="706755"/>
+          </a:xfrm>
+          <a:prstGeom prst="rect">
+            <a:avLst/>
+          </a:prstGeom>
+          <a:noFill/>
+        </p:spPr>
+        <p:txBody>
+          <a:bodyPr wrap="square" rtlCol="0">
+            <a:spAutoFit/>
+          </a:bodyPr>
+          <a:p>
+            <a:pPr algn="ctr"/>
+            <a:r>
+              <a:rPr lang="en-US" altLang="zh-CN" sz="4000"/>
+              <a:t>A special case</a:t>
+            </a:r>
+            <a:endParaRPr lang="en-US" altLang="zh-CN" sz="4000"/>
+          </a:p>
+        </p:txBody>
+      </p:sp>
+    </p:spTree>
+    <p:custDataLst>
+      <p:tags r:id="rId1"/>
+    </p:custDataLst>
+  </p:cSld>
+  <p:clrMapOvr>
+    <a:masterClrMapping/>
+  </p:clrMapOvr>
+  <p:timing>
+    <p:tnLst>
+      <p:par>
+        <p:cTn id="1" dur="indefinite" restart="never" nodeType="tmRoot">
+          <p:childTnLst>
+            <p:seq concurrent="1" nextAc="seek">
+              <p:cTn id="2" dur="indefinite" nodeType="mainSeq">
+                <p:childTnLst>
+                  <p:par>
+                    <p:cTn id="3" fill="hold">
+                      <p:stCondLst>
+                        <p:cond delay="indefinite"/>
+                      </p:stCondLst>
+                      <p:childTnLst>
+                        <p:par>
+                          <p:cTn id="4" fill="hold">
+                            <p:stCondLst>
+                              <p:cond delay="0"/>
+                            </p:stCondLst>
+                            <p:childTnLst>
+                              <p:par>
+                                <p:cTn id="5" presetID="2" presetClass="entr" presetSubtype="4" fill="hold" grpId="0" nodeType="clickEffect">
+                                  <p:stCondLst>
+                                    <p:cond delay="0"/>
+                                  </p:stCondLst>
+                                  <p:childTnLst>
+                                    <p:set>
+                                      <p:cBhvr>
+                                        <p:cTn id="6" dur="1" fill="hold">
+                                          <p:stCondLst>
+                                            <p:cond delay="0"/>
+                                          </p:stCondLst>
+                                        </p:cTn>
+                                        <p:tgtEl>
+                                          <p:spTgt spid="2"/>
+                                        </p:tgtEl>
+                                        <p:attrNameLst>
+                                          <p:attrName>style.visibility</p:attrName>
+                                        </p:attrNameLst>
+                                      </p:cBhvr>
+                                      <p:to>
+                                        <p:strVal val="visible"/>
+                                      </p:to>
+                                    </p:set>
+                                    <p:anim calcmode="lin" valueType="num">
+                                      <p:cBhvr additive="base">
+                                        <p:cTn id="7" dur="500" fill="hold"/>
+                                        <p:tgtEl>
+                                          <p:spTgt spid="2"/>
+                                        </p:tgtEl>
+                                        <p:attrNameLst>
+                                          <p:attrName>ppt_x</p:attrName>
+                                        </p:attrNameLst>
+                                      </p:cBhvr>
+                                      <p:tavLst>
+                                        <p:tav tm="0">
+                                          <p:val>
+                                            <p:strVal val="#ppt_x"/>
+                                          </p:val>
+                                        </p:tav>
+                                        <p:tav tm="100000">
+                                          <p:val>
+                                            <p:strVal val="#ppt_x"/>
+                                          </p:val>
+                                        </p:tav>
+                                      </p:tavLst>
+                                    </p:anim>
+                                    <p:anim calcmode="lin" valueType="num">
+                                      <p:cBhvr additive="base">
+                                        <p:cTn id="8" dur="500" fill="hold"/>
+                                        <p:tgtEl>
+                                          <p:spTgt spid="2"/>
+                                        </p:tgtEl>
+                                        <p:attrNameLst>
+                                          <p:attrName>ppt_y</p:attrName>
+                                        </p:attrNameLst>
+                                      </p:cBhvr>
+                                      <p:tavLst>
+                                        <p:tav tm="0">
+                                          <p:val>
+                                            <p:strVal val="1+#ppt_h/2"/>
+                                          </p:val>
+                                        </p:tav>
+                                        <p:tav tm="100000">
+                                          <p:val>
+                                            <p:strVal val="#ppt_y"/>
+                                          </p:val>
+                                        </p:tav>
+                                      </p:tavLst>
+                                    </p:anim>
+                                  </p:childTnLst>
+                                </p:cTn>
+                              </p:par>
+                            </p:childTnLst>
+                          </p:cTn>
+                        </p:par>
+                      </p:childTnLst>
+                    </p:cTn>
+                  </p:par>
+                  <p:par>
+                    <p:cTn id="9" fill="hold">
+                      <p:stCondLst>
+                        <p:cond delay="indefinite"/>
+                      </p:stCondLst>
+                      <p:childTnLst>
+                        <p:par>
+                          <p:cTn id="10" fill="hold">
+                            <p:stCondLst>
+                              <p:cond delay="0"/>
+                            </p:stCondLst>
+                            <p:childTnLst>
+                              <p:par>
+                                <p:cTn id="11" presetID="2" presetClass="entr" presetSubtype="4" fill="hold" grpId="0" nodeType="clickEffect">
+                                  <p:stCondLst>
+                                    <p:cond delay="0"/>
+                                  </p:stCondLst>
+                                  <p:childTnLst>
+                                    <p:set>
+                                      <p:cBhvr>
+                                        <p:cTn id="12" dur="1" fill="hold">
+                                          <p:stCondLst>
+                                            <p:cond delay="0"/>
+                                          </p:stCondLst>
+                                        </p:cTn>
+                                        <p:tgtEl>
+                                          <p:spTgt spid="4"/>
+                                        </p:tgtEl>
+                                        <p:attrNameLst>
+                                          <p:attrName>style.visibility</p:attrName>
+                                        </p:attrNameLst>
+                                      </p:cBhvr>
+                                      <p:to>
+                                        <p:strVal val="visible"/>
+                                      </p:to>
+                                    </p:set>
+                                    <p:anim calcmode="lin" valueType="num">
+                                      <p:cBhvr additive="base">
+                                        <p:cTn id="13" dur="500" fill="hold"/>
+                                        <p:tgtEl>
+                                          <p:spTgt spid="4"/>
+                                        </p:tgtEl>
+                                        <p:attrNameLst>
+                                          <p:attrName>ppt_x</p:attrName>
+                                        </p:attrNameLst>
+                                      </p:cBhvr>
+                                      <p:tavLst>
+                                        <p:tav tm="0">
+                                          <p:val>
+                                            <p:strVal val="#ppt_x"/>
+                                          </p:val>
+                                        </p:tav>
+                                        <p:tav tm="100000">
+                                          <p:val>
+                                            <p:strVal val="#ppt_x"/>
+                                          </p:val>
+                                        </p:tav>
+                                      </p:tavLst>
+                                    </p:anim>
+                                    <p:anim calcmode="lin" valueType="num">
+                                      <p:cBhvr additive="base">
+                                        <p:cTn id="14" dur="500" fill="hold"/>
+                                        <p:tgtEl>
+                                          <p:spTgt spid="4"/>
+                                        </p:tgtEl>
+                                        <p:attrNameLst>
+                                          <p:attrName>ppt_y</p:attrName>
+                                        </p:attrNameLst>
+                                      </p:cBhvr>
+                                      <p:tavLst>
+                                        <p:tav tm="0">
+                                          <p:val>
+                                            <p:strVal val="1+#ppt_h/2"/>
+                                          </p:val>
+                                        </p:tav>
+                                        <p:tav tm="100000">
+                                          <p:val>
+                                            <p:strVal val="#ppt_y"/>
+                                          </p:val>
+                                        </p:tav>
+                                      </p:tavLst>
+                                    </p:anim>
+                                  </p:childTnLst>
+                                </p:cTn>
+                              </p:par>
+                            </p:childTnLst>
+                          </p:cTn>
+                        </p:par>
+                      </p:childTnLst>
+                    </p:cTn>
+                  </p:par>
+                </p:childTnLst>
+              </p:cTn>
+              <p:prevCondLst>
+                <p:cond evt="onPrev" delay="0">
+                  <p:tgtEl>
+                    <p:sldTgt/>
+                  </p:tgtEl>
+                </p:cond>
+              </p:prevCondLst>
+              <p:nextCondLst>
+                <p:cond evt="onNext" delay="0">
+                  <p:tgtEl>
+                    <p:sldTgt/>
+                  </p:tgtEl>
+                </p:cond>
+              </p:nextCondLst>
+            </p:seq>
+          </p:childTnLst>
+        </p:cTn>
+      </p:par>
+    </p:tnLst>
+    <p:bldLst>
+      <p:bldP spid="2" grpId="0"/>
+      <p:bldP spid="2" grpId="1"/>
+      <p:bldP spid="4" grpId="0"/>
+      <p:bldP spid="4" grpId="1"/>
+    </p:bldLst>
+  </p:timing>
+</p:sld>
+</file>
+
+<file path=ppt/slides/slide7.xml><?xml version="1.0" encoding="utf-8"?>
+<p:sld xmlns:a="http://schemas.openxmlformats.org/drawingml/2006/main" xmlns:r="http://schemas.openxmlformats.org/officeDocument/2006/relationships" xmlns:p="http://schemas.openxmlformats.org/presentationml/2006/main">
+  <p:cSld>
+    <p:spTree>
+      <p:nvGrpSpPr>
+        <p:cNvPr id="1" name=""/>
+        <p:cNvGrpSpPr/>
+        <p:nvPr/>
+      </p:nvGrpSpPr>
+      <p:grpSpPr/>
+      <p:sp>
+        <p:nvSpPr>
+          <p:cNvPr id="2" name="文本框 1"/>
+          <p:cNvSpPr txBox="1"/>
+          <p:nvPr/>
+        </p:nvSpPr>
+        <p:spPr>
+          <a:xfrm>
+            <a:off x="1414780" y="521970"/>
+            <a:ext cx="9362440" cy="1076325"/>
+          </a:xfrm>
+          <a:prstGeom prst="rect">
+            <a:avLst/>
+          </a:prstGeom>
+          <a:noFill/>
+        </p:spPr>
+        <p:txBody>
+          <a:bodyPr wrap="square" rtlCol="0">
+            <a:spAutoFit/>
+          </a:bodyPr>
+          <a:p>
+            <a:pPr algn="ctr"/>
+            <a:r>
+              <a:rPr lang="en-US" altLang="zh-CN" sz="3200"/>
+              <a:t>Why is a dialect spoken in southern China actually classified as a northern dialect?</a:t>
+            </a:r>
+            <a:endParaRPr lang="en-US" altLang="zh-CN" sz="3200"/>
+          </a:p>
+        </p:txBody>
+      </p:sp>
+      <p:sp>
+        <p:nvSpPr>
+          <p:cNvPr id="3" name="文本框 2"/>
+          <p:cNvSpPr txBox="1"/>
+          <p:nvPr/>
+        </p:nvSpPr>
+        <p:spPr>
+          <a:xfrm>
+            <a:off x="4756150" y="2153920"/>
+            <a:ext cx="2679700" cy="706755"/>
+          </a:xfrm>
+          <a:prstGeom prst="rect">
+            <a:avLst/>
+          </a:prstGeom>
+          <a:noFill/>
+        </p:spPr>
+        <p:txBody>
+          <a:bodyPr wrap="square" rtlCol="0">
+            <a:spAutoFit/>
+          </a:bodyPr>
+          <a:p>
+            <a:pPr algn="ctr"/>
+            <a:r>
+              <a:rPr lang="en-US" altLang="zh-CN" sz="4000">
+                <a:solidFill>
+                  <a:srgbClr val="FF0000"/>
+                </a:solidFill>
+              </a:rPr>
+              <a:t>migration</a:t>
+            </a:r>
+            <a:endParaRPr lang="en-US" altLang="zh-CN" sz="4000">
+              <a:solidFill>
+                <a:srgbClr val="FF0000"/>
+              </a:solidFill>
+            </a:endParaRPr>
+          </a:p>
+        </p:txBody>
+      </p:sp>
+      <p:sp>
+        <p:nvSpPr>
+          <p:cNvPr id="4" name="文本框 3"/>
+          <p:cNvSpPr txBox="1"/>
+          <p:nvPr/>
+        </p:nvSpPr>
+        <p:spPr>
+          <a:xfrm>
+            <a:off x="73025" y="3415665"/>
+            <a:ext cx="2527300" cy="829945"/>
+          </a:xfrm>
+          <a:prstGeom prst="rect">
+            <a:avLst/>
+          </a:prstGeom>
+          <a:noFill/>
+        </p:spPr>
+        <p:txBody>
+          <a:bodyPr wrap="square" rtlCol="0">
+            <a:spAutoFit/>
+          </a:bodyPr>
+          <a:p>
+            <a:pPr algn="ctr"/>
+            <a:r>
+              <a:rPr lang="en-US" altLang="zh-CN" sz="2400"/>
+              <a:t>Migrants from northern China</a:t>
+            </a:r>
+            <a:endParaRPr lang="en-US" altLang="zh-CN" sz="2400"/>
+          </a:p>
+        </p:txBody>
+      </p:sp>
+      <p:sp>
+        <p:nvSpPr>
+          <p:cNvPr id="5" name="文本框 4"/>
+          <p:cNvSpPr txBox="1"/>
+          <p:nvPr/>
+        </p:nvSpPr>
+        <p:spPr>
+          <a:xfrm>
+            <a:off x="4342765" y="3415665"/>
+            <a:ext cx="2797810" cy="829945"/>
+          </a:xfrm>
+          <a:prstGeom prst="rect">
+            <a:avLst/>
+          </a:prstGeom>
+          <a:noFill/>
+        </p:spPr>
+        <p:txBody>
+          <a:bodyPr wrap="square" rtlCol="0">
+            <a:spAutoFit/>
+          </a:bodyPr>
+          <a:p>
+            <a:pPr algn="ctr"/>
+            <a:r>
+              <a:rPr lang="en-US" altLang="zh-CN" sz="2400"/>
+              <a:t>Southwestern</a:t>
+            </a:r>
+            <a:endParaRPr lang="en-US" altLang="zh-CN" sz="2400"/>
+          </a:p>
+          <a:p>
+            <a:pPr algn="ctr"/>
+            <a:r>
+              <a:rPr lang="en-US" altLang="zh-CN" sz="2400"/>
+              <a:t>China</a:t>
+            </a:r>
+            <a:endParaRPr lang="en-US" altLang="zh-CN" sz="2400"/>
+          </a:p>
+        </p:txBody>
+      </p:sp>
+      <p:cxnSp>
+        <p:nvCxnSpPr>
+          <p:cNvPr id="6" name="直接箭头连接符 5"/>
+          <p:cNvCxnSpPr>
+            <a:stCxn id="4" idx="3"/>
+            <a:endCxn id="5" idx="1"/>
+          </p:cNvCxnSpPr>
+          <p:nvPr/>
+        </p:nvCxnSpPr>
+        <p:spPr>
+          <a:xfrm>
+            <a:off x="2600325" y="3830955"/>
+            <a:ext cx="1742440" cy="0"/>
+          </a:xfrm>
+          <a:prstGeom prst="straightConnector1">
+            <a:avLst/>
+          </a:prstGeom>
+          <a:ln w="31750" cap="rnd">
+            <a:solidFill>
+              <a:srgbClr val="FF0000"/>
+            </a:solidFill>
+            <a:round/>
+            <a:tailEnd type="arrow" w="med" len="med"/>
+          </a:ln>
+        </p:spPr>
+        <p:style>
+          <a:lnRef idx="0">
+            <a:srgbClr val="FFFFFF"/>
+          </a:lnRef>
+          <a:fillRef idx="0">
+            <a:srgbClr val="FFFFFF"/>
+          </a:fillRef>
+          <a:effectRef idx="0">
+            <a:srgbClr val="FFFFFF"/>
+          </a:effectRef>
+          <a:fontRef idx="minor">
+            <a:schemeClr val="tx1"/>
+          </a:fontRef>
+        </p:style>
+      </p:cxnSp>
+      <p:sp>
+        <p:nvSpPr>
+          <p:cNvPr id="7" name="文本框 6"/>
+          <p:cNvSpPr txBox="1"/>
+          <p:nvPr/>
+        </p:nvSpPr>
+        <p:spPr>
+          <a:xfrm>
+            <a:off x="2807970" y="3261360"/>
+            <a:ext cx="1327785" cy="460375"/>
+          </a:xfrm>
+          <a:prstGeom prst="rect">
+            <a:avLst/>
+          </a:prstGeom>
+          <a:noFill/>
+        </p:spPr>
+        <p:txBody>
+          <a:bodyPr wrap="square" rtlCol="0">
+            <a:spAutoFit/>
+          </a:bodyPr>
+          <a:p>
+            <a:pPr algn="ctr"/>
+            <a:r>
+              <a:rPr lang="en-US" altLang="zh-CN" sz="2400"/>
+              <a:t>Move to</a:t>
+            </a:r>
+            <a:endParaRPr lang="en-US" altLang="zh-CN" sz="2400"/>
+          </a:p>
+        </p:txBody>
+      </p:sp>
+      <p:sp>
+        <p:nvSpPr>
+          <p:cNvPr id="8" name="文本框 7"/>
+          <p:cNvSpPr txBox="1"/>
+          <p:nvPr/>
+        </p:nvSpPr>
+        <p:spPr>
+          <a:xfrm>
+            <a:off x="2226945" y="4245610"/>
+            <a:ext cx="2488565" cy="829945"/>
+          </a:xfrm>
+          <a:prstGeom prst="rect">
+            <a:avLst/>
+          </a:prstGeom>
+          <a:noFill/>
+        </p:spPr>
+        <p:txBody>
+          <a:bodyPr wrap="square" rtlCol="0">
+            <a:spAutoFit/>
+          </a:bodyPr>
+          <a:p>
+            <a:pPr algn="ctr"/>
+            <a:r>
+              <a:rPr lang="en-US" altLang="zh-CN" sz="2400"/>
+              <a:t>With techniques and tools</a:t>
+            </a:r>
+            <a:endParaRPr lang="en-US" altLang="zh-CN" sz="2400"/>
+          </a:p>
+        </p:txBody>
+      </p:sp>
+      <p:sp>
+        <p:nvSpPr>
+          <p:cNvPr id="9" name="文本框 8"/>
+          <p:cNvSpPr txBox="1"/>
+          <p:nvPr/>
+        </p:nvSpPr>
+        <p:spPr>
+          <a:xfrm>
+            <a:off x="8088630" y="3415665"/>
+            <a:ext cx="3789680" cy="829945"/>
+          </a:xfrm>
+          <a:prstGeom prst="rect">
+            <a:avLst/>
+          </a:prstGeom>
+          <a:noFill/>
+        </p:spPr>
+        <p:txBody>
+          <a:bodyPr wrap="square" rtlCol="0">
+            <a:spAutoFit/>
+          </a:bodyPr>
+          <a:p>
+            <a:pPr algn="ctr"/>
+            <a:r>
+              <a:rPr lang="en-US" altLang="zh-CN" sz="2400"/>
+              <a:t>Influence government, trade and daily life</a:t>
+            </a:r>
+            <a:endParaRPr lang="en-US" altLang="zh-CN" sz="2400"/>
+          </a:p>
+        </p:txBody>
+      </p:sp>
+      <p:cxnSp>
+        <p:nvCxnSpPr>
+          <p:cNvPr id="10" name="直接箭头连接符 9"/>
+          <p:cNvCxnSpPr>
+            <a:stCxn id="5" idx="3"/>
+            <a:endCxn id="9" idx="1"/>
+          </p:cNvCxnSpPr>
+          <p:nvPr/>
+        </p:nvCxnSpPr>
+        <p:spPr>
+          <a:xfrm>
+            <a:off x="7140575" y="3830955"/>
+            <a:ext cx="948055" cy="0"/>
+          </a:xfrm>
+          <a:prstGeom prst="straightConnector1">
+            <a:avLst/>
+          </a:prstGeom>
+          <a:ln w="31750" cap="rnd">
+            <a:solidFill>
+              <a:srgbClr val="FF0000"/>
+            </a:solidFill>
+            <a:round/>
+            <a:tailEnd type="arrow" w="med" len="med"/>
+          </a:ln>
+        </p:spPr>
+        <p:style>
+          <a:lnRef idx="0">
+            <a:srgbClr val="FFFFFF"/>
+          </a:lnRef>
+          <a:fillRef idx="0">
+            <a:srgbClr val="FFFFFF"/>
+          </a:fillRef>
+          <a:effectRef idx="0">
+            <a:srgbClr val="FFFFFF"/>
+          </a:effectRef>
+          <a:fontRef idx="minor">
+            <a:schemeClr val="tx1"/>
+          </a:fontRef>
+        </p:style>
+      </p:cxnSp>
+    </p:spTree>
+    <p:custDataLst>
+      <p:tags r:id="rId1"/>
+    </p:custDataLst>
+  </p:cSld>
+  <p:clrMapOvr>
+    <a:masterClrMapping/>
+  </p:clrMapOvr>
+  <p:timing>
+    <p:tnLst>
+      <p:par>
+        <p:cTn id="1" dur="indefinite" restart="never" nodeType="tmRoot">
+          <p:childTnLst>
+            <p:seq concurrent="1" nextAc="seek">
+              <p:cTn id="2" dur="indefinite" nodeType="mainSeq">
+                <p:childTnLst>
+                  <p:par>
+                    <p:cTn id="3" fill="hold">
+                      <p:stCondLst>
+                        <p:cond delay="indefinite"/>
+                      </p:stCondLst>
+                      <p:childTnLst>
+                        <p:par>
+                          <p:cTn id="4" fill="hold">
+                            <p:stCondLst>
+                              <p:cond delay="0"/>
+                            </p:stCondLst>
+                            <p:childTnLst>
+                              <p:par>
+                                <p:cTn id="5" presetID="2" presetClass="entr" presetSubtype="4" fill="hold" grpId="0" nodeType="clickEffect">
+                                  <p:stCondLst>
+                                    <p:cond delay="0"/>
+                                  </p:stCondLst>
+                                  <p:childTnLst>
+                                    <p:set>
+                                      <p:cBhvr>
+                                        <p:cTn id="6" dur="1" fill="hold">
+                                          <p:stCondLst>
+                                            <p:cond delay="0"/>
+                                          </p:stCondLst>
+                                        </p:cTn>
+                                        <p:tgtEl>
+                                          <p:spTgt spid="3"/>
+                                        </p:tgtEl>
+                                        <p:attrNameLst>
+                                          <p:attrName>style.visibility</p:attrName>
+                                        </p:attrNameLst>
+                                      </p:cBhvr>
+                                      <p:to>
+                                        <p:strVal val="visible"/>
+                                      </p:to>
+                                    </p:set>
+                                    <p:anim calcmode="lin" valueType="num">
+                                      <p:cBhvr additive="base">
+                                        <p:cTn id="7" dur="500" fill="hold"/>
+                                        <p:tgtEl>
+                                          <p:spTgt spid="3"/>
+                                        </p:tgtEl>
+                                        <p:attrNameLst>
+                                          <p:attrName>ppt_x</p:attrName>
+                                        </p:attrNameLst>
+                                      </p:cBhvr>
+                                      <p:tavLst>
+                                        <p:tav tm="0">
+                                          <p:val>
+                                            <p:strVal val="#ppt_x"/>
+                                          </p:val>
+                                        </p:tav>
+                                        <p:tav tm="100000">
+                                          <p:val>
+                                            <p:strVal val="#ppt_x"/>
+                                          </p:val>
+                                        </p:tav>
+                                      </p:tavLst>
+                                    </p:anim>
+                                    <p:anim calcmode="lin" valueType="num">
+                                      <p:cBhvr additive="base">
+                                        <p:cTn id="8" dur="500" fill="hold"/>
+                                        <p:tgtEl>
+                                          <p:spTgt spid="3"/>
+                                        </p:tgtEl>
+                                        <p:attrNameLst>
+                                          <p:attrName>ppt_y</p:attrName>
+                                        </p:attrNameLst>
+                                      </p:cBhvr>
+                                      <p:tavLst>
+                                        <p:tav tm="0">
+                                          <p:val>
+                                            <p:strVal val="1+#ppt_h/2"/>
+                                          </p:val>
+                                        </p:tav>
+                                        <p:tav tm="100000">
+                                          <p:val>
+                                            <p:strVal val="#ppt_y"/>
+                                          </p:val>
+                                        </p:tav>
+                                      </p:tavLst>
+                                    </p:anim>
+                                  </p:childTnLst>
+                                </p:cTn>
+                              </p:par>
+                            </p:childTnLst>
+                          </p:cTn>
+                        </p:par>
+                      </p:childTnLst>
+                    </p:cTn>
+                  </p:par>
+                  <p:par>
+                    <p:cTn id="9" fill="hold">
+                      <p:stCondLst>
+                        <p:cond delay="indefinite"/>
+                      </p:stCondLst>
+                      <p:childTnLst>
+                        <p:par>
+                          <p:cTn id="10" fill="hold">
+                            <p:stCondLst>
+                              <p:cond delay="0"/>
+                            </p:stCondLst>
+                            <p:childTnLst>
+                              <p:par>
+                                <p:cTn id="11" presetID="2" presetClass="entr" presetSubtype="4" fill="hold" grpId="0" nodeType="clickEffect">
+                                  <p:stCondLst>
+                                    <p:cond delay="0"/>
+                                  </p:stCondLst>
+                                  <p:childTnLst>
+                                    <p:set>
+                                      <p:cBhvr>
+                                        <p:cTn id="12" dur="1" fill="hold">
+                                          <p:stCondLst>
+                                            <p:cond delay="0"/>
+                                          </p:stCondLst>
+                                        </p:cTn>
+                                        <p:tgtEl>
+                                          <p:spTgt spid="4"/>
+                                        </p:tgtEl>
+                                        <p:attrNameLst>
+                                          <p:attrName>style.visibility</p:attrName>
+                                        </p:attrNameLst>
+                                      </p:cBhvr>
+                                      <p:to>
+                                        <p:strVal val="visible"/>
+                                      </p:to>
+                                    </p:set>
+                                    <p:anim calcmode="lin" valueType="num">
+                                      <p:cBhvr additive="base">
+                                        <p:cTn id="13" dur="500" fill="hold"/>
+                                        <p:tgtEl>
+                                          <p:spTgt spid="4"/>
+                                        </p:tgtEl>
+                                        <p:attrNameLst>
+                                          <p:attrName>ppt_x</p:attrName>
+                                        </p:attrNameLst>
+                                      </p:cBhvr>
+                                      <p:tavLst>
+                                        <p:tav tm="0">
+                                          <p:val>
+                                            <p:strVal val="#ppt_x"/>
+                                          </p:val>
+                                        </p:tav>
+                                        <p:tav tm="100000">
+                                          <p:val>
+                                            <p:strVal val="#ppt_x"/>
+                                          </p:val>
+                                        </p:tav>
+                                      </p:tavLst>
+                                    </p:anim>
+                                    <p:anim calcmode="lin" valueType="num">
+                                      <p:cBhvr additive="base">
+                                        <p:cTn id="14" dur="500" fill="hold"/>
+                                        <p:tgtEl>
+                                          <p:spTgt spid="4"/>
+                                        </p:tgtEl>
+                                        <p:attrNameLst>
+                                          <p:attrName>ppt_y</p:attrName>
+                                        </p:attrNameLst>
+                                      </p:cBhvr>
+                                      <p:tavLst>
+                                        <p:tav tm="0">
+                                          <p:val>
+                                            <p:strVal val="1+#ppt_h/2"/>
+                                          </p:val>
+                                        </p:tav>
+                                        <p:tav tm="100000">
+                                          <p:val>
+                                            <p:strVal val="#ppt_y"/>
+                                          </p:val>
+                                        </p:tav>
+                                      </p:tavLst>
+                                    </p:anim>
+                                  </p:childTnLst>
+                                </p:cTn>
+                              </p:par>
+                            </p:childTnLst>
+                          </p:cTn>
+                        </p:par>
+                      </p:childTnLst>
+                    </p:cTn>
+                  </p:par>
+                  <p:par>
+                    <p:cTn id="15" fill="hold">
+                      <p:stCondLst>
+                        <p:cond delay="indefinite"/>
+                      </p:stCondLst>
+                      <p:childTnLst>
+                        <p:par>
+                          <p:cTn id="16" fill="hold">
+                            <p:stCondLst>
+                              <p:cond delay="0"/>
+                            </p:stCondLst>
+                            <p:childTnLst>
+                              <p:par>
+                                <p:cTn id="17" presetID="2" presetClass="entr" presetSubtype="4" fill="hold" grpId="0" nodeType="clickEffect">
+                                  <p:stCondLst>
+                                    <p:cond delay="0"/>
+                                  </p:stCondLst>
+                                  <p:childTnLst>
+                                    <p:set>
+                                      <p:cBhvr>
+                                        <p:cTn id="18" dur="1" fill="hold">
+                                          <p:stCondLst>
+                                            <p:cond delay="0"/>
+                                          </p:stCondLst>
+                                        </p:cTn>
+                                        <p:tgtEl>
+                                          <p:spTgt spid="5"/>
+                                        </p:tgtEl>
+                                        <p:attrNameLst>
+                                          <p:attrName>style.visibility</p:attrName>
+                                        </p:attrNameLst>
+                                      </p:cBhvr>
+                                      <p:to>
+                                        <p:strVal val="visible"/>
+                                      </p:to>
+                                    </p:set>
+                                    <p:anim calcmode="lin" valueType="num">
+                                      <p:cBhvr additive="base">
+                                        <p:cTn id="19" dur="500" fill="hold"/>
+                                        <p:tgtEl>
+                                          <p:spTgt spid="5"/>
+                                        </p:tgtEl>
+                                        <p:attrNameLst>
+                                          <p:attrName>ppt_x</p:attrName>
+                                        </p:attrNameLst>
+                                      </p:cBhvr>
+                                      <p:tavLst>
+                                        <p:tav tm="0">
+                                          <p:val>
+                                            <p:strVal val="#ppt_x"/>
+                                          </p:val>
+                                        </p:tav>
+                                        <p:tav tm="100000">
+                                          <p:val>
+                                            <p:strVal val="#ppt_x"/>
+                                          </p:val>
+                                        </p:tav>
+                                      </p:tavLst>
+                                    </p:anim>
+                                    <p:anim calcmode="lin" valueType="num">
+                                      <p:cBhvr additive="base">
+                                        <p:cTn id="20" dur="500" fill="hold"/>
+                                        <p:tgtEl>
+                                          <p:spTgt spid="5"/>
+                                        </p:tgtEl>
+                                        <p:attrNameLst>
+                                          <p:attrName>ppt_y</p:attrName>
+                                        </p:attrNameLst>
+                                      </p:cBhvr>
+                                      <p:tavLst>
+                                        <p:tav tm="0">
+                                          <p:val>
+                                            <p:strVal val="1+#ppt_h/2"/>
+                                          </p:val>
+                                        </p:tav>
+                                        <p:tav tm="100000">
+                                          <p:val>
+                                            <p:strVal val="#ppt_y"/>
+                                          </p:val>
+                                        </p:tav>
+                                      </p:tavLst>
+                                    </p:anim>
+                                  </p:childTnLst>
+                                </p:cTn>
+                              </p:par>
+                              <p:par>
+                                <p:cTn id="21" presetID="2" presetClass="entr" presetSubtype="4" fill="hold" nodeType="withEffect">
+                                  <p:stCondLst>
+                                    <p:cond delay="0"/>
+                                  </p:stCondLst>
+                                  <p:childTnLst>
+                                    <p:set>
+                                      <p:cBhvr>
+                                        <p:cTn id="22" dur="1" fill="hold">
+                                          <p:stCondLst>
+                                            <p:cond delay="0"/>
+                                          </p:stCondLst>
+                                        </p:cTn>
+                                        <p:tgtEl>
+                                          <p:spTgt spid="6"/>
+                                        </p:tgtEl>
+                                        <p:attrNameLst>
+                                          <p:attrName>style.visibility</p:attrName>
+                                        </p:attrNameLst>
+                                      </p:cBhvr>
+                                      <p:to>
+                                        <p:strVal val="visible"/>
+                                      </p:to>
+                                    </p:set>
+                                    <p:anim calcmode="lin" valueType="num">
+                                      <p:cBhvr additive="base">
+                                        <p:cTn id="23" dur="500" fill="hold"/>
+                                        <p:tgtEl>
+                                          <p:spTgt spid="6"/>
+                                        </p:tgtEl>
+                                        <p:attrNameLst>
+                                          <p:attrName>ppt_x</p:attrName>
+                                        </p:attrNameLst>
+                                      </p:cBhvr>
+                                      <p:tavLst>
+                                        <p:tav tm="0">
+                                          <p:val>
+                                            <p:strVal val="#ppt_x"/>
+                                          </p:val>
+                                        </p:tav>
+                                        <p:tav tm="100000">
+                                          <p:val>
+                                            <p:strVal val="#ppt_x"/>
+                                          </p:val>
+                                        </p:tav>
+                                      </p:tavLst>
+                                    </p:anim>
+                                    <p:anim calcmode="lin" valueType="num">
+                                      <p:cBhvr additive="base">
+                                        <p:cTn id="24" dur="500" fill="hold"/>
+                                        <p:tgtEl>
+                                          <p:spTgt spid="6"/>
+                                        </p:tgtEl>
+                                        <p:attrNameLst>
+                                          <p:attrName>ppt_y</p:attrName>
+                                        </p:attrNameLst>
+                                      </p:cBhvr>
+                                      <p:tavLst>
+                                        <p:tav tm="0">
+                                          <p:val>
+                                            <p:strVal val="1+#ppt_h/2"/>
+                                          </p:val>
+                                        </p:tav>
+                                        <p:tav tm="100000">
+                                          <p:val>
+                                            <p:strVal val="#ppt_y"/>
+                                          </p:val>
+                                        </p:tav>
+                                      </p:tavLst>
+                                    </p:anim>
+                                  </p:childTnLst>
+                                </p:cTn>
+                              </p:par>
+                              <p:par>
+                                <p:cTn id="25" presetID="2" presetClass="entr" presetSubtype="4" fill="hold" grpId="0" nodeType="withEffect">
+                                  <p:stCondLst>
+                                    <p:cond delay="0"/>
+                                  </p:stCondLst>
+                                  <p:childTnLst>
+                                    <p:set>
+                                      <p:cBhvr>
+                                        <p:cTn id="26" dur="1" fill="hold">
+                                          <p:stCondLst>
+                                            <p:cond delay="0"/>
+                                          </p:stCondLst>
+                                        </p:cTn>
+                                        <p:tgtEl>
+                                          <p:spTgt spid="7"/>
+                                        </p:tgtEl>
+                                        <p:attrNameLst>
+                                          <p:attrName>style.visibility</p:attrName>
+                                        </p:attrNameLst>
+                                      </p:cBhvr>
+                                      <p:to>
+                                        <p:strVal val="visible"/>
+                                      </p:to>
+                                    </p:set>
+                                    <p:anim calcmode="lin" valueType="num">
+                                      <p:cBhvr additive="base">
+                                        <p:cTn id="27" dur="500" fill="hold"/>
+                                        <p:tgtEl>
+                                          <p:spTgt spid="7"/>
+                                        </p:tgtEl>
+                                        <p:attrNameLst>
+                                          <p:attrName>ppt_x</p:attrName>
+                                        </p:attrNameLst>
+                                      </p:cBhvr>
+                                      <p:tavLst>
+                                        <p:tav tm="0">
+                                          <p:val>
+                                            <p:strVal val="#ppt_x"/>
+                                          </p:val>
+                                        </p:tav>
+                                        <p:tav tm="100000">
+                                          <p:val>
+                                            <p:strVal val="#ppt_x"/>
+                                          </p:val>
+                                        </p:tav>
+                                      </p:tavLst>
+                                    </p:anim>
+                                    <p:anim calcmode="lin" valueType="num">
+                                      <p:cBhvr additive="base">
+                                        <p:cTn id="28" dur="500" fill="hold"/>
+                                        <p:tgtEl>
+                                          <p:spTgt spid="7"/>
+                                        </p:tgtEl>
+                                        <p:attrNameLst>
+                                          <p:attrName>ppt_y</p:attrName>
+                                        </p:attrNameLst>
+                                      </p:cBhvr>
+                                      <p:tavLst>
+                                        <p:tav tm="0">
+                                          <p:val>
+                                            <p:strVal val="1+#ppt_h/2"/>
+                                          </p:val>
+                                        </p:tav>
+                                        <p:tav tm="100000">
+                                          <p:val>
+                                            <p:strVal val="#ppt_y"/>
+                                          </p:val>
+                                        </p:tav>
+                                      </p:tavLst>
+                                    </p:anim>
+                                  </p:childTnLst>
+                                </p:cTn>
+                              </p:par>
+                              <p:par>
+                                <p:cTn id="29" presetID="2" presetClass="entr" presetSubtype="4" fill="hold" grpId="0" nodeType="withEffect">
+                                  <p:stCondLst>
+                                    <p:cond delay="0"/>
+                                  </p:stCondLst>
+                                  <p:childTnLst>
+                                    <p:set>
+                                      <p:cBhvr>
+                                        <p:cTn id="30" dur="1" fill="hold">
+                                          <p:stCondLst>
+                                            <p:cond delay="0"/>
+                                          </p:stCondLst>
+                                        </p:cTn>
+                                        <p:tgtEl>
+                                          <p:spTgt spid="8"/>
+                                        </p:tgtEl>
+                                        <p:attrNameLst>
+                                          <p:attrName>style.visibility</p:attrName>
+                                        </p:attrNameLst>
+                                      </p:cBhvr>
+                                      <p:to>
+                                        <p:strVal val="visible"/>
+                                      </p:to>
+                                    </p:set>
+                                    <p:anim calcmode="lin" valueType="num">
+                                      <p:cBhvr additive="base">
+                                        <p:cTn id="31" dur="500" fill="hold"/>
+                                        <p:tgtEl>
+                                          <p:spTgt spid="8"/>
+                                        </p:tgtEl>
+                                        <p:attrNameLst>
+                                          <p:attrName>ppt_x</p:attrName>
+                                        </p:attrNameLst>
+                                      </p:cBhvr>
+                                      <p:tavLst>
+                                        <p:tav tm="0">
+                                          <p:val>
+                                            <p:strVal val="#ppt_x"/>
+                                          </p:val>
+                                        </p:tav>
+                                        <p:tav tm="100000">
+                                          <p:val>
+                                            <p:strVal val="#ppt_x"/>
+                                          </p:val>
+                                        </p:tav>
+                                      </p:tavLst>
+                                    </p:anim>
+                                    <p:anim calcmode="lin" valueType="num">
+                                      <p:cBhvr additive="base">
+                                        <p:cTn id="32" dur="500" fill="hold"/>
+                                        <p:tgtEl>
+                                          <p:spTgt spid="8"/>
+                                        </p:tgtEl>
+                                        <p:attrNameLst>
+                                          <p:attrName>ppt_y</p:attrName>
+                                        </p:attrNameLst>
+                                      </p:cBhvr>
+                                      <p:tavLst>
+                                        <p:tav tm="0">
+                                          <p:val>
+                                            <p:strVal val="1+#ppt_h/2"/>
+                                          </p:val>
+                                        </p:tav>
+                                        <p:tav tm="100000">
+                                          <p:val>
+                                            <p:strVal val="#ppt_y"/>
+                                          </p:val>
+                                        </p:tav>
+                                      </p:tavLst>
+                                    </p:anim>
+                                  </p:childTnLst>
+                                </p:cTn>
+                              </p:par>
+                            </p:childTnLst>
+                          </p:cTn>
+                        </p:par>
+                      </p:childTnLst>
+                    </p:cTn>
+                  </p:par>
+                  <p:par>
+                    <p:cTn id="33" fill="hold">
+                      <p:stCondLst>
+                        <p:cond delay="indefinite"/>
+                      </p:stCondLst>
+                      <p:childTnLst>
+                        <p:par>
+                          <p:cTn id="34" fill="hold">
+                            <p:stCondLst>
+                              <p:cond delay="0"/>
+                            </p:stCondLst>
+                            <p:childTnLst>
+                              <p:par>
+                                <p:cTn id="35" presetID="2" presetClass="entr" presetSubtype="4" fill="hold" grpId="0" nodeType="clickEffect">
+                                  <p:stCondLst>
+                                    <p:cond delay="0"/>
+                                  </p:stCondLst>
+                                  <p:childTnLst>
+                                    <p:set>
+                                      <p:cBhvr>
+                                        <p:cTn id="36" dur="1" fill="hold">
+                                          <p:stCondLst>
+                                            <p:cond delay="0"/>
+                                          </p:stCondLst>
+                                        </p:cTn>
+                                        <p:tgtEl>
+                                          <p:spTgt spid="9"/>
+                                        </p:tgtEl>
+                                        <p:attrNameLst>
+                                          <p:attrName>style.visibility</p:attrName>
+                                        </p:attrNameLst>
+                                      </p:cBhvr>
+                                      <p:to>
+                                        <p:strVal val="visible"/>
+                                      </p:to>
+                                    </p:set>
+                                    <p:anim calcmode="lin" valueType="num">
+                                      <p:cBhvr additive="base">
+                                        <p:cTn id="37" dur="500" fill="hold"/>
+                                        <p:tgtEl>
+                                          <p:spTgt spid="9"/>
+                                        </p:tgtEl>
+                                        <p:attrNameLst>
+                                          <p:attrName>ppt_x</p:attrName>
+                                        </p:attrNameLst>
+                                      </p:cBhvr>
+                                      <p:tavLst>
+                                        <p:tav tm="0">
+                                          <p:val>
+                                            <p:strVal val="#ppt_x"/>
+                                          </p:val>
+                                        </p:tav>
+                                        <p:tav tm="100000">
+                                          <p:val>
+                                            <p:strVal val="#ppt_x"/>
+                                          </p:val>
+                                        </p:tav>
+                                      </p:tavLst>
+                                    </p:anim>
+                                    <p:anim calcmode="lin" valueType="num">
+                                      <p:cBhvr additive="base">
+                                        <p:cTn id="38" dur="500" fill="hold"/>
+                                        <p:tgtEl>
+                                          <p:spTgt spid="9"/>
+                                        </p:tgtEl>
+                                        <p:attrNameLst>
+                                          <p:attrName>ppt_y</p:attrName>
+                                        </p:attrNameLst>
+                                      </p:cBhvr>
+                                      <p:tavLst>
+                                        <p:tav tm="0">
+                                          <p:val>
+                                            <p:strVal val="1+#ppt_h/2"/>
+                                          </p:val>
+                                        </p:tav>
+                                        <p:tav tm="100000">
+                                          <p:val>
+                                            <p:strVal val="#ppt_y"/>
+                                          </p:val>
+                                        </p:tav>
+                                      </p:tavLst>
+                                    </p:anim>
+                                  </p:childTnLst>
+                                </p:cTn>
+                              </p:par>
+                              <p:par>
+                                <p:cTn id="39" presetID="2" presetClass="entr" presetSubtype="4" fill="hold" nodeType="withEffect">
+                                  <p:stCondLst>
+                                    <p:cond delay="0"/>
+                                  </p:stCondLst>
+                                  <p:childTnLst>
+                                    <p:set>
+                                      <p:cBhvr>
+                                        <p:cTn id="40" dur="1" fill="hold">
+                                          <p:stCondLst>
+                                            <p:cond delay="0"/>
+                                          </p:stCondLst>
+                                        </p:cTn>
+                                        <p:tgtEl>
+                                          <p:spTgt spid="10"/>
+                                        </p:tgtEl>
+                                        <p:attrNameLst>
+                                          <p:attrName>style.visibility</p:attrName>
+                                        </p:attrNameLst>
+                                      </p:cBhvr>
+                                      <p:to>
+                                        <p:strVal val="visible"/>
+                                      </p:to>
+                                    </p:set>
+                                    <p:anim calcmode="lin" valueType="num">
+                                      <p:cBhvr additive="base">
+                                        <p:cTn id="41" dur="500" fill="hold"/>
+                                        <p:tgtEl>
+                                          <p:spTgt spid="10"/>
+                                        </p:tgtEl>
+                                        <p:attrNameLst>
+                                          <p:attrName>ppt_x</p:attrName>
+                                        </p:attrNameLst>
+                                      </p:cBhvr>
+                                      <p:tavLst>
+                                        <p:tav tm="0">
+                                          <p:val>
+                                            <p:strVal val="#ppt_x"/>
+                                          </p:val>
+                                        </p:tav>
+                                        <p:tav tm="100000">
+                                          <p:val>
+                                            <p:strVal val="#ppt_x"/>
+                                          </p:val>
+                                        </p:tav>
+                                      </p:tavLst>
+                                    </p:anim>
+                                    <p:anim calcmode="lin" valueType="num">
+                                      <p:cBhvr additive="base">
+                                        <p:cTn id="42" dur="500" fill="hold"/>
+                                        <p:tgtEl>
+                                          <p:spTgt spid="10"/>
+                                        </p:tgtEl>
+                                        <p:attrNameLst>
+                                          <p:attrName>ppt_y</p:attrName>
+                                        </p:attrNameLst>
+                                      </p:cBhvr>
+                                      <p:tavLst>
+                                        <p:tav tm="0">
+                                          <p:val>
+                                            <p:strVal val="1+#ppt_h/2"/>
+                                          </p:val>
+                                        </p:tav>
+                                        <p:tav tm="100000">
+                                          <p:val>
+                                            <p:strVal val="#ppt_y"/>
+                                          </p:val>
+                                        </p:tav>
+                                      </p:tavLst>
+                                    </p:anim>
+                                  </p:childTnLst>
+                                </p:cTn>
+                              </p:par>
+                            </p:childTnLst>
+                          </p:cTn>
+                        </p:par>
+                      </p:childTnLst>
+                    </p:cTn>
+                  </p:par>
+                </p:childTnLst>
+              </p:cTn>
+              <p:prevCondLst>
+                <p:cond evt="onPrev" delay="0">
+                  <p:tgtEl>
+                    <p:sldTgt/>
+                  </p:tgtEl>
+                </p:cond>
+              </p:prevCondLst>
+              <p:nextCondLst>
+                <p:cond evt="onNext" delay="0">
+                  <p:tgtEl>
+                    <p:sldTgt/>
+                  </p:tgtEl>
+                </p:cond>
+              </p:nextCondLst>
+            </p:seq>
+          </p:childTnLst>
+        </p:cTn>
+      </p:par>
+    </p:tnLst>
+    <p:bldLst>
+      <p:bldP spid="3" grpId="0"/>
+      <p:bldP spid="3" grpId="1"/>
+      <p:bldP spid="4" grpId="0"/>
+      <p:bldP spid="4" grpId="1"/>
+      <p:bldP spid="5" grpId="0"/>
+      <p:bldP spid="7" grpId="0"/>
+      <p:bldP spid="8" grpId="0"/>
+      <p:bldP spid="5" grpId="1"/>
+      <p:bldP spid="7" grpId="1"/>
+      <p:bldP spid="8" grpId="1"/>
+      <p:bldP spid="9" grpId="0"/>
+      <p:bldP spid="9" grpId="1"/>
+    </p:bldLst>
+  </p:timing>
+</p:sld>
+</file>
+
+<file path=ppt/slides/slide8.xml><?xml version="1.0" encoding="utf-8"?>
+<p:sld xmlns:a="http://schemas.openxmlformats.org/drawingml/2006/main" xmlns:r="http://schemas.openxmlformats.org/officeDocument/2006/relationships" xmlns:p="http://schemas.openxmlformats.org/presentationml/2006/main">
+  <p:cSld>
+    <p:spTree>
+      <p:nvGrpSpPr>
+        <p:cNvPr id="1" name=""/>
+        <p:cNvGrpSpPr/>
+        <p:nvPr/>
+      </p:nvGrpSpPr>
+      <p:grpSpPr/>
+      <p:sp>
+        <p:nvSpPr>
+          <p:cNvPr id="2" name="文本框 1"/>
+          <p:cNvSpPr txBox="1"/>
+          <p:nvPr/>
+        </p:nvSpPr>
+        <p:spPr>
+          <a:xfrm>
+            <a:off x="581025" y="501650"/>
+            <a:ext cx="3103880" cy="706755"/>
+          </a:xfrm>
+          <a:prstGeom prst="rect">
+            <a:avLst/>
+          </a:prstGeom>
+          <a:noFill/>
+        </p:spPr>
+        <p:txBody>
+          <a:bodyPr wrap="square" rtlCol="0">
+            <a:spAutoFit/>
+          </a:bodyPr>
+          <a:p>
+            <a:pPr algn="ctr"/>
+            <a:r>
+              <a:rPr lang="en-US" altLang="zh-CN" sz="4000"/>
+              <a:t>Conclusion</a:t>
+            </a:r>
+            <a:endParaRPr lang="en-US" altLang="zh-CN" sz="4000"/>
+          </a:p>
+        </p:txBody>
+      </p:sp>
+      <p:sp>
+        <p:nvSpPr>
+          <p:cNvPr id="3" name="文本框 2"/>
+          <p:cNvSpPr txBox="1"/>
+          <p:nvPr/>
+        </p:nvSpPr>
+        <p:spPr>
+          <a:xfrm>
+            <a:off x="581025" y="1413510"/>
+            <a:ext cx="10826115" cy="4030980"/>
+          </a:xfrm>
+          <a:prstGeom prst="rect">
+            <a:avLst/>
+          </a:prstGeom>
+          <a:noFill/>
+        </p:spPr>
+        <p:txBody>
+          <a:bodyPr wrap="square" rtlCol="0">
+            <a:spAutoFit/>
+          </a:bodyPr>
+          <a:p>
+            <a:r>
+              <a:rPr lang="en-US" altLang="zh-CN" sz="3200"/>
+              <a:t>- We can guess where a person comes from by the dialect he or she speaks.</a:t>
+            </a:r>
+            <a:endParaRPr lang="en-US" altLang="zh-CN" sz="3200"/>
+          </a:p>
+          <a:p>
+            <a:endParaRPr lang="en-US" altLang="zh-CN" sz="3200"/>
+          </a:p>
+          <a:p>
+            <a:r>
+              <a:rPr lang="en-US" altLang="zh-CN" sz="3200"/>
+              <a:t>- The way we speak in daily life reflects the history and features of our country.</a:t>
+            </a:r>
+            <a:endParaRPr lang="en-US" altLang="zh-CN" sz="3200"/>
+          </a:p>
+          <a:p>
+            <a:endParaRPr lang="en-US" altLang="zh-CN" sz="3200"/>
+          </a:p>
+          <a:p>
+            <a:r>
+              <a:rPr lang="en-US" altLang="zh-CN" sz="3200"/>
+              <a:t>- The dialect represents your roots and connects you with your ancestors.</a:t>
+            </a:r>
+            <a:endParaRPr lang="en-US" altLang="zh-CN" sz="3200"/>
+          </a:p>
+        </p:txBody>
+      </p:sp>
+    </p:spTree>
+    <p:custDataLst>
+      <p:tags r:id="rId1"/>
+    </p:custDataLst>
+  </p:cSld>
+  <p:clrMapOvr>
+    <a:masterClrMapping/>
+  </p:clrMapOvr>
+</p:sld>
+</file>
+
+<file path=ppt/slides/slide9.xml><?xml version="1.0" encoding="utf-8"?>
+<p:sld xmlns:a="http://schemas.openxmlformats.org/drawingml/2006/main" xmlns:r="http://schemas.openxmlformats.org/officeDocument/2006/relationships" xmlns:p="http://schemas.openxmlformats.org/presentationml/2006/main">
+  <p:cSld>
+    <p:spTree>
+      <p:nvGrpSpPr>
+        <p:cNvPr id="1" name=""/>
+        <p:cNvGrpSpPr/>
+        <p:nvPr/>
+      </p:nvGrpSpPr>
+      <p:grpSpPr/>
+      <p:sp>
+        <p:nvSpPr>
+          <p:cNvPr id="2" name="文本框 1"/>
+          <p:cNvSpPr txBox="1"/>
+          <p:nvPr/>
+        </p:nvSpPr>
+        <p:spPr>
+          <a:xfrm>
+            <a:off x="805180" y="1476375"/>
+            <a:ext cx="10582275" cy="4030980"/>
+          </a:xfrm>
+          <a:prstGeom prst="rect">
+            <a:avLst/>
+          </a:prstGeom>
+          <a:noFill/>
+        </p:spPr>
+        <p:txBody>
+          <a:bodyPr wrap="square" rtlCol="0">
+            <a:spAutoFit/>
+          </a:bodyPr>
+          <a:p>
+            <a:r>
+              <a:rPr lang="en-US" altLang="zh-CN" sz="3200"/>
+              <a:t>1. Used Codex to find the reason why the northern and southern dialects are different.</a:t>
+            </a:r>
+            <a:endParaRPr lang="en-US" altLang="zh-CN" sz="3200"/>
+          </a:p>
+          <a:p>
+            <a:endParaRPr lang="en-US" altLang="zh-CN" sz="3200"/>
+          </a:p>
+          <a:p>
+            <a:r>
+              <a:rPr lang="en-US" altLang="zh-CN" sz="3200"/>
+              <a:t>2. Used Codex to find error in PPT and the spoken sheet.</a:t>
+            </a:r>
+            <a:endParaRPr lang="en-US" altLang="zh-CN" sz="3200"/>
+          </a:p>
+          <a:p>
+            <a:endParaRPr lang="en-US" altLang="zh-CN" sz="3200"/>
+          </a:p>
+          <a:p>
+            <a:r>
+              <a:rPr lang="en-US" altLang="zh-CN" sz="3200"/>
+              <a:t>3. Used Codex to make my language more native.</a:t>
+            </a:r>
+            <a:endParaRPr lang="en-US" altLang="zh-CN" sz="3200"/>
+          </a:p>
+          <a:p>
+            <a:endParaRPr lang="en-US" altLang="zh-CN" sz="3200"/>
+          </a:p>
+          <a:p>
+            <a:r>
+              <a:rPr lang="en-US" altLang="zh-CN" sz="3200"/>
+              <a:t>4. Use AI to generate the audio.</a:t>
+            </a:r>
+            <a:endParaRPr lang="en-US" altLang="zh-CN" sz="3200"/>
+          </a:p>
+        </p:txBody>
+      </p:sp>
+      <p:sp>
+        <p:nvSpPr>
+          <p:cNvPr id="4" name="文本框 3"/>
+          <p:cNvSpPr txBox="1"/>
+          <p:nvPr/>
+        </p:nvSpPr>
+        <p:spPr>
+          <a:xfrm>
+            <a:off x="581025" y="501650"/>
+            <a:ext cx="3103880" cy="706755"/>
+          </a:xfrm>
+          <a:prstGeom prst="rect">
+            <a:avLst/>
+          </a:prstGeom>
+          <a:noFill/>
+        </p:spPr>
+        <p:txBody>
+          <a:bodyPr wrap="square" rtlCol="0">
+            <a:spAutoFit/>
+          </a:bodyPr>
+          <a:p>
+            <a:pPr algn="ctr"/>
+            <a:r>
+              <a:rPr lang="en-US" altLang="zh-CN" sz="4000"/>
+              <a:t>Reference</a:t>
+            </a:r>
+            <a:endParaRPr lang="en-US" altLang="zh-CN" sz="4000"/>
+          </a:p>
+        </p:txBody>
+      </p:sp>
+    </p:spTree>
+    <p:custDataLst>
+      <p:tags r:id="rId1"/>
+    </p:custDataLst>
+  </p:cSld>
+  <p:clrMapOvr>
+    <a:masterClrMapping/>
+  </p:clrMapOvr>
+</p:sld>
+</file>
+
 <file path=ppt/tags/tag1.xml><?xml version="1.0" encoding="utf-8"?>
 <p:tagLst xmlns:p="http://schemas.openxmlformats.org/presentationml/2006/main">
   <p:tag name="KSO_WM_UNIT_HIGHLIGHT" val="0"/>
@@ -5516,6 +7375,14 @@
 </p:tagLst>
 </file>
 
+<file path=ppt/tags/tag69.xml><?xml version="1.0" encoding="utf-8"?>
+<p:tagLst xmlns:p="http://schemas.openxmlformats.org/presentationml/2006/main">
+  <p:tag name="KSO_WM_BEAUTIFY_FLAG" val="#wm#"/>
+  <p:tag name="KSO_WM_TEMPLATE_CATEGORY" val="custom"/>
+  <p:tag name="KSO_WM_TEMPLATE_INDEX" val="20205081"/>
+</p:tagLst>
+</file>
+
 <file path=ppt/tags/tag7.xml><?xml version="1.0" encoding="utf-8"?>
 <p:tagLst xmlns:p="http://schemas.openxmlformats.org/presentationml/2006/main">
   <p:tag name="KSO_WM_UNIT_HIGHLIGHT" val="0"/>
@@ -5526,6 +7393,38 @@
   <p:tag name="KSO_WM_UNIT_LAYERLEVEL" val="1"/>
   <p:tag name="KSO_WM_TAG_VERSION" val="1.0"/>
   <p:tag name="KSO_WM_BEAUTIFY_FLAG" val="#wm#"/>
+</p:tagLst>
+</file>
+
+<file path=ppt/tags/tag70.xml><?xml version="1.0" encoding="utf-8"?>
+<p:tagLst xmlns:p="http://schemas.openxmlformats.org/presentationml/2006/main">
+  <p:tag name="KSO_WM_BEAUTIFY_FLAG" val="#wm#"/>
+  <p:tag name="KSO_WM_TEMPLATE_CATEGORY" val="custom"/>
+  <p:tag name="KSO_WM_TEMPLATE_INDEX" val="20205081"/>
+</p:tagLst>
+</file>
+
+<file path=ppt/tags/tag71.xml><?xml version="1.0" encoding="utf-8"?>
+<p:tagLst xmlns:p="http://schemas.openxmlformats.org/presentationml/2006/main">
+  <p:tag name="KSO_WM_BEAUTIFY_FLAG" val="#wm#"/>
+  <p:tag name="KSO_WM_TEMPLATE_CATEGORY" val="custom"/>
+  <p:tag name="KSO_WM_TEMPLATE_INDEX" val="20205081"/>
+</p:tagLst>
+</file>
+
+<file path=ppt/tags/tag72.xml><?xml version="1.0" encoding="utf-8"?>
+<p:tagLst xmlns:p="http://schemas.openxmlformats.org/presentationml/2006/main">
+  <p:tag name="KSO_WM_BEAUTIFY_FLAG" val="#wm#"/>
+  <p:tag name="KSO_WM_TEMPLATE_CATEGORY" val="custom"/>
+  <p:tag name="KSO_WM_TEMPLATE_INDEX" val="20205081"/>
+</p:tagLst>
+</file>
+
+<file path=ppt/tags/tag73.xml><?xml version="1.0" encoding="utf-8"?>
+<p:tagLst xmlns:p="http://schemas.openxmlformats.org/presentationml/2006/main">
+  <p:tag name="KSO_WM_BEAUTIFY_FLAG" val="#wm#"/>
+  <p:tag name="KSO_WM_TEMPLATE_CATEGORY" val="custom"/>
+  <p:tag name="KSO_WM_TEMPLATE_INDEX" val="20205081"/>
 </p:tagLst>
 </file>
 

--- a/南科大/SE2/presentation.pptx
+++ b/南科大/SE2/presentation.pptx
@@ -4,6 +4,9 @@
   <p:sldMasterIdLst>
     <p:sldMasterId id="2147483648" r:id="rId1"/>
   </p:sldMasterIdLst>
+  <p:notesMasterIdLst>
+    <p:notesMasterId r:id="rId13"/>
+  </p:notesMasterIdLst>
   <p:sldIdLst>
     <p:sldId id="256" r:id="rId3"/>
     <p:sldId id="257" r:id="rId4"/>
@@ -13,10 +16,10 @@
     <p:sldId id="261" r:id="rId8"/>
     <p:sldId id="262" r:id="rId9"/>
     <p:sldId id="263" r:id="rId10"/>
-    <p:sldId id="265" r:id="rId11"/>
-    <p:sldId id="264" r:id="rId12"/>
+    <p:sldId id="264" r:id="rId11"/>
+    <p:sldId id="265" r:id="rId12"/>
   </p:sldIdLst>
-  <p:sldSz cx="12192000" cy="6858000"/>
+  <p:sldSz cx="12192000" cy="6858000" type="screen16x9"/>
   <p:notesSz cx="6858000" cy="9144000"/>
   <p:defaultTextStyle>
     <a:defPPr>
@@ -116,7 +119,7 @@
   <p:extLst>
     <p:ext uri="{EFAFB233-063F-42B5-8137-9DF3F51BA10A}">
       <p15:sldGuideLst xmlns:p15="http://schemas.microsoft.com/office/powerpoint/2012/main">
-        <p15:guide id="1" orient="horz" pos="2212" userDrawn="1">
+        <p15:guide id="1" orient="horz" pos="2222" userDrawn="1">
           <p15:clr>
             <a:srgbClr val="A4A3A4"/>
           </p15:clr>
@@ -132,12 +135,20 @@
 </p:presentation>
 </file>
 
-<file path=ppt/slideLayouts/slideLayout1.xml><?xml version="1.0" encoding="utf-8"?>
-<p:sldLayout xmlns:a="http://schemas.openxmlformats.org/drawingml/2006/main" xmlns:r="http://schemas.openxmlformats.org/officeDocument/2006/relationships" xmlns:p="http://schemas.openxmlformats.org/presentationml/2006/main" type="title" preserve="1">
-  <p:cSld name="标题幻灯片">
+<file path=ppt/notesMasters/notesMaster1.xml><?xml version="1.0" encoding="utf-8"?>
+<p:notesMaster xmlns:a="http://schemas.openxmlformats.org/drawingml/2006/main" xmlns:r="http://schemas.openxmlformats.org/officeDocument/2006/relationships" xmlns:p="http://schemas.openxmlformats.org/presentationml/2006/main">
+  <p:cSld>
+    <p:bg>
+      <p:bgPr>
+        <a:solidFill>
+          <a:schemeClr val="bg1"/>
+        </a:solidFill>
+        <a:effectLst/>
+      </p:bgPr>
+    </p:bg>
     <p:spTree>
       <p:nvGrpSpPr>
-        <p:cNvPr id="1" name=""/>
+        <p:cNvPr id="45" name=""/>
         <p:cNvGrpSpPr/>
         <p:nvPr/>
       </p:nvGrpSpPr>
@@ -151,7 +162,400 @@
       </p:grpSpPr>
       <p:sp>
         <p:nvSpPr>
-          <p:cNvPr id="2" name="标题 1"/>
+          <p:cNvPr id="1048665" name="Rectangle 2"/>
+          <p:cNvSpPr>
+            <a:spLocks noGrp="1" noChangeArrowheads="1"/>
+          </p:cNvSpPr>
+          <p:nvPr>
+            <p:ph type="hdr" sz="quarter"/>
+          </p:nvPr>
+        </p:nvSpPr>
+        <p:spPr bwMode="auto">
+          <a:xfrm>
+            <a:off x="2" y="1"/>
+            <a:ext cx="3076575" cy="512763"/>
+          </a:xfrm>
+          <a:prstGeom prst="rect">
+            <a:avLst/>
+          </a:prstGeom>
+          <a:noFill/>
+          <a:ln w="9525">
+            <a:noFill/>
+            <a:miter lim="800000"/>
+          </a:ln>
+          <a:effectLst/>
+        </p:spPr>
+        <p:txBody>
+          <a:bodyPr vert="horz" wrap="square" lIns="91492" tIns="45745" rIns="91492" bIns="45745" numCol="1" anchor="t" anchorCtr="0" compatLnSpc="1"/>
+          <a:lstStyle>
+            <a:lvl1pPr algn="l">
+              <a:defRPr sz="1100"/>
+            </a:lvl1pPr>
+          </a:lstStyle>
+          <a:p>
+            <a:endParaRPr lang="en-US"/>
+          </a:p>
+        </p:txBody>
+      </p:sp>
+      <p:sp>
+        <p:nvSpPr>
+          <p:cNvPr id="1048666" name="Rectangle 3"/>
+          <p:cNvSpPr>
+            <a:spLocks noGrp="1" noChangeArrowheads="1"/>
+          </p:cNvSpPr>
+          <p:nvPr>
+            <p:ph type="dt" idx="1"/>
+          </p:nvPr>
+        </p:nvSpPr>
+        <p:spPr bwMode="auto">
+          <a:xfrm>
+            <a:off x="4021139" y="1"/>
+            <a:ext cx="3076575" cy="512763"/>
+          </a:xfrm>
+          <a:prstGeom prst="rect">
+            <a:avLst/>
+          </a:prstGeom>
+          <a:noFill/>
+          <a:ln w="9525">
+            <a:noFill/>
+            <a:miter lim="800000"/>
+          </a:ln>
+          <a:effectLst/>
+        </p:spPr>
+        <p:txBody>
+          <a:bodyPr vert="horz" wrap="square" lIns="91492" tIns="45745" rIns="91492" bIns="45745" numCol="1" anchor="t" anchorCtr="0" compatLnSpc="1"/>
+          <a:lstStyle>
+            <a:lvl1pPr algn="r">
+              <a:defRPr sz="1100"/>
+            </a:lvl1pPr>
+          </a:lstStyle>
+          <a:p>
+            <a:endParaRPr lang="en-US"/>
+          </a:p>
+        </p:txBody>
+      </p:sp>
+      <p:sp>
+        <p:nvSpPr>
+          <p:cNvPr id="1048667" name="Rectangle 4"/>
+          <p:cNvSpPr>
+            <a:spLocks noGrp="1" noRot="1" noChangeAspect="1" noChangeArrowheads="1" noTextEdit="1"/>
+          </p:cNvSpPr>
+          <p:nvPr>
+            <p:ph type="sldImg" idx="2"/>
+          </p:nvPr>
+        </p:nvSpPr>
+        <p:spPr bwMode="auto">
+          <a:xfrm>
+            <a:off x="990600" y="766763"/>
+            <a:ext cx="5118100" cy="3838575"/>
+          </a:xfrm>
+          <a:prstGeom prst="rect">
+            <a:avLst/>
+          </a:prstGeom>
+          <a:noFill/>
+          <a:ln w="9525">
+            <a:solidFill>
+              <a:srgbClr val="000000"/>
+            </a:solidFill>
+            <a:miter lim="800000"/>
+          </a:ln>
+          <a:effectLst/>
+        </p:spPr>
+      </p:sp>
+      <p:sp>
+        <p:nvSpPr>
+          <p:cNvPr id="1048668" name="Rectangle 5"/>
+          <p:cNvSpPr>
+            <a:spLocks noGrp="1" noChangeArrowheads="1"/>
+          </p:cNvSpPr>
+          <p:nvPr>
+            <p:ph type="body" sz="quarter" idx="3"/>
+          </p:nvPr>
+        </p:nvSpPr>
+        <p:spPr bwMode="auto">
+          <a:xfrm>
+            <a:off x="709614" y="4862514"/>
+            <a:ext cx="5680075" cy="4605337"/>
+          </a:xfrm>
+          <a:prstGeom prst="rect">
+            <a:avLst/>
+          </a:prstGeom>
+          <a:noFill/>
+          <a:ln w="9525">
+            <a:noFill/>
+            <a:miter lim="800000"/>
+          </a:ln>
+          <a:effectLst/>
+        </p:spPr>
+        <p:txBody>
+          <a:bodyPr vert="horz" wrap="square" lIns="91492" tIns="45745" rIns="91492" bIns="45745" numCol="1" anchor="t" anchorCtr="0" compatLnSpc="1"/>
+          <a:p>
+            <a:pPr lvl="0"/>
+            <a:r>
+              <a:rPr lang="en-US" smtClean="0"/>
+              <a:t>Click to edit Master text styles</a:t>
+            </a:r>
+            <a:endParaRPr lang="en-US" smtClean="0"/>
+          </a:p>
+          <a:p>
+            <a:pPr lvl="1"/>
+            <a:r>
+              <a:rPr lang="en-US" smtClean="0"/>
+              <a:t>Second level</a:t>
+            </a:r>
+            <a:endParaRPr lang="en-US" smtClean="0"/>
+          </a:p>
+          <a:p>
+            <a:pPr lvl="2"/>
+            <a:r>
+              <a:rPr lang="en-US" smtClean="0"/>
+              <a:t>Third level</a:t>
+            </a:r>
+            <a:endParaRPr lang="en-US" smtClean="0"/>
+          </a:p>
+          <a:p>
+            <a:pPr lvl="3"/>
+            <a:r>
+              <a:rPr lang="en-US" smtClean="0"/>
+              <a:t>Fourth level</a:t>
+            </a:r>
+            <a:endParaRPr lang="en-US" smtClean="0"/>
+          </a:p>
+          <a:p>
+            <a:pPr lvl="4"/>
+            <a:r>
+              <a:rPr lang="en-US" smtClean="0"/>
+              <a:t>Fifth level</a:t>
+            </a:r>
+            <a:endParaRPr lang="en-US" smtClean="0"/>
+          </a:p>
+        </p:txBody>
+      </p:sp>
+      <p:sp>
+        <p:nvSpPr>
+          <p:cNvPr id="1048669" name="Rectangle 6"/>
+          <p:cNvSpPr>
+            <a:spLocks noGrp="1" noChangeArrowheads="1"/>
+          </p:cNvSpPr>
+          <p:nvPr>
+            <p:ph type="ftr" sz="quarter" idx="4"/>
+          </p:nvPr>
+        </p:nvSpPr>
+        <p:spPr bwMode="auto">
+          <a:xfrm>
+            <a:off x="2" y="9720264"/>
+            <a:ext cx="3076575" cy="512762"/>
+          </a:xfrm>
+          <a:prstGeom prst="rect">
+            <a:avLst/>
+          </a:prstGeom>
+          <a:noFill/>
+          <a:ln w="9525">
+            <a:noFill/>
+            <a:miter lim="800000"/>
+          </a:ln>
+          <a:effectLst/>
+        </p:spPr>
+        <p:txBody>
+          <a:bodyPr vert="horz" wrap="square" lIns="91492" tIns="45745" rIns="91492" bIns="45745" numCol="1" anchor="b" anchorCtr="0" compatLnSpc="1"/>
+          <a:lstStyle>
+            <a:lvl1pPr algn="l">
+              <a:defRPr sz="1100"/>
+            </a:lvl1pPr>
+          </a:lstStyle>
+          <a:p>
+            <a:endParaRPr lang="en-US"/>
+          </a:p>
+        </p:txBody>
+      </p:sp>
+      <p:sp>
+        <p:nvSpPr>
+          <p:cNvPr id="1048670" name="Rectangle 7"/>
+          <p:cNvSpPr>
+            <a:spLocks noGrp="1" noChangeArrowheads="1"/>
+          </p:cNvSpPr>
+          <p:nvPr>
+            <p:ph type="sldNum" sz="quarter" idx="5"/>
+          </p:nvPr>
+        </p:nvSpPr>
+        <p:spPr bwMode="auto">
+          <a:xfrm>
+            <a:off x="4021139" y="9720264"/>
+            <a:ext cx="3076575" cy="512762"/>
+          </a:xfrm>
+          <a:prstGeom prst="rect">
+            <a:avLst/>
+          </a:prstGeom>
+          <a:noFill/>
+          <a:ln w="9525">
+            <a:noFill/>
+            <a:miter lim="800000"/>
+          </a:ln>
+          <a:effectLst/>
+        </p:spPr>
+        <p:txBody>
+          <a:bodyPr vert="horz" wrap="square" lIns="91492" tIns="45745" rIns="91492" bIns="45745" numCol="1" anchor="b" anchorCtr="0" compatLnSpc="1"/>
+          <a:lstStyle>
+            <a:lvl1pPr algn="r">
+              <a:defRPr sz="1100"/>
+            </a:lvl1pPr>
+          </a:lstStyle>
+          <a:p>
+            <a:fld id="{A9A0EA98-5831-4853-B862-C702E6EB345C}" type="slidenum">
+              <a:rPr lang="en-US"/>
+            </a:fld>
+            <a:endParaRPr lang="en-US"/>
+          </a:p>
+        </p:txBody>
+      </p:sp>
+    </p:spTree>
+  </p:cSld>
+  <p:clrMap bg1="lt1" tx1="dk1" bg2="lt2" tx2="dk2" accent1="accent1" accent2="accent2" accent3="accent3" accent4="accent4" accent5="accent5" accent6="accent6" hlink="hlink" folHlink="folHlink"/>
+  <p:notesStyle>
+    <a:lvl1pPr algn="l" rtl="0" fontAlgn="base">
+      <a:spcBef>
+        <a:spcPct val="30000"/>
+      </a:spcBef>
+      <a:spcAft>
+        <a:spcPct val="0"/>
+      </a:spcAft>
+      <a:defRPr sz="1200" kern="1200">
+        <a:solidFill>
+          <a:schemeClr val="tx1"/>
+        </a:solidFill>
+        <a:latin typeface="Arial" panose="020B0604020202020204" pitchFamily="34" charset="0"/>
+        <a:ea typeface="+mn-ea"/>
+        <a:cs typeface="+mn-cs"/>
+      </a:defRPr>
+    </a:lvl1pPr>
+    <a:lvl2pPr marL="457200" algn="l" rtl="0" fontAlgn="base">
+      <a:spcBef>
+        <a:spcPct val="30000"/>
+      </a:spcBef>
+      <a:spcAft>
+        <a:spcPct val="0"/>
+      </a:spcAft>
+      <a:defRPr sz="1200" kern="1200">
+        <a:solidFill>
+          <a:schemeClr val="tx1"/>
+        </a:solidFill>
+        <a:latin typeface="Arial" panose="020B0604020202020204" pitchFamily="34" charset="0"/>
+        <a:ea typeface="+mn-ea"/>
+        <a:cs typeface="+mn-cs"/>
+      </a:defRPr>
+    </a:lvl2pPr>
+    <a:lvl3pPr marL="914400" algn="l" rtl="0" fontAlgn="base">
+      <a:spcBef>
+        <a:spcPct val="30000"/>
+      </a:spcBef>
+      <a:spcAft>
+        <a:spcPct val="0"/>
+      </a:spcAft>
+      <a:defRPr sz="1200" kern="1200">
+        <a:solidFill>
+          <a:schemeClr val="tx1"/>
+        </a:solidFill>
+        <a:latin typeface="Arial" panose="020B0604020202020204" pitchFamily="34" charset="0"/>
+        <a:ea typeface="+mn-ea"/>
+        <a:cs typeface="+mn-cs"/>
+      </a:defRPr>
+    </a:lvl3pPr>
+    <a:lvl4pPr marL="1371600" algn="l" rtl="0" fontAlgn="base">
+      <a:spcBef>
+        <a:spcPct val="30000"/>
+      </a:spcBef>
+      <a:spcAft>
+        <a:spcPct val="0"/>
+      </a:spcAft>
+      <a:defRPr sz="1200" kern="1200">
+        <a:solidFill>
+          <a:schemeClr val="tx1"/>
+        </a:solidFill>
+        <a:latin typeface="Arial" panose="020B0604020202020204" pitchFamily="34" charset="0"/>
+        <a:ea typeface="+mn-ea"/>
+        <a:cs typeface="+mn-cs"/>
+      </a:defRPr>
+    </a:lvl4pPr>
+    <a:lvl5pPr marL="1828800" algn="l" rtl="0" fontAlgn="base">
+      <a:spcBef>
+        <a:spcPct val="30000"/>
+      </a:spcBef>
+      <a:spcAft>
+        <a:spcPct val="0"/>
+      </a:spcAft>
+      <a:defRPr sz="1200" kern="1200">
+        <a:solidFill>
+          <a:schemeClr val="tx1"/>
+        </a:solidFill>
+        <a:latin typeface="Arial" panose="020B0604020202020204" pitchFamily="34" charset="0"/>
+        <a:ea typeface="+mn-ea"/>
+        <a:cs typeface="+mn-cs"/>
+      </a:defRPr>
+    </a:lvl5pPr>
+    <a:lvl6pPr marL="2286000" algn="l" defTabSz="914400" rtl="0" eaLnBrk="1" latinLnBrk="0" hangingPunct="1">
+      <a:defRPr sz="1200" kern="1200">
+        <a:solidFill>
+          <a:schemeClr val="tx1"/>
+        </a:solidFill>
+        <a:latin typeface="+mn-lt"/>
+        <a:ea typeface="+mn-ea"/>
+        <a:cs typeface="+mn-cs"/>
+      </a:defRPr>
+    </a:lvl6pPr>
+    <a:lvl7pPr marL="2743200" algn="l" defTabSz="914400" rtl="0" eaLnBrk="1" latinLnBrk="0" hangingPunct="1">
+      <a:defRPr sz="1200" kern="1200">
+        <a:solidFill>
+          <a:schemeClr val="tx1"/>
+        </a:solidFill>
+        <a:latin typeface="+mn-lt"/>
+        <a:ea typeface="+mn-ea"/>
+        <a:cs typeface="+mn-cs"/>
+      </a:defRPr>
+    </a:lvl7pPr>
+    <a:lvl8pPr marL="3200400" algn="l" defTabSz="914400" rtl="0" eaLnBrk="1" latinLnBrk="0" hangingPunct="1">
+      <a:defRPr sz="1200" kern="1200">
+        <a:solidFill>
+          <a:schemeClr val="tx1"/>
+        </a:solidFill>
+        <a:latin typeface="+mn-lt"/>
+        <a:ea typeface="+mn-ea"/>
+        <a:cs typeface="+mn-cs"/>
+      </a:defRPr>
+    </a:lvl8pPr>
+    <a:lvl9pPr marL="3657600" algn="l" defTabSz="914400" rtl="0" eaLnBrk="1" latinLnBrk="0" hangingPunct="1">
+      <a:defRPr sz="1200" kern="1200">
+        <a:solidFill>
+          <a:schemeClr val="tx1"/>
+        </a:solidFill>
+        <a:latin typeface="+mn-lt"/>
+        <a:ea typeface="+mn-ea"/>
+        <a:cs typeface="+mn-cs"/>
+      </a:defRPr>
+    </a:lvl9pPr>
+  </p:notesStyle>
+</p:notesMaster>
+</file>
+
+<file path=ppt/slideLayouts/slideLayout1.xml><?xml version="1.0" encoding="utf-8"?>
+<p:sldLayout xmlns:a="http://schemas.openxmlformats.org/drawingml/2006/main" xmlns:r="http://schemas.openxmlformats.org/officeDocument/2006/relationships" xmlns:p="http://schemas.openxmlformats.org/presentationml/2006/main" type="title" preserve="1">
+  <p:cSld name="标题幻灯片">
+    <p:spTree>
+      <p:nvGrpSpPr>
+        <p:cNvPr id="23" name=""/>
+        <p:cNvGrpSpPr/>
+        <p:nvPr/>
+      </p:nvGrpSpPr>
+      <p:grpSpPr>
+        <a:xfrm>
+          <a:off x="0" y="0"/>
+          <a:ext cx="0" cy="0"/>
+          <a:chOff x="0" y="0"/>
+          <a:chExt cx="0" cy="0"/>
+        </a:xfrm>
+      </p:grpSpPr>
+      <p:sp>
+        <p:nvSpPr>
+          <p:cNvPr id="1048581" name="标题 1"/>
           <p:cNvSpPr>
             <a:spLocks noGrp="1"/>
           </p:cNvSpPr>
@@ -188,7 +592,7 @@
       </p:sp>
       <p:sp>
         <p:nvSpPr>
-          <p:cNvPr id="3" name="副标题 2"/>
+          <p:cNvPr id="1048582" name="副标题 2"/>
           <p:cNvSpPr>
             <a:spLocks noGrp="1"/>
           </p:cNvSpPr>
@@ -261,7 +665,7 @@
       </p:sp>
       <p:sp>
         <p:nvSpPr>
-          <p:cNvPr id="16" name="日期占位符 15"/>
+          <p:cNvPr id="1048583" name="日期占位符 15"/>
           <p:cNvSpPr>
             <a:spLocks noGrp="1"/>
           </p:cNvSpPr>
@@ -275,7 +679,6 @@
         <p:spPr/>
         <p:txBody>
           <a:bodyPr/>
-          <a:lstStyle/>
           <a:p>
             <a:fld id="{760FBDFE-C587-4B4C-A407-44438C67B59E}" type="datetimeFigureOut">
               <a:rPr lang="zh-CN" altLang="en-US" smtClean="0"/>
@@ -286,7 +689,7 @@
       </p:sp>
       <p:sp>
         <p:nvSpPr>
-          <p:cNvPr id="17" name="页脚占位符 16"/>
+          <p:cNvPr id="1048584" name="页脚占位符 16"/>
           <p:cNvSpPr>
             <a:spLocks noGrp="1"/>
           </p:cNvSpPr>
@@ -300,7 +703,6 @@
         <p:spPr/>
         <p:txBody>
           <a:bodyPr/>
-          <a:lstStyle/>
           <a:p>
             <a:endParaRPr lang="zh-CN" altLang="en-US" dirty="0"/>
           </a:p>
@@ -308,7 +710,7 @@
       </p:sp>
       <p:sp>
         <p:nvSpPr>
-          <p:cNvPr id="18" name="灯片编号占位符 17"/>
+          <p:cNvPr id="1048585" name="灯片编号占位符 17"/>
           <p:cNvSpPr>
             <a:spLocks noGrp="1"/>
           </p:cNvSpPr>
@@ -322,7 +724,6 @@
         <p:spPr/>
         <p:txBody>
           <a:bodyPr/>
-          <a:lstStyle/>
           <a:p>
             <a:fld id="{49AE70B2-8BF9-45C0-BB95-33D1B9D3A854}" type="slidenum">
               <a:rPr lang="zh-CN" altLang="en-US" smtClean="0"/>
@@ -344,7 +745,7 @@
   <p:cSld name="内容">
     <p:spTree>
       <p:nvGrpSpPr>
-        <p:cNvPr id="1" name=""/>
+        <p:cNvPr id="39" name=""/>
         <p:cNvGrpSpPr/>
         <p:nvPr/>
       </p:nvGrpSpPr>
@@ -358,7 +759,7 @@
       </p:grpSpPr>
       <p:sp>
         <p:nvSpPr>
-          <p:cNvPr id="3" name="日期占位符 2"/>
+          <p:cNvPr id="1048636" name="日期占位符 2"/>
           <p:cNvSpPr>
             <a:spLocks noGrp="1"/>
           </p:cNvSpPr>
@@ -372,7 +773,6 @@
         <p:spPr/>
         <p:txBody>
           <a:bodyPr/>
-          <a:lstStyle/>
           <a:p>
             <a:fld id="{760FBDFE-C587-4B4C-A407-44438C67B59E}" type="datetimeFigureOut">
               <a:rPr lang="zh-CN" altLang="en-US" smtClean="0"/>
@@ -383,7 +783,7 @@
       </p:sp>
       <p:sp>
         <p:nvSpPr>
-          <p:cNvPr id="4" name="页脚占位符 3"/>
+          <p:cNvPr id="1048637" name="页脚占位符 3"/>
           <p:cNvSpPr>
             <a:spLocks noGrp="1"/>
           </p:cNvSpPr>
@@ -397,7 +797,6 @@
         <p:spPr/>
         <p:txBody>
           <a:bodyPr/>
-          <a:lstStyle/>
           <a:p>
             <a:endParaRPr lang="zh-CN" altLang="en-US"/>
           </a:p>
@@ -405,7 +804,7 @@
       </p:sp>
       <p:sp>
         <p:nvSpPr>
-          <p:cNvPr id="5" name="灯片编号占位符 4"/>
+          <p:cNvPr id="1048638" name="灯片编号占位符 4"/>
           <p:cNvSpPr>
             <a:spLocks noGrp="1"/>
           </p:cNvSpPr>
@@ -419,7 +818,6 @@
         <p:spPr/>
         <p:txBody>
           <a:bodyPr/>
-          <a:lstStyle/>
           <a:p>
             <a:fld id="{49AE70B2-8BF9-45C0-BB95-33D1B9D3A854}" type="slidenum">
               <a:rPr lang="zh-CN" altLang="en-US" smtClean="0"/>
@@ -430,7 +828,7 @@
       </p:sp>
       <p:sp>
         <p:nvSpPr>
-          <p:cNvPr id="7" name="内容占位符 6"/>
+          <p:cNvPr id="1048639" name="内容占位符 6"/>
           <p:cNvSpPr>
             <a:spLocks noGrp="1"/>
           </p:cNvSpPr>
@@ -449,7 +847,6 @@
         </p:spPr>
         <p:txBody>
           <a:bodyPr/>
-          <a:lstStyle/>
           <a:p>
             <a:pPr lvl="0"/>
             <a:r>
@@ -505,7 +902,7 @@
   <p:cSld name="末尾幻灯片">
     <p:spTree>
       <p:nvGrpSpPr>
-        <p:cNvPr id="1" name=""/>
+        <p:cNvPr id="36" name=""/>
         <p:cNvGrpSpPr/>
         <p:nvPr/>
       </p:nvGrpSpPr>
@@ -519,7 +916,7 @@
       </p:grpSpPr>
       <p:sp>
         <p:nvSpPr>
-          <p:cNvPr id="3" name="日期占位符 2"/>
+          <p:cNvPr id="1048621" name="日期占位符 2"/>
           <p:cNvSpPr>
             <a:spLocks noGrp="1"/>
           </p:cNvSpPr>
@@ -533,7 +930,6 @@
         <p:spPr/>
         <p:txBody>
           <a:bodyPr/>
-          <a:lstStyle/>
           <a:p>
             <a:fld id="{760FBDFE-C587-4B4C-A407-44438C67B59E}" type="datetimeFigureOut">
               <a:rPr lang="zh-CN" altLang="en-US" smtClean="0"/>
@@ -544,7 +940,7 @@
       </p:sp>
       <p:sp>
         <p:nvSpPr>
-          <p:cNvPr id="4" name="页脚占位符 3"/>
+          <p:cNvPr id="1048622" name="页脚占位符 3"/>
           <p:cNvSpPr>
             <a:spLocks noGrp="1"/>
           </p:cNvSpPr>
@@ -558,7 +954,6 @@
         <p:spPr/>
         <p:txBody>
           <a:bodyPr/>
-          <a:lstStyle/>
           <a:p>
             <a:endParaRPr lang="zh-CN" altLang="en-US"/>
           </a:p>
@@ -566,7 +961,7 @@
       </p:sp>
       <p:sp>
         <p:nvSpPr>
-          <p:cNvPr id="5" name="灯片编号占位符 4"/>
+          <p:cNvPr id="1048623" name="灯片编号占位符 4"/>
           <p:cNvSpPr>
             <a:spLocks noGrp="1"/>
           </p:cNvSpPr>
@@ -580,7 +975,6 @@
         <p:spPr/>
         <p:txBody>
           <a:bodyPr/>
-          <a:lstStyle/>
           <a:p>
             <a:fld id="{49AE70B2-8BF9-45C0-BB95-33D1B9D3A854}" type="slidenum">
               <a:rPr lang="zh-CN" altLang="en-US" smtClean="0"/>
@@ -591,7 +985,7 @@
       </p:sp>
       <p:sp>
         <p:nvSpPr>
-          <p:cNvPr id="2" name="标题 1"/>
+          <p:cNvPr id="1048624" name="标题 1"/>
           <p:cNvSpPr>
             <a:spLocks noGrp="1"/>
           </p:cNvSpPr>
@@ -629,7 +1023,7 @@
       </p:sp>
       <p:sp>
         <p:nvSpPr>
-          <p:cNvPr id="7" name="文本占位符 6"/>
+          <p:cNvPr id="1048625" name="文本占位符 6"/>
           <p:cNvSpPr>
             <a:spLocks noGrp="1"/>
           </p:cNvSpPr>
@@ -682,7 +1076,7 @@
   <p:cSld name="标题和内容">
     <p:spTree>
       <p:nvGrpSpPr>
-        <p:cNvPr id="1" name=""/>
+        <p:cNvPr id="37" name=""/>
         <p:cNvGrpSpPr/>
         <p:nvPr/>
       </p:nvGrpSpPr>
@@ -696,7 +1090,7 @@
       </p:grpSpPr>
       <p:sp>
         <p:nvSpPr>
-          <p:cNvPr id="2" name="标题 1"/>
+          <p:cNvPr id="1048626" name="标题 1"/>
           <p:cNvSpPr>
             <a:spLocks noGrp="1"/>
           </p:cNvSpPr>
@@ -717,7 +1111,6 @@
           <a:bodyPr vert="horz" lIns="90000" tIns="46800" rIns="90000" bIns="46800" rtlCol="0" anchor="ctr" anchorCtr="0">
             <a:normAutofit/>
           </a:bodyPr>
-          <a:lstStyle/>
           <a:p>
             <a:pPr lvl="0"/>
             <a:r>
@@ -730,7 +1123,7 @@
       </p:sp>
       <p:sp>
         <p:nvSpPr>
-          <p:cNvPr id="3" name="内容占位符 2"/>
+          <p:cNvPr id="1048627" name="内容占位符 2"/>
           <p:cNvSpPr>
             <a:spLocks noGrp="1"/>
           </p:cNvSpPr>
@@ -751,7 +1144,6 @@
           <a:bodyPr vert="horz" lIns="90000" tIns="46800" rIns="90000" bIns="46800" rtlCol="0">
             <a:normAutofit/>
           </a:bodyPr>
-          <a:lstStyle/>
           <a:p>
             <a:pPr lvl="0"/>
             <a:r>
@@ -796,7 +1188,7 @@
       </p:sp>
       <p:sp>
         <p:nvSpPr>
-          <p:cNvPr id="4" name="日期占位符 3"/>
+          <p:cNvPr id="1048628" name="日期占位符 3"/>
           <p:cNvSpPr>
             <a:spLocks noGrp="1"/>
           </p:cNvSpPr>
@@ -810,7 +1202,6 @@
         <p:spPr/>
         <p:txBody>
           <a:bodyPr/>
-          <a:lstStyle/>
           <a:p>
             <a:fld id="{760FBDFE-C587-4B4C-A407-44438C67B59E}" type="datetimeFigureOut">
               <a:rPr lang="zh-CN" altLang="en-US" smtClean="0"/>
@@ -821,7 +1212,7 @@
       </p:sp>
       <p:sp>
         <p:nvSpPr>
-          <p:cNvPr id="5" name="页脚占位符 4"/>
+          <p:cNvPr id="1048629" name="页脚占位符 4"/>
           <p:cNvSpPr>
             <a:spLocks noGrp="1"/>
           </p:cNvSpPr>
@@ -835,7 +1226,6 @@
         <p:spPr/>
         <p:txBody>
           <a:bodyPr/>
-          <a:lstStyle/>
           <a:p>
             <a:endParaRPr lang="zh-CN" altLang="en-US"/>
           </a:p>
@@ -843,7 +1233,7 @@
       </p:sp>
       <p:sp>
         <p:nvSpPr>
-          <p:cNvPr id="6" name="灯片编号占位符 5"/>
+          <p:cNvPr id="1048630" name="灯片编号占位符 5"/>
           <p:cNvSpPr>
             <a:spLocks noGrp="1"/>
           </p:cNvSpPr>
@@ -857,7 +1247,6 @@
         <p:spPr/>
         <p:txBody>
           <a:bodyPr/>
-          <a:lstStyle/>
           <a:p>
             <a:fld id="{49AE70B2-8BF9-45C0-BB95-33D1B9D3A854}" type="slidenum">
               <a:rPr lang="zh-CN" altLang="en-US" smtClean="0"/>
@@ -879,7 +1268,7 @@
   <p:cSld name="节标题">
     <p:spTree>
       <p:nvGrpSpPr>
-        <p:cNvPr id="1" name=""/>
+        <p:cNvPr id="40" name=""/>
         <p:cNvGrpSpPr/>
         <p:nvPr/>
       </p:nvGrpSpPr>
@@ -893,7 +1282,7 @@
       </p:grpSpPr>
       <p:sp>
         <p:nvSpPr>
-          <p:cNvPr id="2" name="标题 1"/>
+          <p:cNvPr id="1048640" name="标题 1"/>
           <p:cNvSpPr>
             <a:spLocks noGrp="1"/>
           </p:cNvSpPr>
@@ -930,7 +1319,7 @@
       </p:sp>
       <p:sp>
         <p:nvSpPr>
-          <p:cNvPr id="3" name="文本占位符 2"/>
+          <p:cNvPr id="1048641" name="文本占位符 2"/>
           <p:cNvSpPr>
             <a:spLocks noGrp="1"/>
           </p:cNvSpPr>
@@ -1056,7 +1445,7 @@
       </p:sp>
       <p:sp>
         <p:nvSpPr>
-          <p:cNvPr id="4" name="日期占位符 3"/>
+          <p:cNvPr id="1048642" name="日期占位符 3"/>
           <p:cNvSpPr>
             <a:spLocks noGrp="1"/>
           </p:cNvSpPr>
@@ -1070,7 +1459,6 @@
         <p:spPr/>
         <p:txBody>
           <a:bodyPr/>
-          <a:lstStyle/>
           <a:p>
             <a:fld id="{760FBDFE-C587-4B4C-A407-44438C67B59E}" type="datetimeFigureOut">
               <a:rPr lang="zh-CN" altLang="en-US" smtClean="0"/>
@@ -1081,7 +1469,7 @@
       </p:sp>
       <p:sp>
         <p:nvSpPr>
-          <p:cNvPr id="5" name="页脚占位符 4"/>
+          <p:cNvPr id="1048643" name="页脚占位符 4"/>
           <p:cNvSpPr>
             <a:spLocks noGrp="1"/>
           </p:cNvSpPr>
@@ -1095,7 +1483,6 @@
         <p:spPr/>
         <p:txBody>
           <a:bodyPr/>
-          <a:lstStyle/>
           <a:p>
             <a:endParaRPr lang="zh-CN" altLang="en-US"/>
           </a:p>
@@ -1103,7 +1490,7 @@
       </p:sp>
       <p:sp>
         <p:nvSpPr>
-          <p:cNvPr id="6" name="灯片编号占位符 5"/>
+          <p:cNvPr id="1048644" name="灯片编号占位符 5"/>
           <p:cNvSpPr>
             <a:spLocks noGrp="1"/>
           </p:cNvSpPr>
@@ -1117,7 +1504,6 @@
         <p:spPr/>
         <p:txBody>
           <a:bodyPr/>
-          <a:lstStyle/>
           <a:p>
             <a:fld id="{49AE70B2-8BF9-45C0-BB95-33D1B9D3A854}" type="slidenum">
               <a:rPr lang="zh-CN" altLang="en-US" smtClean="0"/>
@@ -1139,7 +1525,7 @@
   <p:cSld name="两栏内容">
     <p:spTree>
       <p:nvGrpSpPr>
-        <p:cNvPr id="1" name=""/>
+        <p:cNvPr id="41" name=""/>
         <p:cNvGrpSpPr/>
         <p:nvPr/>
       </p:nvGrpSpPr>
@@ -1153,7 +1539,7 @@
       </p:grpSpPr>
       <p:sp>
         <p:nvSpPr>
-          <p:cNvPr id="2" name="标题 1"/>
+          <p:cNvPr id="1048645" name="标题 1"/>
           <p:cNvSpPr>
             <a:spLocks noGrp="1"/>
           </p:cNvSpPr>
@@ -1174,7 +1560,6 @@
           <a:bodyPr vert="horz" lIns="90000" tIns="46800" rIns="90000" bIns="46800" rtlCol="0" anchor="ctr" anchorCtr="0">
             <a:normAutofit/>
           </a:bodyPr>
-          <a:lstStyle/>
           <a:p>
             <a:pPr lvl="0"/>
             <a:r>
@@ -1187,7 +1572,7 @@
       </p:sp>
       <p:sp>
         <p:nvSpPr>
-          <p:cNvPr id="3" name="内容占位符 2"/>
+          <p:cNvPr id="1048646" name="内容占位符 2"/>
           <p:cNvSpPr>
             <a:spLocks noGrp="1"/>
           </p:cNvSpPr>
@@ -1208,7 +1593,6 @@
           <a:bodyPr vert="horz" lIns="90000" tIns="46800" rIns="90000" bIns="46800" rtlCol="0">
             <a:normAutofit/>
           </a:bodyPr>
-          <a:lstStyle/>
           <a:p>
             <a:pPr lvl="0"/>
             <a:r>
@@ -1253,7 +1637,7 @@
       </p:sp>
       <p:sp>
         <p:nvSpPr>
-          <p:cNvPr id="4" name="内容占位符 3"/>
+          <p:cNvPr id="1048647" name="内容占位符 3"/>
           <p:cNvSpPr>
             <a:spLocks noGrp="1"/>
           </p:cNvSpPr>
@@ -1274,7 +1658,6 @@
           <a:bodyPr lIns="90000" tIns="46800" rIns="90000" bIns="46800">
             <a:normAutofit/>
           </a:bodyPr>
-          <a:lstStyle/>
           <a:p>
             <a:pPr lvl="0"/>
             <a:r>
@@ -1319,7 +1702,7 @@
       </p:sp>
       <p:sp>
         <p:nvSpPr>
-          <p:cNvPr id="5" name="日期占位符 4"/>
+          <p:cNvPr id="1048648" name="日期占位符 4"/>
           <p:cNvSpPr>
             <a:spLocks noGrp="1"/>
           </p:cNvSpPr>
@@ -1333,7 +1716,6 @@
         <p:spPr/>
         <p:txBody>
           <a:bodyPr/>
-          <a:lstStyle/>
           <a:p>
             <a:fld id="{760FBDFE-C587-4B4C-A407-44438C67B59E}" type="datetimeFigureOut">
               <a:rPr lang="zh-CN" altLang="en-US" smtClean="0"/>
@@ -1344,7 +1726,7 @@
       </p:sp>
       <p:sp>
         <p:nvSpPr>
-          <p:cNvPr id="6" name="页脚占位符 5"/>
+          <p:cNvPr id="1048649" name="页脚占位符 5"/>
           <p:cNvSpPr>
             <a:spLocks noGrp="1"/>
           </p:cNvSpPr>
@@ -1358,7 +1740,6 @@
         <p:spPr/>
         <p:txBody>
           <a:bodyPr/>
-          <a:lstStyle/>
           <a:p>
             <a:endParaRPr lang="zh-CN" altLang="en-US"/>
           </a:p>
@@ -1366,7 +1747,7 @@
       </p:sp>
       <p:sp>
         <p:nvSpPr>
-          <p:cNvPr id="7" name="灯片编号占位符 6"/>
+          <p:cNvPr id="1048650" name="灯片编号占位符 6"/>
           <p:cNvSpPr>
             <a:spLocks noGrp="1"/>
           </p:cNvSpPr>
@@ -1380,7 +1761,6 @@
         <p:spPr/>
         <p:txBody>
           <a:bodyPr/>
-          <a:lstStyle/>
           <a:p>
             <a:fld id="{49AE70B2-8BF9-45C0-BB95-33D1B9D3A854}" type="slidenum">
               <a:rPr lang="zh-CN" altLang="en-US" smtClean="0"/>
@@ -1402,7 +1782,7 @@
   <p:cSld name="比较">
     <p:spTree>
       <p:nvGrpSpPr>
-        <p:cNvPr id="1" name=""/>
+        <p:cNvPr id="42" name=""/>
         <p:cNvGrpSpPr/>
         <p:nvPr/>
       </p:nvGrpSpPr>
@@ -1416,7 +1796,7 @@
       </p:grpSpPr>
       <p:sp>
         <p:nvSpPr>
-          <p:cNvPr id="2" name="标题 1"/>
+          <p:cNvPr id="1048651" name="标题 1"/>
           <p:cNvSpPr>
             <a:spLocks noGrp="1"/>
           </p:cNvSpPr>
@@ -1437,7 +1817,6 @@
           <a:bodyPr vert="horz" lIns="90000" tIns="46800" rIns="90000" bIns="46800" rtlCol="0" anchor="ctr" anchorCtr="0">
             <a:normAutofit/>
           </a:bodyPr>
-          <a:lstStyle/>
           <a:p>
             <a:pPr lvl="0"/>
             <a:r>
@@ -1450,7 +1829,7 @@
       </p:sp>
       <p:sp>
         <p:nvSpPr>
-          <p:cNvPr id="3" name="文本占位符 2"/>
+          <p:cNvPr id="1048652" name="文本占位符 2"/>
           <p:cNvSpPr>
             <a:spLocks noGrp="1"/>
           </p:cNvSpPr>
@@ -1531,7 +1910,7 @@
       </p:sp>
       <p:sp>
         <p:nvSpPr>
-          <p:cNvPr id="4" name="内容占位符 3"/>
+          <p:cNvPr id="1048653" name="内容占位符 3"/>
           <p:cNvSpPr>
             <a:spLocks noGrp="1"/>
           </p:cNvSpPr>
@@ -1552,7 +1931,6 @@
           <a:bodyPr vert="horz" lIns="101600" tIns="0" rIns="82550" bIns="0" rtlCol="0">
             <a:normAutofit/>
           </a:bodyPr>
-          <a:lstStyle/>
           <a:p>
             <a:pPr lvl="0"/>
             <a:r>
@@ -1597,7 +1975,7 @@
       </p:sp>
       <p:sp>
         <p:nvSpPr>
-          <p:cNvPr id="5" name="文本占位符 4"/>
+          <p:cNvPr id="1048654" name="文本占位符 4"/>
           <p:cNvSpPr>
             <a:spLocks noGrp="1"/>
           </p:cNvSpPr>
@@ -1678,7 +2056,7 @@
       </p:sp>
       <p:sp>
         <p:nvSpPr>
-          <p:cNvPr id="6" name="内容占位符 5"/>
+          <p:cNvPr id="1048655" name="内容占位符 5"/>
           <p:cNvSpPr>
             <a:spLocks noGrp="1"/>
           </p:cNvSpPr>
@@ -1699,7 +2077,6 @@
           <a:bodyPr vert="horz" lIns="101600" tIns="0" rIns="82550" bIns="0" rtlCol="0">
             <a:normAutofit/>
           </a:bodyPr>
-          <a:lstStyle/>
           <a:p>
             <a:pPr lvl="0"/>
             <a:r>
@@ -1744,7 +2121,7 @@
       </p:sp>
       <p:sp>
         <p:nvSpPr>
-          <p:cNvPr id="7" name="日期占位符 6"/>
+          <p:cNvPr id="1048656" name="日期占位符 6"/>
           <p:cNvSpPr>
             <a:spLocks noGrp="1"/>
           </p:cNvSpPr>
@@ -1758,7 +2135,6 @@
         <p:spPr/>
         <p:txBody>
           <a:bodyPr/>
-          <a:lstStyle/>
           <a:p>
             <a:fld id="{760FBDFE-C587-4B4C-A407-44438C67B59E}" type="datetimeFigureOut">
               <a:rPr lang="zh-CN" altLang="en-US" smtClean="0"/>
@@ -1769,7 +2145,7 @@
       </p:sp>
       <p:sp>
         <p:nvSpPr>
-          <p:cNvPr id="8" name="页脚占位符 7"/>
+          <p:cNvPr id="1048657" name="页脚占位符 7"/>
           <p:cNvSpPr>
             <a:spLocks noGrp="1"/>
           </p:cNvSpPr>
@@ -1783,7 +2159,6 @@
         <p:spPr/>
         <p:txBody>
           <a:bodyPr/>
-          <a:lstStyle/>
           <a:p>
             <a:endParaRPr lang="zh-CN" altLang="en-US"/>
           </a:p>
@@ -1791,7 +2166,7 @@
       </p:sp>
       <p:sp>
         <p:nvSpPr>
-          <p:cNvPr id="9" name="灯片编号占位符 8"/>
+          <p:cNvPr id="1048658" name="灯片编号占位符 8"/>
           <p:cNvSpPr>
             <a:spLocks noGrp="1"/>
           </p:cNvSpPr>
@@ -1805,7 +2180,6 @@
         <p:spPr/>
         <p:txBody>
           <a:bodyPr/>
-          <a:lstStyle/>
           <a:p>
             <a:fld id="{49AE70B2-8BF9-45C0-BB95-33D1B9D3A854}" type="slidenum">
               <a:rPr lang="zh-CN" altLang="en-US" smtClean="0"/>
@@ -1827,7 +2201,7 @@
   <p:cSld name="仅标题">
     <p:spTree>
       <p:nvGrpSpPr>
-        <p:cNvPr id="1" name=""/>
+        <p:cNvPr id="35" name=""/>
         <p:cNvGrpSpPr/>
         <p:nvPr/>
       </p:nvGrpSpPr>
@@ -1841,7 +2215,7 @@
       </p:grpSpPr>
       <p:sp>
         <p:nvSpPr>
-          <p:cNvPr id="2" name="标题 1"/>
+          <p:cNvPr id="1048617" name="标题 1"/>
           <p:cNvSpPr>
             <a:spLocks noGrp="1"/>
           </p:cNvSpPr>
@@ -1862,7 +2236,6 @@
           <a:bodyPr vert="horz" lIns="90000" tIns="46800" rIns="90000" bIns="46800" rtlCol="0" anchor="ctr" anchorCtr="0">
             <a:normAutofit/>
           </a:bodyPr>
-          <a:lstStyle/>
           <a:p>
             <a:pPr lvl="0"/>
             <a:r>
@@ -1875,7 +2248,7 @@
       </p:sp>
       <p:sp>
         <p:nvSpPr>
-          <p:cNvPr id="3" name="日期占位符 2"/>
+          <p:cNvPr id="1048618" name="日期占位符 2"/>
           <p:cNvSpPr>
             <a:spLocks noGrp="1"/>
           </p:cNvSpPr>
@@ -1889,7 +2262,6 @@
         <p:spPr/>
         <p:txBody>
           <a:bodyPr/>
-          <a:lstStyle/>
           <a:p>
             <a:fld id="{760FBDFE-C587-4B4C-A407-44438C67B59E}" type="datetimeFigureOut">
               <a:rPr lang="zh-CN" altLang="en-US" smtClean="0"/>
@@ -1900,7 +2272,7 @@
       </p:sp>
       <p:sp>
         <p:nvSpPr>
-          <p:cNvPr id="4" name="页脚占位符 3"/>
+          <p:cNvPr id="1048619" name="页脚占位符 3"/>
           <p:cNvSpPr>
             <a:spLocks noGrp="1"/>
           </p:cNvSpPr>
@@ -1914,7 +2286,6 @@
         <p:spPr/>
         <p:txBody>
           <a:bodyPr/>
-          <a:lstStyle/>
           <a:p>
             <a:endParaRPr lang="zh-CN" altLang="en-US"/>
           </a:p>
@@ -1922,7 +2293,7 @@
       </p:sp>
       <p:sp>
         <p:nvSpPr>
-          <p:cNvPr id="5" name="灯片编号占位符 4"/>
+          <p:cNvPr id="1048620" name="灯片编号占位符 4"/>
           <p:cNvSpPr>
             <a:spLocks noGrp="1"/>
           </p:cNvSpPr>
@@ -1936,7 +2307,6 @@
         <p:spPr/>
         <p:txBody>
           <a:bodyPr/>
-          <a:lstStyle/>
           <a:p>
             <a:fld id="{49AE70B2-8BF9-45C0-BB95-33D1B9D3A854}" type="slidenum">
               <a:rPr lang="zh-CN" altLang="en-US" smtClean="0"/>
@@ -1958,7 +2328,7 @@
   <p:cSld name="空白">
     <p:spTree>
       <p:nvGrpSpPr>
-        <p:cNvPr id="1" name=""/>
+        <p:cNvPr id="25" name=""/>
         <p:cNvGrpSpPr/>
         <p:nvPr/>
       </p:nvGrpSpPr>
@@ -1972,7 +2342,7 @@
       </p:grpSpPr>
       <p:sp>
         <p:nvSpPr>
-          <p:cNvPr id="2" name="日期占位符 1"/>
+          <p:cNvPr id="1048588" name="日期占位符 1"/>
           <p:cNvSpPr>
             <a:spLocks noGrp="1"/>
           </p:cNvSpPr>
@@ -1986,7 +2356,6 @@
         <p:spPr/>
         <p:txBody>
           <a:bodyPr/>
-          <a:lstStyle/>
           <a:p>
             <a:fld id="{760FBDFE-C587-4B4C-A407-44438C67B59E}" type="datetimeFigureOut">
               <a:rPr lang="zh-CN" altLang="en-US" smtClean="0"/>
@@ -1997,7 +2366,7 @@
       </p:sp>
       <p:sp>
         <p:nvSpPr>
-          <p:cNvPr id="3" name="页脚占位符 2"/>
+          <p:cNvPr id="1048589" name="页脚占位符 2"/>
           <p:cNvSpPr>
             <a:spLocks noGrp="1"/>
           </p:cNvSpPr>
@@ -2011,7 +2380,6 @@
         <p:spPr/>
         <p:txBody>
           <a:bodyPr/>
-          <a:lstStyle/>
           <a:p>
             <a:endParaRPr lang="zh-CN" altLang="en-US"/>
           </a:p>
@@ -2019,7 +2387,7 @@
       </p:sp>
       <p:sp>
         <p:nvSpPr>
-          <p:cNvPr id="4" name="灯片编号占位符 3"/>
+          <p:cNvPr id="1048590" name="灯片编号占位符 3"/>
           <p:cNvSpPr>
             <a:spLocks noGrp="1"/>
           </p:cNvSpPr>
@@ -2033,7 +2401,6 @@
         <p:spPr/>
         <p:txBody>
           <a:bodyPr/>
-          <a:lstStyle/>
           <a:p>
             <a:fld id="{49AE70B2-8BF9-45C0-BB95-33D1B9D3A854}" type="slidenum">
               <a:rPr lang="zh-CN" altLang="en-US" smtClean="0"/>
@@ -2055,7 +2422,7 @@
   <p:cSld name="图片与标题">
     <p:spTree>
       <p:nvGrpSpPr>
-        <p:cNvPr id="1" name=""/>
+        <p:cNvPr id="43" name=""/>
         <p:cNvGrpSpPr/>
         <p:nvPr/>
       </p:nvGrpSpPr>
@@ -2069,7 +2436,7 @@
       </p:grpSpPr>
       <p:sp>
         <p:nvSpPr>
-          <p:cNvPr id="3" name="图片占位符 2"/>
+          <p:cNvPr id="1048659" name="图片占位符 2"/>
           <p:cNvSpPr>
             <a:spLocks noGrp="1"/>
           </p:cNvSpPr>
@@ -2104,7 +2471,7 @@
       </p:sp>
       <p:sp>
         <p:nvSpPr>
-          <p:cNvPr id="4" name="文本占位符 3"/>
+          <p:cNvPr id="1048660" name="文本占位符 3"/>
           <p:cNvSpPr>
             <a:spLocks noGrp="1"/>
           </p:cNvSpPr>
@@ -2143,7 +2510,7 @@
       </p:sp>
       <p:sp>
         <p:nvSpPr>
-          <p:cNvPr id="5" name="日期占位符 4"/>
+          <p:cNvPr id="1048661" name="日期占位符 4"/>
           <p:cNvSpPr>
             <a:spLocks noGrp="1"/>
           </p:cNvSpPr>
@@ -2157,7 +2524,6 @@
         <p:spPr/>
         <p:txBody>
           <a:bodyPr/>
-          <a:lstStyle/>
           <a:p>
             <a:fld id="{9EFD9D74-47D9-4702-A33C-335B63B48DBF}" type="datetimeFigureOut">
               <a:rPr lang="zh-CN" altLang="en-US" smtClean="0"/>
@@ -2168,7 +2534,7 @@
       </p:sp>
       <p:sp>
         <p:nvSpPr>
-          <p:cNvPr id="6" name="页脚占位符 5"/>
+          <p:cNvPr id="1048662" name="页脚占位符 5"/>
           <p:cNvSpPr>
             <a:spLocks noGrp="1"/>
           </p:cNvSpPr>
@@ -2182,7 +2548,6 @@
         <p:spPr/>
         <p:txBody>
           <a:bodyPr/>
-          <a:lstStyle/>
           <a:p>
             <a:endParaRPr lang="zh-CN" altLang="en-US" dirty="0"/>
           </a:p>
@@ -2190,7 +2555,7 @@
       </p:sp>
       <p:sp>
         <p:nvSpPr>
-          <p:cNvPr id="7" name="灯片编号占位符 6"/>
+          <p:cNvPr id="1048663" name="灯片编号占位符 6"/>
           <p:cNvSpPr>
             <a:spLocks noGrp="1"/>
           </p:cNvSpPr>
@@ -2204,7 +2569,6 @@
         <p:spPr/>
         <p:txBody>
           <a:bodyPr/>
-          <a:lstStyle/>
           <a:p>
             <a:fld id="{FABC47A4-756D-490B-A52F-7D9E2C9FC05F}" type="slidenum">
               <a:rPr lang="zh-CN" altLang="en-US" smtClean="0"/>
@@ -2215,7 +2579,7 @@
       </p:sp>
       <p:sp>
         <p:nvSpPr>
-          <p:cNvPr id="9" name="标题 8"/>
+          <p:cNvPr id="1048664" name="标题 8"/>
           <p:cNvSpPr>
             <a:spLocks noGrp="1"/>
           </p:cNvSpPr>
@@ -2251,7 +2615,7 @@
   <p:cSld name="竖排标题与文本">
     <p:spTree>
       <p:nvGrpSpPr>
-        <p:cNvPr id="1" name=""/>
+        <p:cNvPr id="38" name=""/>
         <p:cNvGrpSpPr/>
         <p:nvPr/>
       </p:nvGrpSpPr>
@@ -2265,7 +2629,7 @@
       </p:grpSpPr>
       <p:sp>
         <p:nvSpPr>
-          <p:cNvPr id="2" name="竖排标题 1"/>
+          <p:cNvPr id="1048631" name="竖排标题 1"/>
           <p:cNvSpPr>
             <a:spLocks noGrp="1"/>
           </p:cNvSpPr>
@@ -2304,7 +2668,7 @@
       </p:sp>
       <p:sp>
         <p:nvSpPr>
-          <p:cNvPr id="3" name="竖排文字占位符 2"/>
+          <p:cNvPr id="1048632" name="竖排文字占位符 2"/>
           <p:cNvSpPr>
             <a:spLocks noGrp="1"/>
           </p:cNvSpPr>
@@ -2387,7 +2751,7 @@
       </p:sp>
       <p:sp>
         <p:nvSpPr>
-          <p:cNvPr id="4" name="日期占位符 3"/>
+          <p:cNvPr id="1048633" name="日期占位符 3"/>
           <p:cNvSpPr>
             <a:spLocks noGrp="1"/>
           </p:cNvSpPr>
@@ -2401,7 +2765,6 @@
         <p:spPr/>
         <p:txBody>
           <a:bodyPr/>
-          <a:lstStyle/>
           <a:p>
             <a:fld id="{760FBDFE-C587-4B4C-A407-44438C67B59E}" type="datetimeFigureOut">
               <a:rPr lang="zh-CN" altLang="en-US" smtClean="0"/>
@@ -2412,7 +2775,7 @@
       </p:sp>
       <p:sp>
         <p:nvSpPr>
-          <p:cNvPr id="5" name="页脚占位符 4"/>
+          <p:cNvPr id="1048634" name="页脚占位符 4"/>
           <p:cNvSpPr>
             <a:spLocks noGrp="1"/>
           </p:cNvSpPr>
@@ -2426,7 +2789,6 @@
         <p:spPr/>
         <p:txBody>
           <a:bodyPr/>
-          <a:lstStyle/>
           <a:p>
             <a:endParaRPr lang="zh-CN" altLang="en-US"/>
           </a:p>
@@ -2434,7 +2796,7 @@
       </p:sp>
       <p:sp>
         <p:nvSpPr>
-          <p:cNvPr id="6" name="灯片编号占位符 5"/>
+          <p:cNvPr id="1048635" name="灯片编号占位符 5"/>
           <p:cNvSpPr>
             <a:spLocks noGrp="1"/>
           </p:cNvSpPr>
@@ -2448,7 +2810,6 @@
         <p:spPr/>
         <p:txBody>
           <a:bodyPr/>
-          <a:lstStyle/>
           <a:p>
             <a:fld id="{49AE70B2-8BF9-45C0-BB95-33D1B9D3A854}" type="slidenum">
               <a:rPr lang="zh-CN" altLang="en-US" smtClean="0"/>
@@ -2475,7 +2836,7 @@
     </p:bg>
     <p:spTree>
       <p:nvGrpSpPr>
-        <p:cNvPr id="1" name=""/>
+        <p:cNvPr id="11" name=""/>
         <p:cNvGrpSpPr/>
         <p:nvPr/>
       </p:nvGrpSpPr>
@@ -2489,7 +2850,7 @@
       </p:grpSpPr>
       <p:sp>
         <p:nvSpPr>
-          <p:cNvPr id="2" name="标题占位符 1"/>
+          <p:cNvPr id="1048576" name="标题占位符 1"/>
           <p:cNvSpPr>
             <a:spLocks noGrp="1"/>
           </p:cNvSpPr>
@@ -2513,7 +2874,6 @@
           <a:bodyPr vert="horz" lIns="90170" tIns="46990" rIns="90170" bIns="46990" rtlCol="0" anchor="ctr" anchorCtr="0">
             <a:normAutofit/>
           </a:bodyPr>
-          <a:lstStyle/>
           <a:p>
             <a:r>
               <a:rPr lang="zh-CN" altLang="en-US" dirty="0"/>
@@ -2525,7 +2885,7 @@
       </p:sp>
       <p:sp>
         <p:nvSpPr>
-          <p:cNvPr id="3" name="文本占位符 2"/>
+          <p:cNvPr id="1048577" name="文本占位符 2"/>
           <p:cNvSpPr>
             <a:spLocks noGrp="1"/>
           </p:cNvSpPr>
@@ -2549,7 +2909,6 @@
           <a:bodyPr vert="horz" lIns="90000" tIns="46800" rIns="90000" bIns="46800" rtlCol="0">
             <a:normAutofit/>
           </a:bodyPr>
-          <a:lstStyle/>
           <a:p>
             <a:pPr lvl="0"/>
             <a:r>
@@ -2594,7 +2953,7 @@
       </p:sp>
       <p:sp>
         <p:nvSpPr>
-          <p:cNvPr id="4" name="日期占位符 3"/>
+          <p:cNvPr id="1048578" name="日期占位符 3"/>
           <p:cNvSpPr>
             <a:spLocks noGrp="1"/>
           </p:cNvSpPr>
@@ -2639,7 +2998,7 @@
       </p:sp>
       <p:sp>
         <p:nvSpPr>
-          <p:cNvPr id="5" name="页脚占位符 4"/>
+          <p:cNvPr id="1048579" name="页脚占位符 4"/>
           <p:cNvSpPr>
             <a:spLocks noGrp="1"/>
           </p:cNvSpPr>
@@ -2681,7 +3040,7 @@
       </p:sp>
       <p:sp>
         <p:nvSpPr>
-          <p:cNvPr id="6" name="灯片编号占位符 5"/>
+          <p:cNvPr id="1048580" name="灯片编号占位符 5"/>
           <p:cNvSpPr>
             <a:spLocks noGrp="1"/>
           </p:cNvSpPr>
@@ -2760,7 +3119,6 @@
               <a:lumOff val="15000"/>
             </a:schemeClr>
           </a:solidFill>
-          <a:uFillTx/>
           <a:latin typeface="+mj-lt"/>
           <a:ea typeface="+mj-ea"/>
           <a:cs typeface="+mj-cs"/>
@@ -2787,7 +3145,6 @@
               <a:lumOff val="35000"/>
             </a:schemeClr>
           </a:solidFill>
-          <a:uFillTx/>
           <a:latin typeface="+mn-lt"/>
           <a:ea typeface="+mn-ea"/>
           <a:cs typeface="+mn-cs"/>
@@ -2818,7 +3175,6 @@
               <a:lumOff val="35000"/>
             </a:schemeClr>
           </a:solidFill>
-          <a:uFillTx/>
           <a:latin typeface="+mn-lt"/>
           <a:ea typeface="+mn-ea"/>
           <a:cs typeface="+mn-cs"/>
@@ -2843,7 +3199,6 @@
               <a:lumOff val="35000"/>
             </a:schemeClr>
           </a:solidFill>
-          <a:uFillTx/>
           <a:latin typeface="+mn-lt"/>
           <a:ea typeface="+mn-ea"/>
           <a:cs typeface="+mn-cs"/>
@@ -2868,7 +3223,6 @@
               <a:lumOff val="35000"/>
             </a:schemeClr>
           </a:solidFill>
-          <a:uFillTx/>
           <a:latin typeface="+mn-lt"/>
           <a:ea typeface="+mn-ea"/>
           <a:cs typeface="+mn-cs"/>
@@ -2893,7 +3247,6 @@
               <a:lumOff val="35000"/>
             </a:schemeClr>
           </a:solidFill>
-          <a:uFillTx/>
           <a:latin typeface="+mn-lt"/>
           <a:ea typeface="+mn-ea"/>
           <a:cs typeface="+mn-cs"/>
@@ -3076,7 +3429,7 @@
   <p:cSld>
     <p:spTree>
       <p:nvGrpSpPr>
-        <p:cNvPr id="1" name=""/>
+        <p:cNvPr id="24" name=""/>
         <p:cNvGrpSpPr/>
         <p:nvPr/>
       </p:nvGrpSpPr>
@@ -3090,7 +3443,7 @@
       </p:grpSpPr>
       <p:sp>
         <p:nvSpPr>
-          <p:cNvPr id="4" name="文本框 3"/>
+          <p:cNvPr id="1048586" name="文本框 3"/>
           <p:cNvSpPr txBox="1"/>
           <p:nvPr/>
         </p:nvSpPr>
@@ -3202,7 +3555,7 @@
       </p:sp>
       <p:sp>
         <p:nvSpPr>
-          <p:cNvPr id="5" name="文本框 4"/>
+          <p:cNvPr id="1048587" name="文本框 4"/>
           <p:cNvSpPr txBox="1"/>
           <p:nvPr/>
         </p:nvSpPr>
@@ -3271,14 +3624,14 @@
   <p:cSld>
     <p:spTree>
       <p:nvGrpSpPr>
-        <p:cNvPr id="1" name=""/>
+        <p:cNvPr id="34" name=""/>
         <p:cNvGrpSpPr/>
         <p:nvPr/>
       </p:nvGrpSpPr>
       <p:grpSpPr/>
       <p:sp>
         <p:nvSpPr>
-          <p:cNvPr id="2" name="文本框 1"/>
+          <p:cNvPr id="1048616" name="文本框 1"/>
           <p:cNvSpPr txBox="1"/>
           <p:nvPr/>
         </p:nvSpPr>
@@ -3322,14 +3675,14 @@
   <p:cSld>
     <p:spTree>
       <p:nvGrpSpPr>
-        <p:cNvPr id="1" name=""/>
+        <p:cNvPr id="26" name=""/>
         <p:cNvGrpSpPr/>
         <p:nvPr/>
       </p:nvGrpSpPr>
       <p:grpSpPr/>
       <p:sp>
         <p:nvSpPr>
-          <p:cNvPr id="2" name="文本框 1"/>
+          <p:cNvPr id="1048591" name="文本框 1"/>
           <p:cNvSpPr txBox="1"/>
           <p:nvPr/>
         </p:nvSpPr>
@@ -3358,7 +3711,7 @@
       </p:sp>
       <p:sp>
         <p:nvSpPr>
-          <p:cNvPr id="4" name="文本框 3"/>
+          <p:cNvPr id="1048592" name="文本框 3"/>
           <p:cNvSpPr txBox="1"/>
           <p:nvPr/>
         </p:nvSpPr>
@@ -3387,7 +3740,7 @@
       </p:sp>
       <p:sp>
         <p:nvSpPr>
-          <p:cNvPr id="6" name="文本框 5"/>
+          <p:cNvPr id="1048593" name="文本框 5"/>
           <p:cNvSpPr txBox="1"/>
           <p:nvPr/>
         </p:nvSpPr>
@@ -3416,7 +3769,7 @@
       </p:sp>
       <p:sp>
         <p:nvSpPr>
-          <p:cNvPr id="8" name="文本框 7"/>
+          <p:cNvPr id="1048594" name="文本框 7"/>
           <p:cNvSpPr txBox="1"/>
           <p:nvPr/>
         </p:nvSpPr>
@@ -3443,43 +3796,12 @@
           </a:p>
         </p:txBody>
       </p:sp>
-      <p:pic>
-        <p:nvPicPr>
-          <p:cNvPr id="9" name="四川话">
-            <a:hlinkClick r:id="" action="ppaction://media"/>
-          </p:cNvPr>
-          <p:cNvPicPr/>
-          <p:nvPr>
-            <a:audioFile r:link="rId1"/>
-            <p:extLst>
-              <p:ext uri="{DAA4B4D4-6D71-4841-9C94-3DE7FCFB9230}">
-                <p14:media xmlns:p14="http://schemas.microsoft.com/office/powerpoint/2010/main" r:embed="rId2"/>
-              </p:ext>
-            </p:extLst>
-          </p:nvPr>
-        </p:nvPicPr>
-        <p:blipFill>
-          <a:blip r:embed="rId3"/>
-          <a:stretch>
-            <a:fillRect/>
-          </a:stretch>
-        </p:blipFill>
-        <p:spPr>
-          <a:xfrm>
-            <a:off x="10020300" y="2988310"/>
-            <a:ext cx="412750" cy="412750"/>
-          </a:xfrm>
-          <a:prstGeom prst="rect">
-            <a:avLst/>
-          </a:prstGeom>
-        </p:spPr>
-      </p:pic>
       <p:cxnSp>
         <p:nvCxnSpPr>
-          <p:cNvPr id="12" name="直接箭头连接符 11"/>
+          <p:cNvPr id="3145728" name="直接箭头连接符 11"/>
           <p:cNvCxnSpPr>
-            <a:stCxn id="8" idx="0"/>
-            <a:endCxn id="13" idx="2"/>
+            <a:stCxn id="1048594" idx="0"/>
+            <a:endCxn id="1048595" idx="2"/>
           </p:cNvCxnSpPr>
           <p:nvPr/>
         </p:nvCxnSpPr>
@@ -3516,7 +3838,7 @@
       </p:cxnSp>
       <p:sp>
         <p:nvSpPr>
-          <p:cNvPr id="13" name="文本框 12"/>
+          <p:cNvPr id="1048595" name="文本框 12"/>
           <p:cNvSpPr txBox="1"/>
           <p:nvPr/>
         </p:nvSpPr>
@@ -3545,14 +3867,14 @@
       </p:sp>
       <p:sp>
         <p:nvSpPr>
-          <p:cNvPr id="16" name="文本框 15"/>
+          <p:cNvPr id="1048596" name="文本框 15"/>
           <p:cNvSpPr txBox="1"/>
           <p:nvPr/>
         </p:nvSpPr>
         <p:spPr>
           <a:xfrm>
             <a:off x="2388235" y="4152900"/>
-            <a:ext cx="7632065" cy="1198880"/>
+            <a:ext cx="7632065" cy="1158240"/>
           </a:xfrm>
           <a:prstGeom prst="rect">
             <a:avLst/>
@@ -3581,102 +3903,9 @@
           </a:p>
         </p:txBody>
       </p:sp>
-      <p:pic>
-        <p:nvPicPr>
-          <p:cNvPr id="18" name="粤语">
-            <a:hlinkClick r:id="" action="ppaction://media"/>
-          </p:cNvPr>
-          <p:cNvPicPr/>
-          <p:nvPr>
-            <a:audioFile r:link="rId4"/>
-            <p:extLst>
-              <p:ext uri="{DAA4B4D4-6D71-4841-9C94-3DE7FCFB9230}">
-                <p14:media xmlns:p14="http://schemas.microsoft.com/office/powerpoint/2010/main" r:embed="rId5"/>
-              </p:ext>
-            </p:extLst>
-          </p:nvPr>
-        </p:nvPicPr>
-        <p:blipFill>
-          <a:blip r:embed="rId3"/>
-          <a:stretch>
-            <a:fillRect/>
-          </a:stretch>
-        </p:blipFill>
-        <p:spPr>
-          <a:xfrm>
-            <a:off x="1551940" y="2988310"/>
-            <a:ext cx="412750" cy="412750"/>
-          </a:xfrm>
-          <a:prstGeom prst="rect">
-            <a:avLst/>
-          </a:prstGeom>
-        </p:spPr>
-      </p:pic>
-      <p:pic>
-        <p:nvPicPr>
-          <p:cNvPr id="19" name="南京话">
-            <a:hlinkClick r:id="" action="ppaction://media"/>
-          </p:cNvPr>
-          <p:cNvPicPr/>
-          <p:nvPr>
-            <a:audioFile r:link="rId6"/>
-            <p:extLst>
-              <p:ext uri="{DAA4B4D4-6D71-4841-9C94-3DE7FCFB9230}">
-                <p14:media xmlns:p14="http://schemas.microsoft.com/office/powerpoint/2010/main" r:embed="rId7"/>
-              </p:ext>
-            </p:extLst>
-          </p:nvPr>
-        </p:nvPicPr>
-        <p:blipFill>
-          <a:blip r:embed="rId3"/>
-          <a:stretch>
-            <a:fillRect/>
-          </a:stretch>
-        </p:blipFill>
-        <p:spPr>
-          <a:xfrm>
-            <a:off x="4250690" y="2988310"/>
-            <a:ext cx="412750" cy="412750"/>
-          </a:xfrm>
-          <a:prstGeom prst="rect">
-            <a:avLst/>
-          </a:prstGeom>
-        </p:spPr>
-      </p:pic>
-      <p:pic>
-        <p:nvPicPr>
-          <p:cNvPr id="20" name="闽南语">
-            <a:hlinkClick r:id="" action="ppaction://media"/>
-          </p:cNvPr>
-          <p:cNvPicPr/>
-          <p:nvPr>
-            <a:audioFile r:link="rId8"/>
-            <p:extLst>
-              <p:ext uri="{DAA4B4D4-6D71-4841-9C94-3DE7FCFB9230}">
-                <p14:media xmlns:p14="http://schemas.microsoft.com/office/powerpoint/2010/main" r:embed="rId9"/>
-              </p:ext>
-            </p:extLst>
-          </p:nvPr>
-        </p:nvPicPr>
-        <p:blipFill>
-          <a:blip r:embed="rId3"/>
-          <a:stretch>
-            <a:fillRect/>
-          </a:stretch>
-        </p:blipFill>
-        <p:spPr>
-          <a:xfrm>
-            <a:off x="7135495" y="2988310"/>
-            <a:ext cx="412750" cy="412750"/>
-          </a:xfrm>
-          <a:prstGeom prst="rect">
-            <a:avLst/>
-          </a:prstGeom>
-        </p:spPr>
-      </p:pic>
     </p:spTree>
     <p:custDataLst>
-      <p:tags r:id="rId10"/>
+      <p:tags r:id="rId1"/>
     </p:custDataLst>
   </p:cSld>
   <p:clrMapOvr>
@@ -3716,7 +3945,7 @@
                                           </p:stCondLst>
                                         </p:cTn>
                                         <p:tgtEl>
-                                          <p:spTgt spid="13"/>
+                                          <p:spTgt spid="1048595"/>
                                         </p:tgtEl>
                                         <p:attrNameLst>
                                           <p:attrName>style.visibility</p:attrName>
@@ -3730,7 +3959,7 @@
                                       <p:cBhvr additive="base">
                                         <p:cTn id="7" dur="500" fill="hold"/>
                                         <p:tgtEl>
-                                          <p:spTgt spid="13"/>
+                                          <p:spTgt spid="1048595"/>
                                         </p:tgtEl>
                                         <p:attrNameLst>
                                           <p:attrName>ppt_x</p:attrName>
@@ -3753,7 +3982,7 @@
                                       <p:cBhvr additive="base">
                                         <p:cTn id="8" dur="500" fill="hold"/>
                                         <p:tgtEl>
-                                          <p:spTgt spid="13"/>
+                                          <p:spTgt spid="1048595"/>
                                         </p:tgtEl>
                                         <p:attrNameLst>
                                           <p:attrName>ppt_y</p:attrName>
@@ -3789,7 +4018,7 @@
                                           </p:stCondLst>
                                         </p:cTn>
                                         <p:tgtEl>
-                                          <p:spTgt spid="12"/>
+                                          <p:spTgt spid="3145728"/>
                                         </p:tgtEl>
                                         <p:attrNameLst>
                                           <p:attrName>style.visibility</p:attrName>
@@ -3803,7 +4032,7 @@
                                       <p:cBhvr additive="base">
                                         <p:cTn id="11" dur="500" fill="hold"/>
                                         <p:tgtEl>
-                                          <p:spTgt spid="12"/>
+                                          <p:spTgt spid="3145728"/>
                                         </p:tgtEl>
                                         <p:attrNameLst>
                                           <p:attrName>ppt_x</p:attrName>
@@ -3826,7 +4055,7 @@
                                       <p:cBhvr additive="base">
                                         <p:cTn id="12" dur="500" fill="hold"/>
                                         <p:tgtEl>
-                                          <p:spTgt spid="12"/>
+                                          <p:spTgt spid="3145728"/>
                                         </p:tgtEl>
                                         <p:attrNameLst>
                                           <p:attrName>ppt_y</p:attrName>
@@ -3880,7 +4109,7 @@
                                           </p:stCondLst>
                                         </p:cTn>
                                         <p:tgtEl>
-                                          <p:spTgt spid="16"/>
+                                          <p:spTgt spid="1048596"/>
                                         </p:tgtEl>
                                         <p:attrNameLst>
                                           <p:attrName>style.visibility</p:attrName>
@@ -3894,7 +4123,7 @@
                                       <p:cBhvr additive="base">
                                         <p:cTn id="17" dur="500" fill="hold"/>
                                         <p:tgtEl>
-                                          <p:spTgt spid="16"/>
+                                          <p:spTgt spid="1048596"/>
                                         </p:tgtEl>
                                         <p:attrNameLst>
                                           <p:attrName>ppt_x</p:attrName>
@@ -3917,7 +4146,7 @@
                                       <p:cBhvr additive="base">
                                         <p:cTn id="18" dur="500" fill="hold"/>
                                         <p:tgtEl>
-                                          <p:spTgt spid="16"/>
+                                          <p:spTgt spid="1048596"/>
                                         </p:tgtEl>
                                         <p:attrNameLst>
                                           <p:attrName>ppt_y</p:attrName>
@@ -3962,323 +4191,15 @@
                 </p:cond>
               </p:nextCondLst>
             </p:seq>
-            <p:audio>
-              <p:cMediaNode>
-                <p:cTn id="19" fill="hold" display="1">
-                  <p:stCondLst>
-                    <p:cond delay="indefinite"/>
-                  </p:stCondLst>
-                  <p:endCondLst>
-                    <p:cond evt="onStopAudio">
-                      <p:tgtEl>
-                        <p:sldTgt/>
-                      </p:tgtEl>
-                    </p:cond>
-                  </p:endCondLst>
-                </p:cTn>
-                <p:tgtEl>
-                  <p:spTgt spid="9"/>
-                </p:tgtEl>
-              </p:cMediaNode>
-            </p:audio>
-            <p:audio>
-              <p:cMediaNode>
-                <p:cTn id="20" fill="hold" display="1">
-                  <p:stCondLst>
-                    <p:cond delay="indefinite"/>
-                  </p:stCondLst>
-                  <p:endCondLst>
-                    <p:cond evt="onStopAudio">
-                      <p:tgtEl>
-                        <p:sldTgt/>
-                      </p:tgtEl>
-                    </p:cond>
-                  </p:endCondLst>
-                </p:cTn>
-                <p:tgtEl>
-                  <p:spTgt spid="18"/>
-                </p:tgtEl>
-              </p:cMediaNode>
-            </p:audio>
-            <p:audio>
-              <p:cMediaNode>
-                <p:cTn id="21" fill="hold" display="1">
-                  <p:stCondLst>
-                    <p:cond delay="indefinite"/>
-                  </p:stCondLst>
-                  <p:endCondLst>
-                    <p:cond evt="onStopAudio">
-                      <p:tgtEl>
-                        <p:sldTgt/>
-                      </p:tgtEl>
-                    </p:cond>
-                  </p:endCondLst>
-                </p:cTn>
-                <p:tgtEl>
-                  <p:spTgt spid="19"/>
-                </p:tgtEl>
-              </p:cMediaNode>
-            </p:audio>
-            <p:audio>
-              <p:cMediaNode>
-                <p:cTn id="22" fill="hold" display="1">
-                  <p:stCondLst>
-                    <p:cond delay="indefinite"/>
-                  </p:stCondLst>
-                  <p:endCondLst>
-                    <p:cond evt="onStopAudio">
-                      <p:tgtEl>
-                        <p:sldTgt/>
-                      </p:tgtEl>
-                    </p:cond>
-                  </p:endCondLst>
-                </p:cTn>
-                <p:tgtEl>
-                  <p:spTgt spid="20"/>
-                </p:tgtEl>
-              </p:cMediaNode>
-            </p:audio>
-            <p:seq concurrent="1" nextAc="seek">
-              <p:cTn id="23" restart="whenNotActive" fill="hold" evtFilter="cancelBubble" nodeType="interactiveSeq">
-                <p:stCondLst>
-                  <p:cond evt="onClick" delay="0">
-                    <p:tgtEl>
-                      <p:spTgt spid="18"/>
-                    </p:tgtEl>
-                  </p:cond>
-                </p:stCondLst>
-                <p:endSync evt="end" delay="0">
-                  <p:rtn val="all"/>
-                </p:endSync>
-                <p:childTnLst>
-                  <p:par>
-                    <p:cTn id="24" fill="hold">
-                      <p:stCondLst>
-                        <p:cond delay="0"/>
-                      </p:stCondLst>
-                      <p:childTnLst>
-                        <p:par>
-                          <p:cTn id="25" fill="hold">
-                            <p:stCondLst>
-                              <p:cond delay="0"/>
-                            </p:stCondLst>
-                            <p:childTnLst>
-                              <p:par>
-                                <p:cTn id="26" presetID="1" presetClass="mediacall" presetSubtype="0" fill="hold" nodeType="clickEffect">
-                                  <p:stCondLst>
-                                    <p:cond delay="0"/>
-                                  </p:stCondLst>
-                                  <p:childTnLst>
-                                    <p:cmd type="call" cmd="playFrom(0.0)">
-                                      <p:cBhvr additive="base">
-                                        <p:cTn id="27" dur="indefinite" fill="hold"/>
-                                        <p:tgtEl>
-                                          <p:spTgt spid="18"/>
-                                        </p:tgtEl>
-                                      </p:cBhvr>
-                                    </p:cmd>
-                                  </p:childTnLst>
-                                </p:cTn>
-                              </p:par>
-                            </p:childTnLst>
-                          </p:cTn>
-                        </p:par>
-                      </p:childTnLst>
-                    </p:cTn>
-                  </p:par>
-                </p:childTnLst>
-              </p:cTn>
-              <p:nextCondLst>
-                <p:cond evt="onClick" delay="0">
-                  <p:tgtEl>
-                    <p:spTgt spid="18"/>
-                  </p:tgtEl>
-                </p:cond>
-              </p:nextCondLst>
-            </p:seq>
-            <p:seq concurrent="1" nextAc="seek">
-              <p:cTn id="28" restart="whenNotActive" fill="hold" evtFilter="cancelBubble" nodeType="interactiveSeq">
-                <p:stCondLst>
-                  <p:cond evt="onClick" delay="0">
-                    <p:tgtEl>
-                      <p:spTgt spid="19"/>
-                    </p:tgtEl>
-                  </p:cond>
-                </p:stCondLst>
-                <p:endSync evt="end" delay="0">
-                  <p:rtn val="all"/>
-                </p:endSync>
-                <p:childTnLst>
-                  <p:par>
-                    <p:cTn id="29" fill="hold">
-                      <p:stCondLst>
-                        <p:cond delay="0"/>
-                      </p:stCondLst>
-                      <p:childTnLst>
-                        <p:par>
-                          <p:cTn id="30" fill="hold">
-                            <p:stCondLst>
-                              <p:cond delay="0"/>
-                            </p:stCondLst>
-                            <p:childTnLst>
-                              <p:par>
-                                <p:cTn id="31" presetID="1" presetClass="mediacall" presetSubtype="0" fill="hold" nodeType="clickEffect">
-                                  <p:stCondLst>
-                                    <p:cond delay="0"/>
-                                  </p:stCondLst>
-                                  <p:childTnLst>
-                                    <p:cmd type="call" cmd="playFrom(0.0)">
-                                      <p:cBhvr additive="base">
-                                        <p:cTn id="32" dur="indefinite" fill="hold"/>
-                                        <p:tgtEl>
-                                          <p:spTgt spid="19"/>
-                                        </p:tgtEl>
-                                      </p:cBhvr>
-                                    </p:cmd>
-                                  </p:childTnLst>
-                                </p:cTn>
-                              </p:par>
-                            </p:childTnLst>
-                          </p:cTn>
-                        </p:par>
-                      </p:childTnLst>
-                    </p:cTn>
-                  </p:par>
-                </p:childTnLst>
-              </p:cTn>
-              <p:nextCondLst>
-                <p:cond evt="onClick" delay="0">
-                  <p:tgtEl>
-                    <p:spTgt spid="19"/>
-                  </p:tgtEl>
-                </p:cond>
-              </p:nextCondLst>
-            </p:seq>
-            <p:seq concurrent="1" nextAc="seek">
-              <p:cTn id="33" restart="whenNotActive" fill="hold" evtFilter="cancelBubble" nodeType="interactiveSeq">
-                <p:stCondLst>
-                  <p:cond evt="onClick" delay="0">
-                    <p:tgtEl>
-                      <p:spTgt spid="20"/>
-                    </p:tgtEl>
-                  </p:cond>
-                </p:stCondLst>
-                <p:endSync evt="end" delay="0">
-                  <p:rtn val="all"/>
-                </p:endSync>
-                <p:childTnLst>
-                  <p:par>
-                    <p:cTn id="34" fill="hold">
-                      <p:stCondLst>
-                        <p:cond delay="0"/>
-                      </p:stCondLst>
-                      <p:childTnLst>
-                        <p:par>
-                          <p:cTn id="35" fill="hold">
-                            <p:stCondLst>
-                              <p:cond delay="0"/>
-                            </p:stCondLst>
-                            <p:childTnLst>
-                              <p:par>
-                                <p:cTn id="36" presetID="1" presetClass="mediacall" presetSubtype="0" fill="hold" nodeType="clickEffect">
-                                  <p:stCondLst>
-                                    <p:cond delay="0"/>
-                                  </p:stCondLst>
-                                  <p:childTnLst>
-                                    <p:cmd type="call" cmd="playFrom(0.0)">
-                                      <p:cBhvr additive="base">
-                                        <p:cTn id="37" dur="indefinite" fill="hold"/>
-                                        <p:tgtEl>
-                                          <p:spTgt spid="20"/>
-                                        </p:tgtEl>
-                                      </p:cBhvr>
-                                    </p:cmd>
-                                  </p:childTnLst>
-                                </p:cTn>
-                              </p:par>
-                            </p:childTnLst>
-                          </p:cTn>
-                        </p:par>
-                      </p:childTnLst>
-                    </p:cTn>
-                  </p:par>
-                </p:childTnLst>
-              </p:cTn>
-              <p:nextCondLst>
-                <p:cond evt="onClick" delay="0">
-                  <p:tgtEl>
-                    <p:spTgt spid="20"/>
-                  </p:tgtEl>
-                </p:cond>
-              </p:nextCondLst>
-            </p:seq>
-            <p:seq concurrent="1" nextAc="seek">
-              <p:cTn id="38" restart="whenNotActive" fill="hold" evtFilter="cancelBubble" nodeType="interactiveSeq">
-                <p:stCondLst>
-                  <p:cond evt="onClick" delay="0">
-                    <p:tgtEl>
-                      <p:spTgt spid="9"/>
-                    </p:tgtEl>
-                  </p:cond>
-                </p:stCondLst>
-                <p:endSync evt="end" delay="0">
-                  <p:rtn val="all"/>
-                </p:endSync>
-                <p:childTnLst>
-                  <p:par>
-                    <p:cTn id="39" fill="hold">
-                      <p:stCondLst>
-                        <p:cond delay="0"/>
-                      </p:stCondLst>
-                      <p:childTnLst>
-                        <p:par>
-                          <p:cTn id="40" fill="hold">
-                            <p:stCondLst>
-                              <p:cond delay="0"/>
-                            </p:stCondLst>
-                            <p:childTnLst>
-                              <p:par>
-                                <p:cTn id="41" presetID="1" presetClass="mediacall" presetSubtype="0" fill="hold" nodeType="clickEffect">
-                                  <p:stCondLst>
-                                    <p:cond delay="0"/>
-                                  </p:stCondLst>
-                                  <p:childTnLst>
-                                    <p:cmd type="call" cmd="playFrom(0.0)">
-                                      <p:cBhvr additive="base">
-                                        <p:cTn id="42" dur="indefinite" fill="hold"/>
-                                        <p:tgtEl>
-                                          <p:spTgt spid="9"/>
-                                        </p:tgtEl>
-                                      </p:cBhvr>
-                                    </p:cmd>
-                                  </p:childTnLst>
-                                </p:cTn>
-                              </p:par>
-                            </p:childTnLst>
-                          </p:cTn>
-                        </p:par>
-                      </p:childTnLst>
-                    </p:cTn>
-                  </p:par>
-                </p:childTnLst>
-              </p:cTn>
-              <p:nextCondLst>
-                <p:cond evt="onClick" delay="0">
-                  <p:tgtEl>
-                    <p:spTgt spid="9"/>
-                  </p:tgtEl>
-                </p:cond>
-              </p:nextCondLst>
-            </p:seq>
           </p:childTnLst>
         </p:cTn>
       </p:par>
     </p:tnLst>
     <p:bldLst>
-      <p:bldP spid="13" grpId="0"/>
-      <p:bldP spid="13" grpId="1"/>
-      <p:bldP spid="16" grpId="0"/>
-      <p:bldP spid="16" grpId="1"/>
+      <p:bldP spid="1048595" grpId="0"/>
+      <p:bldP spid="1048595" grpId="1"/>
+      <p:bldP spid="1048596" grpId="0"/>
+      <p:bldP spid="1048596" grpId="1"/>
     </p:bldLst>
   </p:timing>
 </p:sld>
@@ -4289,14 +4210,14 @@
   <p:cSld>
     <p:spTree>
       <p:nvGrpSpPr>
-        <p:cNvPr id="1" name=""/>
+        <p:cNvPr id="27" name=""/>
         <p:cNvGrpSpPr/>
         <p:nvPr/>
       </p:nvGrpSpPr>
       <p:grpSpPr/>
       <p:sp>
         <p:nvSpPr>
-          <p:cNvPr id="2" name="文本框 1"/>
+          <p:cNvPr id="1048597" name="文本框 1"/>
           <p:cNvSpPr txBox="1"/>
           <p:nvPr/>
         </p:nvSpPr>
@@ -4325,14 +4246,14 @@
       </p:sp>
       <p:sp>
         <p:nvSpPr>
-          <p:cNvPr id="3" name="文本框 2"/>
+          <p:cNvPr id="1048598" name="文本框 2"/>
           <p:cNvSpPr txBox="1"/>
           <p:nvPr/>
         </p:nvSpPr>
         <p:spPr>
           <a:xfrm>
             <a:off x="3524250" y="1659890"/>
-            <a:ext cx="7844790" cy="3538220"/>
+            <a:ext cx="7844790" cy="3469641"/>
           </a:xfrm>
           <a:prstGeom prst="rect">
             <a:avLst/>
@@ -4388,14 +4309,14 @@
   <p:cSld>
     <p:spTree>
       <p:nvGrpSpPr>
-        <p:cNvPr id="1" name=""/>
+        <p:cNvPr id="28" name=""/>
         <p:cNvGrpSpPr/>
         <p:nvPr/>
       </p:nvGrpSpPr>
       <p:grpSpPr/>
       <p:sp>
         <p:nvSpPr>
-          <p:cNvPr id="2" name="文本框 1"/>
+          <p:cNvPr id="1048599" name="文本框 1"/>
           <p:cNvSpPr txBox="1"/>
           <p:nvPr/>
         </p:nvSpPr>
@@ -4433,7 +4354,7 @@
       </p:sp>
       <p:sp>
         <p:nvSpPr>
-          <p:cNvPr id="3" name="文本框 2"/>
+          <p:cNvPr id="1048600" name="文本框 2"/>
           <p:cNvSpPr txBox="1"/>
           <p:nvPr/>
         </p:nvSpPr>
@@ -4471,7 +4392,7 @@
       </p:sp>
       <p:sp>
         <p:nvSpPr>
-          <p:cNvPr id="6" name="文本框 5"/>
+          <p:cNvPr id="1048601" name="文本框 5"/>
           <p:cNvSpPr txBox="1"/>
           <p:nvPr/>
         </p:nvSpPr>
@@ -4541,7 +4462,7 @@
                                           </p:stCondLst>
                                         </p:cTn>
                                         <p:tgtEl>
-                                          <p:spTgt spid="3"/>
+                                          <p:spTgt spid="1048600"/>
                                         </p:tgtEl>
                                         <p:attrNameLst>
                                           <p:attrName>style.visibility</p:attrName>
@@ -4555,7 +4476,7 @@
                                       <p:cBhvr additive="base">
                                         <p:cTn id="7" dur="500" fill="hold"/>
                                         <p:tgtEl>
-                                          <p:spTgt spid="3"/>
+                                          <p:spTgt spid="1048600"/>
                                         </p:tgtEl>
                                         <p:attrNameLst>
                                           <p:attrName>ppt_x</p:attrName>
@@ -4578,7 +4499,7 @@
                                       <p:cBhvr additive="base">
                                         <p:cTn id="8" dur="500" fill="hold"/>
                                         <p:tgtEl>
-                                          <p:spTgt spid="3"/>
+                                          <p:spTgt spid="1048600"/>
                                         </p:tgtEl>
                                         <p:attrNameLst>
                                           <p:attrName>ppt_y</p:attrName>
@@ -4632,7 +4553,7 @@
                                           </p:stCondLst>
                                         </p:cTn>
                                         <p:tgtEl>
-                                          <p:spTgt spid="6"/>
+                                          <p:spTgt spid="1048601"/>
                                         </p:tgtEl>
                                         <p:attrNameLst>
                                           <p:attrName>style.visibility</p:attrName>
@@ -4646,7 +4567,7 @@
                                       <p:cBhvr additive="base">
                                         <p:cTn id="13" dur="500" fill="hold"/>
                                         <p:tgtEl>
-                                          <p:spTgt spid="6"/>
+                                          <p:spTgt spid="1048601"/>
                                         </p:tgtEl>
                                         <p:attrNameLst>
                                           <p:attrName>ppt_x</p:attrName>
@@ -4669,7 +4590,7 @@
                                       <p:cBhvr additive="base">
                                         <p:cTn id="14" dur="500" fill="hold"/>
                                         <p:tgtEl>
-                                          <p:spTgt spid="6"/>
+                                          <p:spTgt spid="1048601"/>
                                         </p:tgtEl>
                                         <p:attrNameLst>
                                           <p:attrName>ppt_y</p:attrName>
@@ -4719,10 +4640,10 @@
       </p:par>
     </p:tnLst>
     <p:bldLst>
-      <p:bldP spid="3" grpId="0"/>
-      <p:bldP spid="3" grpId="1"/>
-      <p:bldP spid="6" grpId="0"/>
-      <p:bldP spid="6" grpId="1"/>
+      <p:bldP spid="1048600" grpId="0"/>
+      <p:bldP spid="1048600" grpId="1"/>
+      <p:bldP spid="1048601" grpId="0"/>
+      <p:bldP spid="1048601" grpId="1"/>
     </p:bldLst>
   </p:timing>
 </p:sld>
@@ -4733,14 +4654,14 @@
   <p:cSld>
     <p:spTree>
       <p:nvGrpSpPr>
-        <p:cNvPr id="1" name=""/>
+        <p:cNvPr id="29" name=""/>
         <p:cNvGrpSpPr/>
         <p:nvPr/>
       </p:nvGrpSpPr>
       <p:grpSpPr/>
       <p:graphicFrame>
         <p:nvGraphicFramePr>
-          <p:cNvPr id="2" name="表格 1"/>
+          <p:cNvPr id="4194304" name="表格 1"/>
           <p:cNvGraphicFramePr/>
           <p:nvPr>
             <p:custDataLst>
@@ -4984,14 +4905,14 @@
   <p:cSld>
     <p:spTree>
       <p:nvGrpSpPr>
-        <p:cNvPr id="1" name=""/>
+        <p:cNvPr id="30" name=""/>
         <p:cNvGrpSpPr/>
         <p:nvPr/>
       </p:nvGrpSpPr>
       <p:grpSpPr/>
       <p:sp>
         <p:nvSpPr>
-          <p:cNvPr id="2" name="文本框 1"/>
+          <p:cNvPr id="1048602" name="文本框 1"/>
           <p:cNvSpPr txBox="1"/>
           <p:nvPr/>
         </p:nvSpPr>
@@ -5020,7 +4941,7 @@
       </p:sp>
       <p:sp>
         <p:nvSpPr>
-          <p:cNvPr id="4" name="文本框 3"/>
+          <p:cNvPr id="1048603" name="文本框 3"/>
           <p:cNvSpPr txBox="1"/>
           <p:nvPr/>
         </p:nvSpPr>
@@ -5049,7 +4970,7 @@
       </p:sp>
       <p:sp>
         <p:nvSpPr>
-          <p:cNvPr id="5" name="文本框 4"/>
+          <p:cNvPr id="1048604" name="文本框 4"/>
           <p:cNvSpPr txBox="1"/>
           <p:nvPr/>
         </p:nvSpPr>
@@ -5119,7 +5040,7 @@
                                           </p:stCondLst>
                                         </p:cTn>
                                         <p:tgtEl>
-                                          <p:spTgt spid="2"/>
+                                          <p:spTgt spid="1048602"/>
                                         </p:tgtEl>
                                         <p:attrNameLst>
                                           <p:attrName>style.visibility</p:attrName>
@@ -5133,7 +5054,7 @@
                                       <p:cBhvr additive="base">
                                         <p:cTn id="7" dur="500" fill="hold"/>
                                         <p:tgtEl>
-                                          <p:spTgt spid="2"/>
+                                          <p:spTgt spid="1048602"/>
                                         </p:tgtEl>
                                         <p:attrNameLst>
                                           <p:attrName>ppt_x</p:attrName>
@@ -5156,7 +5077,7 @@
                                       <p:cBhvr additive="base">
                                         <p:cTn id="8" dur="500" fill="hold"/>
                                         <p:tgtEl>
-                                          <p:spTgt spid="2"/>
+                                          <p:spTgt spid="1048602"/>
                                         </p:tgtEl>
                                         <p:attrNameLst>
                                           <p:attrName>ppt_y</p:attrName>
@@ -5210,7 +5131,7 @@
                                           </p:stCondLst>
                                         </p:cTn>
                                         <p:tgtEl>
-                                          <p:spTgt spid="4"/>
+                                          <p:spTgt spid="1048603"/>
                                         </p:tgtEl>
                                         <p:attrNameLst>
                                           <p:attrName>style.visibility</p:attrName>
@@ -5224,7 +5145,7 @@
                                       <p:cBhvr additive="base">
                                         <p:cTn id="13" dur="500" fill="hold"/>
                                         <p:tgtEl>
-                                          <p:spTgt spid="4"/>
+                                          <p:spTgt spid="1048603"/>
                                         </p:tgtEl>
                                         <p:attrNameLst>
                                           <p:attrName>ppt_x</p:attrName>
@@ -5247,7 +5168,7 @@
                                       <p:cBhvr additive="base">
                                         <p:cTn id="14" dur="500" fill="hold"/>
                                         <p:tgtEl>
-                                          <p:spTgt spid="4"/>
+                                          <p:spTgt spid="1048603"/>
                                         </p:tgtEl>
                                         <p:attrNameLst>
                                           <p:attrName>ppt_y</p:attrName>
@@ -5297,10 +5218,10 @@
       </p:par>
     </p:tnLst>
     <p:bldLst>
-      <p:bldP spid="2" grpId="0"/>
-      <p:bldP spid="2" grpId="1"/>
-      <p:bldP spid="4" grpId="0"/>
-      <p:bldP spid="4" grpId="1"/>
+      <p:bldP spid="1048602" grpId="0"/>
+      <p:bldP spid="1048602" grpId="1"/>
+      <p:bldP spid="1048603" grpId="0"/>
+      <p:bldP spid="1048603" grpId="1"/>
     </p:bldLst>
   </p:timing>
 </p:sld>
@@ -5311,14 +5232,14 @@
   <p:cSld>
     <p:spTree>
       <p:nvGrpSpPr>
-        <p:cNvPr id="1" name=""/>
+        <p:cNvPr id="31" name=""/>
         <p:cNvGrpSpPr/>
         <p:nvPr/>
       </p:nvGrpSpPr>
       <p:grpSpPr/>
       <p:sp>
         <p:nvSpPr>
-          <p:cNvPr id="2" name="文本框 1"/>
+          <p:cNvPr id="1048605" name="文本框 1"/>
           <p:cNvSpPr txBox="1"/>
           <p:nvPr/>
         </p:nvSpPr>
@@ -5348,7 +5269,7 @@
       </p:sp>
       <p:sp>
         <p:nvSpPr>
-          <p:cNvPr id="3" name="文本框 2"/>
+          <p:cNvPr id="1048606" name="文本框 2"/>
           <p:cNvSpPr txBox="1"/>
           <p:nvPr/>
         </p:nvSpPr>
@@ -5374,7 +5295,15 @@
                   <a:srgbClr val="FF0000"/>
                 </a:solidFill>
               </a:rPr>
-              <a:t>migration</a:t>
+              <a:t>M</a:t>
+            </a:r>
+            <a:r>
+              <a:rPr lang="en-US" altLang="zh-CN" sz="4000">
+                <a:solidFill>
+                  <a:srgbClr val="FF0000"/>
+                </a:solidFill>
+              </a:rPr>
+              <a:t>igration</a:t>
             </a:r>
             <a:endParaRPr lang="en-US" altLang="zh-CN" sz="4000">
               <a:solidFill>
@@ -5386,14 +5315,14 @@
       </p:sp>
       <p:sp>
         <p:nvSpPr>
-          <p:cNvPr id="4" name="文本框 3"/>
+          <p:cNvPr id="1048607" name="文本框 3"/>
           <p:cNvSpPr txBox="1"/>
           <p:nvPr/>
         </p:nvSpPr>
         <p:spPr>
           <a:xfrm>
             <a:off x="73025" y="3415665"/>
-            <a:ext cx="2527300" cy="829945"/>
+            <a:ext cx="2527300" cy="802641"/>
           </a:xfrm>
           <a:prstGeom prst="rect">
             <a:avLst/>
@@ -5416,14 +5345,14 @@
       </p:sp>
       <p:sp>
         <p:nvSpPr>
-          <p:cNvPr id="5" name="文本框 4"/>
+          <p:cNvPr id="1048608" name="文本框 4"/>
           <p:cNvSpPr txBox="1"/>
           <p:nvPr/>
         </p:nvSpPr>
         <p:spPr>
           <a:xfrm>
             <a:off x="4342765" y="3415665"/>
-            <a:ext cx="2797810" cy="829945"/>
+            <a:ext cx="2797810" cy="802641"/>
           </a:xfrm>
           <a:prstGeom prst="rect">
             <a:avLst/>
@@ -5454,10 +5383,10 @@
       </p:sp>
       <p:cxnSp>
         <p:nvCxnSpPr>
-          <p:cNvPr id="6" name="直接箭头连接符 5"/>
+          <p:cNvPr id="3145729" name="直接箭头连接符 5"/>
           <p:cNvCxnSpPr>
-            <a:stCxn id="4" idx="3"/>
-            <a:endCxn id="5" idx="1"/>
+            <a:stCxn id="1048607" idx="3"/>
+            <a:endCxn id="1048608" idx="1"/>
           </p:cNvCxnSpPr>
           <p:nvPr/>
         </p:nvCxnSpPr>
@@ -5494,14 +5423,14 @@
       </p:cxnSp>
       <p:sp>
         <p:nvSpPr>
-          <p:cNvPr id="7" name="文本框 6"/>
+          <p:cNvPr id="1048609" name="文本框 6"/>
           <p:cNvSpPr txBox="1"/>
           <p:nvPr/>
         </p:nvSpPr>
         <p:spPr>
           <a:xfrm>
-            <a:off x="2807970" y="3261360"/>
-            <a:ext cx="1327785" cy="460375"/>
+            <a:off x="2750820" y="3261360"/>
+            <a:ext cx="1440815" cy="460375"/>
           </a:xfrm>
           <a:prstGeom prst="rect">
             <a:avLst/>
@@ -5516,7 +5445,7 @@
             <a:pPr algn="ctr"/>
             <a:r>
               <a:rPr lang="en-US" altLang="zh-CN" sz="2400"/>
-              <a:t>Move to</a:t>
+              <a:t>Moved to</a:t>
             </a:r>
             <a:endParaRPr lang="en-US" altLang="zh-CN" sz="2400"/>
           </a:p>
@@ -5524,14 +5453,14 @@
       </p:sp>
       <p:sp>
         <p:nvSpPr>
-          <p:cNvPr id="8" name="文本框 7"/>
+          <p:cNvPr id="1048610" name="文本框 7"/>
           <p:cNvSpPr txBox="1"/>
           <p:nvPr/>
         </p:nvSpPr>
         <p:spPr>
           <a:xfrm>
             <a:off x="2226945" y="4245610"/>
-            <a:ext cx="2488565" cy="829945"/>
+            <a:ext cx="2488565" cy="802640"/>
           </a:xfrm>
           <a:prstGeom prst="rect">
             <a:avLst/>
@@ -5554,14 +5483,14 @@
       </p:sp>
       <p:sp>
         <p:nvSpPr>
-          <p:cNvPr id="9" name="文本框 8"/>
+          <p:cNvPr id="1048611" name="文本框 8"/>
           <p:cNvSpPr txBox="1"/>
           <p:nvPr/>
         </p:nvSpPr>
         <p:spPr>
           <a:xfrm>
             <a:off x="8088630" y="3415665"/>
-            <a:ext cx="3789680" cy="829945"/>
+            <a:ext cx="3789680" cy="802641"/>
           </a:xfrm>
           <a:prstGeom prst="rect">
             <a:avLst/>
@@ -5584,10 +5513,10 @@
       </p:sp>
       <p:cxnSp>
         <p:nvCxnSpPr>
-          <p:cNvPr id="10" name="直接箭头连接符 9"/>
+          <p:cNvPr id="3145730" name="直接箭头连接符 9"/>
           <p:cNvCxnSpPr>
-            <a:stCxn id="5" idx="3"/>
-            <a:endCxn id="9" idx="1"/>
+            <a:stCxn id="1048608" idx="3"/>
+            <a:endCxn id="1048611" idx="1"/>
           </p:cNvCxnSpPr>
           <p:nvPr/>
         </p:nvCxnSpPr>
@@ -5664,7 +5593,7 @@
                                           </p:stCondLst>
                                         </p:cTn>
                                         <p:tgtEl>
-                                          <p:spTgt spid="3"/>
+                                          <p:spTgt spid="1048606"/>
                                         </p:tgtEl>
                                         <p:attrNameLst>
                                           <p:attrName>style.visibility</p:attrName>
@@ -5678,7 +5607,7 @@
                                       <p:cBhvr additive="base">
                                         <p:cTn id="7" dur="500" fill="hold"/>
                                         <p:tgtEl>
-                                          <p:spTgt spid="3"/>
+                                          <p:spTgt spid="1048606"/>
                                         </p:tgtEl>
                                         <p:attrNameLst>
                                           <p:attrName>ppt_x</p:attrName>
@@ -5701,7 +5630,7 @@
                                       <p:cBhvr additive="base">
                                         <p:cTn id="8" dur="500" fill="hold"/>
                                         <p:tgtEl>
-                                          <p:spTgt spid="3"/>
+                                          <p:spTgt spid="1048606"/>
                                         </p:tgtEl>
                                         <p:attrNameLst>
                                           <p:attrName>ppt_y</p:attrName>
@@ -5755,7 +5684,7 @@
                                           </p:stCondLst>
                                         </p:cTn>
                                         <p:tgtEl>
-                                          <p:spTgt spid="4"/>
+                                          <p:spTgt spid="1048607"/>
                                         </p:tgtEl>
                                         <p:attrNameLst>
                                           <p:attrName>style.visibility</p:attrName>
@@ -5769,7 +5698,7 @@
                                       <p:cBhvr additive="base">
                                         <p:cTn id="13" dur="500" fill="hold"/>
                                         <p:tgtEl>
-                                          <p:spTgt spid="4"/>
+                                          <p:spTgt spid="1048607"/>
                                         </p:tgtEl>
                                         <p:attrNameLst>
                                           <p:attrName>ppt_x</p:attrName>
@@ -5792,7 +5721,7 @@
                                       <p:cBhvr additive="base">
                                         <p:cTn id="14" dur="500" fill="hold"/>
                                         <p:tgtEl>
-                                          <p:spTgt spid="4"/>
+                                          <p:spTgt spid="1048607"/>
                                         </p:tgtEl>
                                         <p:attrNameLst>
                                           <p:attrName>ppt_y</p:attrName>
@@ -5846,7 +5775,7 @@
                                           </p:stCondLst>
                                         </p:cTn>
                                         <p:tgtEl>
-                                          <p:spTgt spid="5"/>
+                                          <p:spTgt spid="1048608"/>
                                         </p:tgtEl>
                                         <p:attrNameLst>
                                           <p:attrName>style.visibility</p:attrName>
@@ -5860,7 +5789,7 @@
                                       <p:cBhvr additive="base">
                                         <p:cTn id="19" dur="500" fill="hold"/>
                                         <p:tgtEl>
-                                          <p:spTgt spid="5"/>
+                                          <p:spTgt spid="1048608"/>
                                         </p:tgtEl>
                                         <p:attrNameLst>
                                           <p:attrName>ppt_x</p:attrName>
@@ -5883,7 +5812,7 @@
                                       <p:cBhvr additive="base">
                                         <p:cTn id="20" dur="500" fill="hold"/>
                                         <p:tgtEl>
-                                          <p:spTgt spid="5"/>
+                                          <p:spTgt spid="1048608"/>
                                         </p:tgtEl>
                                         <p:attrNameLst>
                                           <p:attrName>ppt_y</p:attrName>
@@ -5919,7 +5848,7 @@
                                           </p:stCondLst>
                                         </p:cTn>
                                         <p:tgtEl>
-                                          <p:spTgt spid="6"/>
+                                          <p:spTgt spid="3145729"/>
                                         </p:tgtEl>
                                         <p:attrNameLst>
                                           <p:attrName>style.visibility</p:attrName>
@@ -5933,7 +5862,7 @@
                                       <p:cBhvr additive="base">
                                         <p:cTn id="23" dur="500" fill="hold"/>
                                         <p:tgtEl>
-                                          <p:spTgt spid="6"/>
+                                          <p:spTgt spid="3145729"/>
                                         </p:tgtEl>
                                         <p:attrNameLst>
                                           <p:attrName>ppt_x</p:attrName>
@@ -5956,7 +5885,7 @@
                                       <p:cBhvr additive="base">
                                         <p:cTn id="24" dur="500" fill="hold"/>
                                         <p:tgtEl>
-                                          <p:spTgt spid="6"/>
+                                          <p:spTgt spid="3145729"/>
                                         </p:tgtEl>
                                         <p:attrNameLst>
                                           <p:attrName>ppt_y</p:attrName>
@@ -5992,7 +5921,7 @@
                                           </p:stCondLst>
                                         </p:cTn>
                                         <p:tgtEl>
-                                          <p:spTgt spid="7"/>
+                                          <p:spTgt spid="1048609"/>
                                         </p:tgtEl>
                                         <p:attrNameLst>
                                           <p:attrName>style.visibility</p:attrName>
@@ -6006,7 +5935,7 @@
                                       <p:cBhvr additive="base">
                                         <p:cTn id="27" dur="500" fill="hold"/>
                                         <p:tgtEl>
-                                          <p:spTgt spid="7"/>
+                                          <p:spTgt spid="1048609"/>
                                         </p:tgtEl>
                                         <p:attrNameLst>
                                           <p:attrName>ppt_x</p:attrName>
@@ -6029,7 +5958,7 @@
                                       <p:cBhvr additive="base">
                                         <p:cTn id="28" dur="500" fill="hold"/>
                                         <p:tgtEl>
-                                          <p:spTgt spid="7"/>
+                                          <p:spTgt spid="1048609"/>
                                         </p:tgtEl>
                                         <p:attrNameLst>
                                           <p:attrName>ppt_y</p:attrName>
@@ -6065,7 +5994,7 @@
                                           </p:stCondLst>
                                         </p:cTn>
                                         <p:tgtEl>
-                                          <p:spTgt spid="8"/>
+                                          <p:spTgt spid="1048610"/>
                                         </p:tgtEl>
                                         <p:attrNameLst>
                                           <p:attrName>style.visibility</p:attrName>
@@ -6079,7 +6008,7 @@
                                       <p:cBhvr additive="base">
                                         <p:cTn id="31" dur="500" fill="hold"/>
                                         <p:tgtEl>
-                                          <p:spTgt spid="8"/>
+                                          <p:spTgt spid="1048610"/>
                                         </p:tgtEl>
                                         <p:attrNameLst>
                                           <p:attrName>ppt_x</p:attrName>
@@ -6102,7 +6031,7 @@
                                       <p:cBhvr additive="base">
                                         <p:cTn id="32" dur="500" fill="hold"/>
                                         <p:tgtEl>
-                                          <p:spTgt spid="8"/>
+                                          <p:spTgt spid="1048610"/>
                                         </p:tgtEl>
                                         <p:attrNameLst>
                                           <p:attrName>ppt_y</p:attrName>
@@ -6156,7 +6085,7 @@
                                           </p:stCondLst>
                                         </p:cTn>
                                         <p:tgtEl>
-                                          <p:spTgt spid="9"/>
+                                          <p:spTgt spid="1048611"/>
                                         </p:tgtEl>
                                         <p:attrNameLst>
                                           <p:attrName>style.visibility</p:attrName>
@@ -6170,7 +6099,7 @@
                                       <p:cBhvr additive="base">
                                         <p:cTn id="37" dur="500" fill="hold"/>
                                         <p:tgtEl>
-                                          <p:spTgt spid="9"/>
+                                          <p:spTgt spid="1048611"/>
                                         </p:tgtEl>
                                         <p:attrNameLst>
                                           <p:attrName>ppt_x</p:attrName>
@@ -6193,7 +6122,7 @@
                                       <p:cBhvr additive="base">
                                         <p:cTn id="38" dur="500" fill="hold"/>
                                         <p:tgtEl>
-                                          <p:spTgt spid="9"/>
+                                          <p:spTgt spid="1048611"/>
                                         </p:tgtEl>
                                         <p:attrNameLst>
                                           <p:attrName>ppt_y</p:attrName>
@@ -6229,7 +6158,7 @@
                                           </p:stCondLst>
                                         </p:cTn>
                                         <p:tgtEl>
-                                          <p:spTgt spid="10"/>
+                                          <p:spTgt spid="3145730"/>
                                         </p:tgtEl>
                                         <p:attrNameLst>
                                           <p:attrName>style.visibility</p:attrName>
@@ -6243,7 +6172,7 @@
                                       <p:cBhvr additive="base">
                                         <p:cTn id="41" dur="500" fill="hold"/>
                                         <p:tgtEl>
-                                          <p:spTgt spid="10"/>
+                                          <p:spTgt spid="3145730"/>
                                         </p:tgtEl>
                                         <p:attrNameLst>
                                           <p:attrName>ppt_x</p:attrName>
@@ -6266,7 +6195,7 @@
                                       <p:cBhvr additive="base">
                                         <p:cTn id="42" dur="500" fill="hold"/>
                                         <p:tgtEl>
-                                          <p:spTgt spid="10"/>
+                                          <p:spTgt spid="3145730"/>
                                         </p:tgtEl>
                                         <p:attrNameLst>
                                           <p:attrName>ppt_y</p:attrName>
@@ -6316,18 +6245,18 @@
       </p:par>
     </p:tnLst>
     <p:bldLst>
-      <p:bldP spid="3" grpId="0"/>
-      <p:bldP spid="3" grpId="1"/>
-      <p:bldP spid="4" grpId="0"/>
-      <p:bldP spid="4" grpId="1"/>
-      <p:bldP spid="5" grpId="0"/>
-      <p:bldP spid="7" grpId="0"/>
-      <p:bldP spid="8" grpId="0"/>
-      <p:bldP spid="5" grpId="1"/>
-      <p:bldP spid="7" grpId="1"/>
-      <p:bldP spid="8" grpId="1"/>
-      <p:bldP spid="9" grpId="0"/>
-      <p:bldP spid="9" grpId="1"/>
+      <p:bldP spid="1048606" grpId="0"/>
+      <p:bldP spid="1048606" grpId="1"/>
+      <p:bldP spid="1048607" grpId="0"/>
+      <p:bldP spid="1048607" grpId="1"/>
+      <p:bldP spid="1048608" grpId="0"/>
+      <p:bldP spid="1048609" grpId="0"/>
+      <p:bldP spid="1048610" grpId="0"/>
+      <p:bldP spid="1048608" grpId="1"/>
+      <p:bldP spid="1048609" grpId="1"/>
+      <p:bldP spid="1048610" grpId="1"/>
+      <p:bldP spid="1048611" grpId="0"/>
+      <p:bldP spid="1048611" grpId="1"/>
     </p:bldLst>
   </p:timing>
 </p:sld>
@@ -6338,14 +6267,14 @@
   <p:cSld>
     <p:spTree>
       <p:nvGrpSpPr>
-        <p:cNvPr id="1" name=""/>
+        <p:cNvPr id="32" name=""/>
         <p:cNvGrpSpPr/>
         <p:nvPr/>
       </p:nvGrpSpPr>
       <p:grpSpPr/>
       <p:sp>
         <p:nvSpPr>
-          <p:cNvPr id="2" name="文本框 1"/>
+          <p:cNvPr id="1048612" name="文本框 1"/>
           <p:cNvSpPr txBox="1"/>
           <p:nvPr/>
         </p:nvSpPr>
@@ -6375,14 +6304,14 @@
       </p:sp>
       <p:sp>
         <p:nvSpPr>
-          <p:cNvPr id="3" name="文本框 2"/>
+          <p:cNvPr id="1048613" name="文本框 2"/>
           <p:cNvSpPr txBox="1"/>
           <p:nvPr/>
         </p:nvSpPr>
         <p:spPr>
           <a:xfrm>
             <a:off x="581025" y="1413510"/>
-            <a:ext cx="10826115" cy="4030980"/>
+            <a:ext cx="10826115" cy="2987040"/>
           </a:xfrm>
           <a:prstGeom prst="rect">
             <a:avLst/>
@@ -6438,21 +6367,21 @@
   <p:cSld>
     <p:spTree>
       <p:nvGrpSpPr>
-        <p:cNvPr id="1" name=""/>
+        <p:cNvPr id="33" name=""/>
         <p:cNvGrpSpPr/>
         <p:nvPr/>
       </p:nvGrpSpPr>
       <p:grpSpPr/>
       <p:sp>
         <p:nvSpPr>
-          <p:cNvPr id="2" name="文本框 1"/>
+          <p:cNvPr id="1048614" name="文本框 1"/>
           <p:cNvSpPr txBox="1"/>
           <p:nvPr/>
         </p:nvSpPr>
         <p:spPr>
           <a:xfrm>
             <a:off x="805180" y="1476375"/>
-            <a:ext cx="10582275" cy="4030980"/>
+            <a:ext cx="10582275" cy="3046095"/>
           </a:xfrm>
           <a:prstGeom prst="rect">
             <a:avLst/>
@@ -6490,21 +6419,11 @@
             </a:r>
             <a:endParaRPr lang="en-US" altLang="zh-CN" sz="3200"/>
           </a:p>
-          <a:p>
-            <a:endParaRPr lang="en-US" altLang="zh-CN" sz="3200"/>
-          </a:p>
-          <a:p>
-            <a:r>
-              <a:rPr lang="en-US" altLang="zh-CN" sz="3200"/>
-              <a:t>4. Use AI to generate the audio.</a:t>
-            </a:r>
-            <a:endParaRPr lang="en-US" altLang="zh-CN" sz="3200"/>
-          </a:p>
-        </p:txBody>
-      </p:sp>
-      <p:sp>
-        <p:nvSpPr>
-          <p:cNvPr id="4" name="文本框 3"/>
+        </p:txBody>
+      </p:sp>
+      <p:sp>
+        <p:nvSpPr>
+          <p:cNvPr id="1048615" name="文本框 3"/>
           <p:cNvSpPr txBox="1"/>
           <p:nvPr/>
         </p:nvSpPr>
@@ -7643,4 +7562,263 @@
     </a:ext>
   </a:extLst>
 </a:theme>
+</file>
+
+<file path=ppt/theme/theme2.xml><?xml version="1.0" encoding="utf-8"?>
+<a:theme xmlns:a="http://schemas.openxmlformats.org/drawingml/2006/main" name="Office 主题">
+  <a:themeElements>
+    <a:clrScheme name="Office">
+      <a:dk1>
+        <a:sysClr val="windowText" lastClr="000000"/>
+      </a:dk1>
+      <a:lt1>
+        <a:sysClr val="window" lastClr="FFFFFF"/>
+      </a:lt1>
+      <a:dk2>
+        <a:srgbClr val="44546A"/>
+      </a:dk2>
+      <a:lt2>
+        <a:srgbClr val="E7E6E6"/>
+      </a:lt2>
+      <a:accent1>
+        <a:srgbClr val="5B9BD5"/>
+      </a:accent1>
+      <a:accent2>
+        <a:srgbClr val="ED7D31"/>
+      </a:accent2>
+      <a:accent3>
+        <a:srgbClr val="A5A5A5"/>
+      </a:accent3>
+      <a:accent4>
+        <a:srgbClr val="FFC000"/>
+      </a:accent4>
+      <a:accent5>
+        <a:srgbClr val="4472C4"/>
+      </a:accent5>
+      <a:accent6>
+        <a:srgbClr val="70AD47"/>
+      </a:accent6>
+      <a:hlink>
+        <a:srgbClr val="0563C1"/>
+      </a:hlink>
+      <a:folHlink>
+        <a:srgbClr val="954F72"/>
+      </a:folHlink>
+    </a:clrScheme>
+    <a:fontScheme name="Office">
+      <a:majorFont>
+        <a:latin typeface="Calibri Light"/>
+        <a:ea typeface=""/>
+        <a:cs typeface=""/>
+        <a:font script="Jpan" typeface="ＭＳ Ｐゴシック"/>
+        <a:font script="Hang" typeface="맑은 고딕"/>
+        <a:font script="Hans" typeface="宋体"/>
+        <a:font script="Hant" typeface="新細明體"/>
+        <a:font script="Arab" typeface="Times New Roman"/>
+        <a:font script="Hebr" typeface="Times New Roman"/>
+        <a:font script="Thai" typeface="TH Sarabun PSK"/>
+        <a:font script="Ethi" typeface="Nyala"/>
+        <a:font script="Beng" typeface="Vrinda"/>
+        <a:font script="Gujr" typeface="Shruti"/>
+        <a:font script="Khmr" typeface="MoolBoran"/>
+        <a:font script="Knda" typeface="Tunga"/>
+        <a:font script="Guru" typeface="Raavi"/>
+        <a:font script="Cans" typeface="Euphemia"/>
+        <a:font script="Cher" typeface="Plantagenet Cherokee"/>
+        <a:font script="Yiii" typeface="Microsoft Yi Baiti"/>
+        <a:font script="Tibt" typeface="Microsoft Himalaya"/>
+        <a:font script="Thaa" typeface="MV Boli"/>
+        <a:font script="Deva" typeface="Mangal"/>
+        <a:font script="Telu" typeface="Gautami"/>
+        <a:font script="Taml" typeface="Latha"/>
+        <a:font script="Syrc" typeface="Estrangelo Edessa"/>
+        <a:font script="Orya" typeface="Kalinga"/>
+        <a:font script="Mlym" typeface="Kartika"/>
+        <a:font script="Laoo" typeface="DokChampa"/>
+        <a:font script="Sinh" typeface="Iskoola Pota"/>
+        <a:font script="Mong" typeface="Mongolian Baiti"/>
+        <a:font script="Viet" typeface="Times New Roman"/>
+        <a:font script="Uigh" typeface="Microsoft Uighur"/>
+        <a:font script="Geor" typeface="Sylfaen"/>
+      </a:majorFont>
+      <a:minorFont>
+        <a:latin typeface="Calibri"/>
+        <a:ea typeface=""/>
+        <a:cs typeface=""/>
+        <a:font script="Jpan" typeface="ＭＳ Ｐゴシック"/>
+        <a:font script="Hang" typeface="맑은 고딕"/>
+        <a:font script="Hans" typeface="宋体"/>
+        <a:font script="Hant" typeface="新細明體"/>
+        <a:font script="Arab" typeface="Arial"/>
+        <a:font script="Hebr" typeface="Arial"/>
+        <a:font script="Thai" typeface="TH Sarabun PSK"/>
+        <a:font script="Ethi" typeface="Nyala"/>
+        <a:font script="Beng" typeface="Vrinda"/>
+        <a:font script="Gujr" typeface="Shruti"/>
+        <a:font script="Khmr" typeface="DaunPenh"/>
+        <a:font script="Knda" typeface="Tunga"/>
+        <a:font script="Guru" typeface="Raavi"/>
+        <a:font script="Cans" typeface="Euphemia"/>
+        <a:font script="Cher" typeface="Plantagenet Cherokee"/>
+        <a:font script="Yiii" typeface="Microsoft Yi Baiti"/>
+        <a:font script="Tibt" typeface="Microsoft Himalaya"/>
+        <a:font script="Thaa" typeface="MV Boli"/>
+        <a:font script="Deva" typeface="Mangal"/>
+        <a:font script="Telu" typeface="Gautami"/>
+        <a:font script="Taml" typeface="Latha"/>
+        <a:font script="Syrc" typeface="Estrangelo Edessa"/>
+        <a:font script="Orya" typeface="Kalinga"/>
+        <a:font script="Mlym" typeface="Kartika"/>
+        <a:font script="Laoo" typeface="DokChampa"/>
+        <a:font script="Sinh" typeface="Iskoola Pota"/>
+        <a:font script="Mong" typeface="Mongolian Baiti"/>
+        <a:font script="Viet" typeface="Arial"/>
+        <a:font script="Uigh" typeface="Microsoft Uighur"/>
+        <a:font script="Geor" typeface="Sylfaen"/>
+      </a:minorFont>
+    </a:fontScheme>
+    <a:fmtScheme name="Office">
+      <a:fillStyleLst>
+        <a:solidFill>
+          <a:schemeClr val="phClr"/>
+        </a:solidFill>
+        <a:gradFill rotWithShape="1">
+          <a:gsLst>
+            <a:gs pos="0">
+              <a:schemeClr val="phClr">
+                <a:lumMod val="110000"/>
+                <a:satMod val="105000"/>
+                <a:tint val="67000"/>
+              </a:schemeClr>
+            </a:gs>
+            <a:gs pos="50000">
+              <a:schemeClr val="phClr">
+                <a:lumMod val="105000"/>
+                <a:satMod val="103000"/>
+                <a:tint val="73000"/>
+              </a:schemeClr>
+            </a:gs>
+            <a:gs pos="100000">
+              <a:schemeClr val="phClr">
+                <a:lumMod val="105000"/>
+                <a:satMod val="109000"/>
+                <a:tint val="81000"/>
+              </a:schemeClr>
+            </a:gs>
+          </a:gsLst>
+          <a:lin ang="5400000" scaled="0"/>
+        </a:gradFill>
+        <a:gradFill rotWithShape="1">
+          <a:gsLst>
+            <a:gs pos="0">
+              <a:schemeClr val="phClr">
+                <a:satMod val="103000"/>
+                <a:lumMod val="102000"/>
+                <a:tint val="94000"/>
+              </a:schemeClr>
+            </a:gs>
+            <a:gs pos="50000">
+              <a:schemeClr val="phClr">
+                <a:satMod val="110000"/>
+                <a:lumMod val="100000"/>
+                <a:shade val="100000"/>
+              </a:schemeClr>
+            </a:gs>
+            <a:gs pos="100000">
+              <a:schemeClr val="phClr">
+                <a:lumMod val="99000"/>
+                <a:satMod val="120000"/>
+                <a:shade val="78000"/>
+              </a:schemeClr>
+            </a:gs>
+          </a:gsLst>
+          <a:lin ang="5400000" scaled="0"/>
+        </a:gradFill>
+      </a:fillStyleLst>
+      <a:lnStyleLst>
+        <a:ln w="6350" cap="flat" cmpd="sng" algn="ctr">
+          <a:solidFill>
+            <a:schemeClr val="phClr"/>
+          </a:solidFill>
+          <a:prstDash val="solid"/>
+          <a:miter lim="800000"/>
+        </a:ln>
+        <a:ln w="12700" cap="flat" cmpd="sng" algn="ctr">
+          <a:solidFill>
+            <a:schemeClr val="phClr"/>
+          </a:solidFill>
+          <a:prstDash val="solid"/>
+          <a:miter lim="800000"/>
+        </a:ln>
+        <a:ln w="19050" cap="flat" cmpd="sng" algn="ctr">
+          <a:solidFill>
+            <a:schemeClr val="phClr"/>
+          </a:solidFill>
+          <a:prstDash val="solid"/>
+          <a:miter lim="800000"/>
+        </a:ln>
+      </a:lnStyleLst>
+      <a:effectStyleLst>
+        <a:effectStyle>
+          <a:effectLst/>
+        </a:effectStyle>
+        <a:effectStyle>
+          <a:effectLst/>
+        </a:effectStyle>
+        <a:effectStyle>
+          <a:effectLst>
+            <a:outerShdw blurRad="57150" dist="19050" dir="5400000" algn="ctr" rotWithShape="0">
+              <a:srgbClr val="000000">
+                <a:alpha val="63000"/>
+              </a:srgbClr>
+            </a:outerShdw>
+          </a:effectLst>
+        </a:effectStyle>
+      </a:effectStyleLst>
+      <a:bgFillStyleLst>
+        <a:solidFill>
+          <a:schemeClr val="phClr"/>
+        </a:solidFill>
+        <a:solidFill>
+          <a:schemeClr val="phClr">
+            <a:tint val="95000"/>
+            <a:satMod val="170000"/>
+          </a:schemeClr>
+        </a:solidFill>
+        <a:gradFill rotWithShape="1">
+          <a:gsLst>
+            <a:gs pos="0">
+              <a:schemeClr val="phClr">
+                <a:tint val="93000"/>
+                <a:satMod val="150000"/>
+                <a:shade val="98000"/>
+                <a:lumMod val="102000"/>
+              </a:schemeClr>
+            </a:gs>
+            <a:gs pos="50000">
+              <a:schemeClr val="phClr">
+                <a:tint val="98000"/>
+                <a:satMod val="130000"/>
+                <a:shade val="90000"/>
+                <a:lumMod val="103000"/>
+              </a:schemeClr>
+            </a:gs>
+            <a:gs pos="100000">
+              <a:schemeClr val="phClr">
+                <a:shade val="63000"/>
+                <a:satMod val="120000"/>
+              </a:schemeClr>
+            </a:gs>
+          </a:gsLst>
+          <a:lin ang="5400000" scaled="0"/>
+        </a:gradFill>
+      </a:bgFillStyleLst>
+    </a:fmtScheme>
+  </a:themeElements>
+  <a:extLst>
+    <a:ext uri="{05A4C25C-085E-4340-85A3-A5531E510DB2}">
+      <thm15:themeFamily xmlns:thm15="http://schemas.microsoft.com/office/thememl/2012/main" name="Office Theme" id="{62F939B6-93AF-4DB8-9C6B-D6C7DFDC589F}" vid="{4A3C46E8-61CC-4603-A589-7422A47A8E4A}"/>
+    </a:ext>
+  </a:extLst>
+</a:theme>
 </file>
--- a/南科大/SE2/presentation.pptx
+++ b/南科大/SE2/presentation.pptx
@@ -3761,7 +3761,7 @@
           <a:p>
             <a:r>
               <a:rPr lang="zh-CN" altLang="en-US" sz="3200"/>
-              <a:t>闽南语</a:t>
+              <a:t>闽南话</a:t>
             </a:r>
             <a:endParaRPr lang="zh-CN" altLang="en-US" sz="3200"/>
           </a:p>
@@ -5321,8 +5321,8 @@
         </p:nvSpPr>
         <p:spPr>
           <a:xfrm>
-            <a:off x="73025" y="3415665"/>
-            <a:ext cx="2527300" cy="802641"/>
+            <a:off x="2540" y="3415665"/>
+            <a:ext cx="2597785" cy="953135"/>
           </a:xfrm>
           <a:prstGeom prst="rect">
             <a:avLst/>
@@ -5336,10 +5336,10 @@
           <a:p>
             <a:pPr algn="ctr"/>
             <a:r>
-              <a:rPr lang="en-US" altLang="zh-CN" sz="2400"/>
+              <a:rPr lang="en-US" altLang="zh-CN" sz="2800"/>
               <a:t>Migrants from northern China</a:t>
             </a:r>
-            <a:endParaRPr lang="en-US" altLang="zh-CN" sz="2400"/>
+            <a:endParaRPr lang="en-US" altLang="zh-CN" sz="2800"/>
           </a:p>
         </p:txBody>
       </p:sp>
@@ -5352,7 +5352,7 @@
         <p:spPr>
           <a:xfrm>
             <a:off x="4342765" y="3415665"/>
-            <a:ext cx="2797810" cy="802641"/>
+            <a:ext cx="2797810" cy="953135"/>
           </a:xfrm>
           <a:prstGeom prst="rect">
             <a:avLst/>
@@ -5366,18 +5366,18 @@
           <a:p>
             <a:pPr algn="ctr"/>
             <a:r>
-              <a:rPr lang="en-US" altLang="zh-CN" sz="2400"/>
+              <a:rPr lang="en-US" altLang="zh-CN" sz="2800"/>
               <a:t>Southwestern</a:t>
             </a:r>
-            <a:endParaRPr lang="en-US" altLang="zh-CN" sz="2400"/>
+            <a:endParaRPr lang="en-US" altLang="zh-CN" sz="2800"/>
           </a:p>
           <a:p>
             <a:pPr algn="ctr"/>
             <a:r>
-              <a:rPr lang="en-US" altLang="zh-CN" sz="2400"/>
+              <a:rPr lang="en-US" altLang="zh-CN" sz="2800"/>
               <a:t>China</a:t>
             </a:r>
-            <a:endParaRPr lang="en-US" altLang="zh-CN" sz="2400"/>
+            <a:endParaRPr lang="en-US" altLang="zh-CN" sz="2800"/>
           </a:p>
         </p:txBody>
       </p:sp>
@@ -5392,7 +5392,7 @@
         </p:nvCxnSpPr>
         <p:spPr>
           <a:xfrm>
-            <a:off x="2600325" y="3830955"/>
+            <a:off x="2600325" y="3892550"/>
             <a:ext cx="1742440" cy="0"/>
           </a:xfrm>
           <a:prstGeom prst="straightConnector1">
@@ -5429,8 +5429,8 @@
         </p:nvSpPr>
         <p:spPr>
           <a:xfrm>
-            <a:off x="2750820" y="3261360"/>
-            <a:ext cx="1440815" cy="460375"/>
+            <a:off x="2600960" y="3261360"/>
+            <a:ext cx="1692275" cy="521970"/>
           </a:xfrm>
           <a:prstGeom prst="rect">
             <a:avLst/>
@@ -5444,10 +5444,10 @@
           <a:p>
             <a:pPr algn="ctr"/>
             <a:r>
-              <a:rPr lang="en-US" altLang="zh-CN" sz="2400"/>
+              <a:rPr lang="en-US" altLang="zh-CN" sz="2800"/>
               <a:t>Moved to</a:t>
             </a:r>
-            <a:endParaRPr lang="en-US" altLang="zh-CN" sz="2400"/>
+            <a:endParaRPr lang="en-US" altLang="zh-CN" sz="2800"/>
           </a:p>
         </p:txBody>
       </p:sp>
@@ -5459,8 +5459,8 @@
         </p:nvSpPr>
         <p:spPr>
           <a:xfrm>
-            <a:off x="2226945" y="4245610"/>
-            <a:ext cx="2488565" cy="802640"/>
+            <a:off x="2167255" y="4245610"/>
+            <a:ext cx="2876550" cy="953135"/>
           </a:xfrm>
           <a:prstGeom prst="rect">
             <a:avLst/>
@@ -5474,10 +5474,10 @@
           <a:p>
             <a:pPr algn="ctr"/>
             <a:r>
-              <a:rPr lang="en-US" altLang="zh-CN" sz="2400"/>
+              <a:rPr lang="en-US" altLang="zh-CN" sz="2800"/>
               <a:t>With techniques and tools</a:t>
             </a:r>
-            <a:endParaRPr lang="en-US" altLang="zh-CN" sz="2400"/>
+            <a:endParaRPr lang="en-US" altLang="zh-CN" sz="2800"/>
           </a:p>
         </p:txBody>
       </p:sp>
@@ -5490,7 +5490,7 @@
         <p:spPr>
           <a:xfrm>
             <a:off x="8088630" y="3415665"/>
-            <a:ext cx="3789680" cy="802641"/>
+            <a:ext cx="3789680" cy="953135"/>
           </a:xfrm>
           <a:prstGeom prst="rect">
             <a:avLst/>
@@ -5504,10 +5504,10 @@
           <a:p>
             <a:pPr algn="ctr"/>
             <a:r>
-              <a:rPr lang="en-US" altLang="zh-CN" sz="2400"/>
+              <a:rPr lang="en-US" altLang="zh-CN" sz="2800"/>
               <a:t>Influence government, trade and daily life</a:t>
             </a:r>
-            <a:endParaRPr lang="en-US" altLang="zh-CN" sz="2400"/>
+            <a:endParaRPr lang="en-US" altLang="zh-CN" sz="2800"/>
           </a:p>
         </p:txBody>
       </p:sp>
